--- a/submissions/pitch/pitch-editable.pptx
+++ b/submissions/pitch/pitch-editable.pptx
@@ -2,18 +2,18 @@
 <file path=ppt/presentation.xml><?xml version="1.0" encoding="utf-8"?>
 <p:presentation xmlns:p="http://schemas.openxmlformats.org/presentationml/2006/main">
   <p:sldMasterIdLst>
-    <p:sldMasterId xmlns:r="http://schemas.openxmlformats.org/officeDocument/2006/relationships" id="2147483648" r:id="R62dc106b939e4e45"/>
+    <p:sldMasterId xmlns:r="http://schemas.openxmlformats.org/officeDocument/2006/relationships" id="2147483648" r:id="Rafa5318c5c72451c"/>
   </p:sldMasterIdLst>
   <p:notesMasterIdLst>
-    <p:notesMasterId xmlns:r="http://schemas.openxmlformats.org/officeDocument/2006/relationships" r:id="R55a8751c53684e7c"/>
+    <p:notesMasterId xmlns:r="http://schemas.openxmlformats.org/officeDocument/2006/relationships" r:id="Rb02eef124d8e4376"/>
   </p:notesMasterIdLst>
   <p:sldIdLst>
-    <p:sldId xmlns:r="http://schemas.openxmlformats.org/officeDocument/2006/relationships" id="256" r:id="R2df41d7db60341e9"/>
-    <p:sldId xmlns:r="http://schemas.openxmlformats.org/officeDocument/2006/relationships" id="257" r:id="Rdf2273c301d64b93"/>
-    <p:sldId xmlns:r="http://schemas.openxmlformats.org/officeDocument/2006/relationships" id="258" r:id="R3d68f46409374b2a"/>
-    <p:sldId xmlns:r="http://schemas.openxmlformats.org/officeDocument/2006/relationships" id="259" r:id="R4cd3f84a86b34588"/>
-    <p:sldId xmlns:r="http://schemas.openxmlformats.org/officeDocument/2006/relationships" id="260" r:id="R581c6e869f1b4027"/>
-    <p:sldId xmlns:r="http://schemas.openxmlformats.org/officeDocument/2006/relationships" id="261" r:id="R0cf3a8c98b2e4edd"/>
+    <p:sldId xmlns:r="http://schemas.openxmlformats.org/officeDocument/2006/relationships" id="256" r:id="Rd98137ac917b4a69"/>
+    <p:sldId xmlns:r="http://schemas.openxmlformats.org/officeDocument/2006/relationships" id="257" r:id="R481dc5c167ca4381"/>
+    <p:sldId xmlns:r="http://schemas.openxmlformats.org/officeDocument/2006/relationships" id="258" r:id="R28eacfc30c5a460e"/>
+    <p:sldId xmlns:r="http://schemas.openxmlformats.org/officeDocument/2006/relationships" id="259" r:id="Reaa05814bf9a4976"/>
+    <p:sldId xmlns:r="http://schemas.openxmlformats.org/officeDocument/2006/relationships" id="260" r:id="Rcee72dd333e64d65"/>
+    <p:sldId xmlns:r="http://schemas.openxmlformats.org/officeDocument/2006/relationships" id="261" r:id="R3986d87e1ab94195"/>
   </p:sldIdLst>
   <p:sldSz cx="12192000" cy="6858000"/>
   <p:notesSz cx="6858000" cy="9144000"/>
@@ -617,7 +617,7 @@
           <a:lstStyle xmlns:a="http://schemas.openxmlformats.org/drawingml/2006/main"/>
           <a:p xmlns:a="http://schemas.openxmlformats.org/drawingml/2006/main">
             <a:r>
-              <a:t>Arimoclomol has a human approval in a different disease. Its reported effects depend on the cell and the stress. That makes exposure a gate, not a footnote. First, qualify the model and measurement. Second, test whether the proposed response occurs at relevant exposure. Third, require better chromosome segregation, while tracking division, survival and cell fate. More protein alone does not pass. Neither does an apparent improvement caused by stopping division or selectively losing abnormal cells. Failed controls are indeterminate; a valid drug negative stops that tested approach.</a:t>
+              <a:t>Arimoclomol has a human approval in a different disease. Its reported effects depend on the cell and the stress. That makes exposure a gate, not a footnote. First, qualify the model and measurement. Second, test whether the proposed response occurs at relevant exposure. Third, require better chromosome segregation, while tracking division, survival and cell fate. More protein alone does not pass. Neither does an apparent improvement caused by stopping division or selectively losing abnormal cells. Failed controls are indeterminate; imprecise results are inconclusive. Rejection requires ruling out the predefined worthwhile benefit for that tested approach.</a:t>
             </a:r>
           </a:p>
           <a:p xmlns:a="http://schemas.openxmlformats.org/drawingml/2006/main">
@@ -934,7 +934,7 @@
           <p:cNvPr id="3" name="Title">
             <a:extLst xmlns:a="http://schemas.openxmlformats.org/drawingml/2006/main">
               <a:ext uri="{FF2B5EF4-FFF2-40B4-BE49-F238E27FC236}">
-                <a16:creationId xmlns:a16="http://schemas.microsoft.com/office/drawing/2014/main" id="{9E26672A-0BD8-4B14-939D-E6E87825A6F7}"/>
+                <a16:creationId xmlns:a16="http://schemas.microsoft.com/office/drawing/2014/main" id="{33213186-2011-41DB-A487-0EA34FA2DC63}"/>
               </a:ext>
             </a:extLst>
           </p:cNvPr>
@@ -1163,7 +1163,7 @@
           <p:cNvPr id="2" name="Subtitle">
             <a:extLst xmlns:a="http://schemas.openxmlformats.org/drawingml/2006/main">
               <a:ext uri="{FF2B5EF4-FFF2-40B4-BE49-F238E27FC236}">
-                <a16:creationId xmlns:a16="http://schemas.microsoft.com/office/drawing/2014/main" id="{6D6C9126-9651-456E-BE42-32DD96EB3004}"/>
+                <a16:creationId xmlns:a16="http://schemas.microsoft.com/office/drawing/2014/main" id="{A40DC243-CE2F-4913-AA7C-DF1253F7078F}"/>
               </a:ext>
             </a:extLst>
           </p:cNvPr>
@@ -1409,7 +1409,7 @@
           <p:cNvPr id="2" name="Section title">
             <a:extLst xmlns:a="http://schemas.openxmlformats.org/drawingml/2006/main">
               <a:ext uri="{FF2B5EF4-FFF2-40B4-BE49-F238E27FC236}">
-                <a16:creationId xmlns:a16="http://schemas.microsoft.com/office/drawing/2014/main" id="{0EFFF192-AF36-4A9E-84D2-29D17A2D29A7}"/>
+                <a16:creationId xmlns:a16="http://schemas.microsoft.com/office/drawing/2014/main" id="{A8BBE07B-D9FA-4E2E-8DA3-723D8382A03C}"/>
               </a:ext>
             </a:extLst>
           </p:cNvPr>
@@ -1655,7 +1655,7 @@
           <p:cNvPr id="3" name="Title">
             <a:extLst xmlns:a="http://schemas.openxmlformats.org/drawingml/2006/main">
               <a:ext uri="{FF2B5EF4-FFF2-40B4-BE49-F238E27FC236}">
-                <a16:creationId xmlns:a16="http://schemas.microsoft.com/office/drawing/2014/main" id="{B4D52AAE-B93B-4D1C-ACE4-89B007F50A37}"/>
+                <a16:creationId xmlns:a16="http://schemas.microsoft.com/office/drawing/2014/main" id="{139E13A6-694C-4304-81F8-6A2BF92437F3}"/>
               </a:ext>
             </a:extLst>
           </p:cNvPr>
@@ -1884,7 +1884,7 @@
           <p:cNvPr id="2" name="Body">
             <a:extLst xmlns:a="http://schemas.openxmlformats.org/drawingml/2006/main">
               <a:ext uri="{FF2B5EF4-FFF2-40B4-BE49-F238E27FC236}">
-                <a16:creationId xmlns:a16="http://schemas.microsoft.com/office/drawing/2014/main" id="{F99218CB-44B8-4F42-B833-F6CD5396F78D}"/>
+                <a16:creationId xmlns:a16="http://schemas.microsoft.com/office/drawing/2014/main" id="{9FFADA0D-8CF7-450B-AF94-0E5F6241B06C}"/>
               </a:ext>
             </a:extLst>
           </p:cNvPr>
@@ -2130,7 +2130,7 @@
           <p:cNvPr id="4" name="Title">
             <a:extLst xmlns:a="http://schemas.openxmlformats.org/drawingml/2006/main">
               <a:ext uri="{FF2B5EF4-FFF2-40B4-BE49-F238E27FC236}">
-                <a16:creationId xmlns:a16="http://schemas.microsoft.com/office/drawing/2014/main" id="{B25283BC-8C54-4B0E-9853-B93D38C52FA5}"/>
+                <a16:creationId xmlns:a16="http://schemas.microsoft.com/office/drawing/2014/main" id="{7B7B5A64-82C4-4C7A-9C7D-70314B487E76}"/>
               </a:ext>
             </a:extLst>
           </p:cNvPr>
@@ -2359,7 +2359,7 @@
           <p:cNvPr id="2" name="Left column">
             <a:extLst xmlns:a="http://schemas.openxmlformats.org/drawingml/2006/main">
               <a:ext uri="{FF2B5EF4-FFF2-40B4-BE49-F238E27FC236}">
-                <a16:creationId xmlns:a16="http://schemas.microsoft.com/office/drawing/2014/main" id="{EBB644E3-C4CD-4031-9163-EE0808E0E314}"/>
+                <a16:creationId xmlns:a16="http://schemas.microsoft.com/office/drawing/2014/main" id="{3F8E1C51-AADF-4E80-86A4-323C8A57C161}"/>
               </a:ext>
             </a:extLst>
           </p:cNvPr>
@@ -2588,7 +2588,7 @@
           <p:cNvPr id="3" name="Right column">
             <a:extLst xmlns:a="http://schemas.openxmlformats.org/drawingml/2006/main">
               <a:ext uri="{FF2B5EF4-FFF2-40B4-BE49-F238E27FC236}">
-                <a16:creationId xmlns:a16="http://schemas.microsoft.com/office/drawing/2014/main" id="{A362B639-2792-4893-9BB5-8D9A038E4900}"/>
+                <a16:creationId xmlns:a16="http://schemas.microsoft.com/office/drawing/2014/main" id="{AB0B37ED-4236-4024-8F53-6D624FA48D6E}"/>
               </a:ext>
             </a:extLst>
           </p:cNvPr>
@@ -2834,7 +2834,7 @@
           <p:cNvPr id="3" name="Title">
             <a:extLst xmlns:a="http://schemas.openxmlformats.org/drawingml/2006/main">
               <a:ext uri="{FF2B5EF4-FFF2-40B4-BE49-F238E27FC236}">
-                <a16:creationId xmlns:a16="http://schemas.microsoft.com/office/drawing/2014/main" id="{62D6CEAD-56BD-487F-B823-1056F2CF354F}"/>
+                <a16:creationId xmlns:a16="http://schemas.microsoft.com/office/drawing/2014/main" id="{20AE6ED9-B877-4D9D-AAD5-8730471BD052}"/>
               </a:ext>
             </a:extLst>
           </p:cNvPr>
@@ -3063,7 +3063,7 @@
           <p:cNvPr id="2" name="Left column">
             <a:extLst xmlns:a="http://schemas.openxmlformats.org/drawingml/2006/main">
               <a:ext uri="{FF2B5EF4-FFF2-40B4-BE49-F238E27FC236}">
-                <a16:creationId xmlns:a16="http://schemas.microsoft.com/office/drawing/2014/main" id="{FF623D88-E874-48D2-A29A-CCB97CDCD2CC}"/>
+                <a16:creationId xmlns:a16="http://schemas.microsoft.com/office/drawing/2014/main" id="{EAE38C5F-7D84-48C4-8D8E-05274637D310}"/>
               </a:ext>
             </a:extLst>
           </p:cNvPr>
@@ -3330,12 +3330,12 @@
   </p:cSld>
   <p:clrMap bg1="lt1" tx1="dk1" bg2="lt2" tx2="dk2" accent1="accent1" accent2="accent2" accent3="accent3" accent4="accent4" accent5="accent5" accent6="accent6" hlink="hlink" folHlink="folHlink"/>
   <p:sldLayoutIdLst>
-    <p:sldLayoutId xmlns:r="http://schemas.openxmlformats.org/officeDocument/2006/relationships" id="2147483649" r:id="Rafd453d9c3a24c83"/>
-    <p:sldLayoutId xmlns:r="http://schemas.openxmlformats.org/officeDocument/2006/relationships" id="2147483650" r:id="Rf92a271fdaed4c18"/>
-    <p:sldLayoutId xmlns:r="http://schemas.openxmlformats.org/officeDocument/2006/relationships" id="2147483651" r:id="R2b38af82438d43e1"/>
-    <p:sldLayoutId xmlns:r="http://schemas.openxmlformats.org/officeDocument/2006/relationships" id="2147483652" r:id="Rec74878394824d1f"/>
-    <p:sldLayoutId xmlns:r="http://schemas.openxmlformats.org/officeDocument/2006/relationships" id="2147483653" r:id="R10ccd36aa1a441dc"/>
-    <p:sldLayoutId xmlns:r="http://schemas.openxmlformats.org/officeDocument/2006/relationships" id="2147483654" r:id="Rc45625d4b480496f"/>
+    <p:sldLayoutId xmlns:r="http://schemas.openxmlformats.org/officeDocument/2006/relationships" id="2147483649" r:id="Rfc0cb8d32bbc4365"/>
+    <p:sldLayoutId xmlns:r="http://schemas.openxmlformats.org/officeDocument/2006/relationships" id="2147483650" r:id="Ra677f5e220424af5"/>
+    <p:sldLayoutId xmlns:r="http://schemas.openxmlformats.org/officeDocument/2006/relationships" id="2147483651" r:id="Rf742069349334e45"/>
+    <p:sldLayoutId xmlns:r="http://schemas.openxmlformats.org/officeDocument/2006/relationships" id="2147483652" r:id="R51161aecb67d46b2"/>
+    <p:sldLayoutId xmlns:r="http://schemas.openxmlformats.org/officeDocument/2006/relationships" id="2147483653" r:id="R644f210e19c34de6"/>
+    <p:sldLayoutId xmlns:r="http://schemas.openxmlformats.org/officeDocument/2006/relationships" id="2147483654" r:id="R7d468a65e2284368"/>
   </p:sldLayoutIdLst>
   <p:txStyles>
     <p:titleStyle>
@@ -3886,7 +3886,7 @@
           <p:cNvPr id="8" name="">
             <a:extLst xmlns:a="http://schemas.openxmlformats.org/drawingml/2006/main">
               <a:ext uri="{FF2B5EF4-FFF2-40B4-BE49-F238E27FC236}">
-                <a16:creationId xmlns:a16="http://schemas.microsoft.com/office/drawing/2014/main" id="{0F0C3646-FD7E-4423-B13F-94ED5317265A}"/>
+                <a16:creationId xmlns:a16="http://schemas.microsoft.com/office/drawing/2014/main" id="{B17A3B96-022B-40A3-BA0B-3C38097F00E0}"/>
               </a:ext>
             </a:extLst>
           </p:cNvPr>
@@ -4042,7 +4042,7 @@
           <p:cNvPr id="2" name="">
             <a:extLst xmlns:a="http://schemas.openxmlformats.org/drawingml/2006/main">
               <a:ext uri="{FF2B5EF4-FFF2-40B4-BE49-F238E27FC236}">
-                <a16:creationId xmlns:a16="http://schemas.microsoft.com/office/drawing/2014/main" id="{3EA2881B-4E20-477E-97E2-250D40219977}"/>
+                <a16:creationId xmlns:a16="http://schemas.microsoft.com/office/drawing/2014/main" id="{ECB9AD98-87A9-42FB-8C98-9936EA791E7A}"/>
               </a:ext>
             </a:extLst>
           </p:cNvPr>
@@ -4198,7 +4198,7 @@
           <p:cNvPr id="3" name="">
             <a:extLst xmlns:a="http://schemas.openxmlformats.org/drawingml/2006/main">
               <a:ext uri="{FF2B5EF4-FFF2-40B4-BE49-F238E27FC236}">
-                <a16:creationId xmlns:a16="http://schemas.microsoft.com/office/drawing/2014/main" id="{027211C4-64A3-4D1B-A155-A33601701FED}"/>
+                <a16:creationId xmlns:a16="http://schemas.microsoft.com/office/drawing/2014/main" id="{4874946E-3960-4519-B30E-EDAD5BCBA488}"/>
               </a:ext>
             </a:extLst>
           </p:cNvPr>
@@ -4354,7 +4354,7 @@
           <p:cNvPr id="4" name="">
             <a:extLst xmlns:a="http://schemas.openxmlformats.org/drawingml/2006/main">
               <a:ext uri="{FF2B5EF4-FFF2-40B4-BE49-F238E27FC236}">
-                <a16:creationId xmlns:a16="http://schemas.microsoft.com/office/drawing/2014/main" id="{49641991-6C6B-40E0-8CC0-7E32E4B15352}"/>
+                <a16:creationId xmlns:a16="http://schemas.microsoft.com/office/drawing/2014/main" id="{1407AE52-AAAC-4854-B759-653EACD6BFEF}"/>
               </a:ext>
             </a:extLst>
           </p:cNvPr>
@@ -4510,7 +4510,7 @@
           <p:cNvPr id="5" name="">
             <a:extLst xmlns:a="http://schemas.openxmlformats.org/drawingml/2006/main">
               <a:ext uri="{FF2B5EF4-FFF2-40B4-BE49-F238E27FC236}">
-                <a16:creationId xmlns:a16="http://schemas.microsoft.com/office/drawing/2014/main" id="{AFCD3A64-78BA-4433-8814-A71412ECE6E2}"/>
+                <a16:creationId xmlns:a16="http://schemas.microsoft.com/office/drawing/2014/main" id="{085BDD4C-D27F-4300-918F-8B8E8F2E1993}"/>
               </a:ext>
             </a:extLst>
           </p:cNvPr>
@@ -4689,7 +4689,7 @@
           <p:cNvPr id="6" name="">
             <a:extLst xmlns:a="http://schemas.openxmlformats.org/drawingml/2006/main">
               <a:ext uri="{FF2B5EF4-FFF2-40B4-BE49-F238E27FC236}">
-                <a16:creationId xmlns:a16="http://schemas.microsoft.com/office/drawing/2014/main" id="{929B548C-9630-4334-9489-BE53D9A333DB}"/>
+                <a16:creationId xmlns:a16="http://schemas.microsoft.com/office/drawing/2014/main" id="{339BB9B3-1F8E-4A65-8F74-8BCFD0EC44FC}"/>
               </a:ext>
             </a:extLst>
           </p:cNvPr>
@@ -4868,7 +4868,7 @@
           <p:cNvPr id="7" name="">
             <a:extLst xmlns:a="http://schemas.openxmlformats.org/drawingml/2006/main">
               <a:ext uri="{FF2B5EF4-FFF2-40B4-BE49-F238E27FC236}">
-                <a16:creationId xmlns:a16="http://schemas.microsoft.com/office/drawing/2014/main" id="{4B491A65-30BC-4883-8863-C899720C249C}"/>
+                <a16:creationId xmlns:a16="http://schemas.microsoft.com/office/drawing/2014/main" id="{71391C01-CB57-442A-A030-D71E22945752}"/>
               </a:ext>
             </a:extLst>
           </p:cNvPr>
@@ -5045,7 +5045,7 @@
     </p:spTree>
     <p:extLst>
       <p:ext uri="{BB962C8B-B14F-4D97-AF65-F5344CB8AC3E}">
-        <p14:creationId xmlns:p14="http://schemas.microsoft.com/office/powerpoint/2010/main" val="1824133070"/>
+        <p14:creationId xmlns:p14="http://schemas.microsoft.com/office/powerpoint/2010/main" val="772576204"/>
       </p:ext>
     </p:extLst>
   </p:cSld>
@@ -5076,7 +5076,7 @@
           <p:cNvPr id="10" name="">
             <a:extLst xmlns:a="http://schemas.openxmlformats.org/drawingml/2006/main">
               <a:ext uri="{FF2B5EF4-FFF2-40B4-BE49-F238E27FC236}">
-                <a16:creationId xmlns:a16="http://schemas.microsoft.com/office/drawing/2014/main" id="{8092298C-82E9-48E2-A4D0-C8732BF995C6}"/>
+                <a16:creationId xmlns:a16="http://schemas.microsoft.com/office/drawing/2014/main" id="{3EF24068-485B-453A-BA0B-C91F5B5B342E}"/>
               </a:ext>
             </a:extLst>
           </p:cNvPr>
@@ -5232,7 +5232,7 @@
           <p:cNvPr id="2" name="">
             <a:extLst xmlns:a="http://schemas.openxmlformats.org/drawingml/2006/main">
               <a:ext uri="{FF2B5EF4-FFF2-40B4-BE49-F238E27FC236}">
-                <a16:creationId xmlns:a16="http://schemas.microsoft.com/office/drawing/2014/main" id="{351AD91F-85C9-4B2B-8941-0253FBA1834F}"/>
+                <a16:creationId xmlns:a16="http://schemas.microsoft.com/office/drawing/2014/main" id="{5E469EE0-D3B8-4537-8948-1FE59B00D213}"/>
               </a:ext>
             </a:extLst>
           </p:cNvPr>
@@ -5388,7 +5388,7 @@
           <p:cNvPr id="3" name="">
             <a:extLst xmlns:a="http://schemas.openxmlformats.org/drawingml/2006/main">
               <a:ext uri="{FF2B5EF4-FFF2-40B4-BE49-F238E27FC236}">
-                <a16:creationId xmlns:a16="http://schemas.microsoft.com/office/drawing/2014/main" id="{A1555F63-7145-4083-965D-E7F8DAEA019C}"/>
+                <a16:creationId xmlns:a16="http://schemas.microsoft.com/office/drawing/2014/main" id="{6B396105-0B19-44D9-B46D-593526F3547B}"/>
               </a:ext>
             </a:extLst>
           </p:cNvPr>
@@ -5544,7 +5544,7 @@
           <p:cNvPr id="4" name="">
             <a:extLst xmlns:a="http://schemas.openxmlformats.org/drawingml/2006/main">
               <a:ext uri="{FF2B5EF4-FFF2-40B4-BE49-F238E27FC236}">
-                <a16:creationId xmlns:a16="http://schemas.microsoft.com/office/drawing/2014/main" id="{AA239D85-1A59-41F0-93B0-12E1B8954A20}"/>
+                <a16:creationId xmlns:a16="http://schemas.microsoft.com/office/drawing/2014/main" id="{A1333F4C-A57F-41CB-9A55-725EB7BCB806}"/>
               </a:ext>
             </a:extLst>
           </p:cNvPr>
@@ -5700,7 +5700,7 @@
           <p:cNvPr id="5" name="">
             <a:extLst xmlns:a="http://schemas.openxmlformats.org/drawingml/2006/main">
               <a:ext uri="{FF2B5EF4-FFF2-40B4-BE49-F238E27FC236}">
-                <a16:creationId xmlns:a16="http://schemas.microsoft.com/office/drawing/2014/main" id="{40A40DB2-CCE0-4E11-B899-55AA0E57DFB0}"/>
+                <a16:creationId xmlns:a16="http://schemas.microsoft.com/office/drawing/2014/main" id="{B990EE14-CCA0-46B4-951C-D8EACDC6FFB4}"/>
               </a:ext>
             </a:extLst>
           </p:cNvPr>
@@ -5856,7 +5856,7 @@
           <p:cNvPr id="6" name="">
             <a:extLst xmlns:a="http://schemas.openxmlformats.org/drawingml/2006/main">
               <a:ext uri="{FF2B5EF4-FFF2-40B4-BE49-F238E27FC236}">
-                <a16:creationId xmlns:a16="http://schemas.microsoft.com/office/drawing/2014/main" id="{9DCB92E0-2E4B-401E-8B3E-4A889D607AA3}"/>
+                <a16:creationId xmlns:a16="http://schemas.microsoft.com/office/drawing/2014/main" id="{F84E5752-C2C0-4AF1-82BF-770FE314AF47}"/>
               </a:ext>
             </a:extLst>
           </p:cNvPr>
@@ -6035,7 +6035,7 @@
           <p:cNvPr id="7" name="">
             <a:extLst xmlns:a="http://schemas.openxmlformats.org/drawingml/2006/main">
               <a:ext uri="{FF2B5EF4-FFF2-40B4-BE49-F238E27FC236}">
-                <a16:creationId xmlns:a16="http://schemas.microsoft.com/office/drawing/2014/main" id="{C0BD546A-7DE5-4367-AF5C-32C583CDFB16}"/>
+                <a16:creationId xmlns:a16="http://schemas.microsoft.com/office/drawing/2014/main" id="{58436EDB-5D76-491D-830A-A9985FB89D3B}"/>
               </a:ext>
             </a:extLst>
           </p:cNvPr>
@@ -6191,7 +6191,7 @@
           <p:cNvPr id="8" name="">
             <a:extLst xmlns:a="http://schemas.openxmlformats.org/drawingml/2006/main">
               <a:ext uri="{FF2B5EF4-FFF2-40B4-BE49-F238E27FC236}">
-                <a16:creationId xmlns:a16="http://schemas.microsoft.com/office/drawing/2014/main" id="{9190D3CC-7E71-4ED2-A512-E07204A39DB4}"/>
+                <a16:creationId xmlns:a16="http://schemas.microsoft.com/office/drawing/2014/main" id="{867C8EAE-E6E3-4FBB-A818-0AA7E21568F2}"/>
               </a:ext>
             </a:extLst>
           </p:cNvPr>
@@ -6370,7 +6370,7 @@
           <p:cNvPr id="9" name="">
             <a:extLst xmlns:a="http://schemas.openxmlformats.org/drawingml/2006/main">
               <a:ext uri="{FF2B5EF4-FFF2-40B4-BE49-F238E27FC236}">
-                <a16:creationId xmlns:a16="http://schemas.microsoft.com/office/drawing/2014/main" id="{7BE398CC-A33D-4601-A225-1F8D327BBEDC}"/>
+                <a16:creationId xmlns:a16="http://schemas.microsoft.com/office/drawing/2014/main" id="{D9CF0EAA-4FC0-447E-A776-81F9DCC74B7C}"/>
               </a:ext>
             </a:extLst>
           </p:cNvPr>
@@ -6524,7 +6524,7 @@
     </p:spTree>
     <p:extLst>
       <p:ext uri="{BB962C8B-B14F-4D97-AF65-F5344CB8AC3E}">
-        <p14:creationId xmlns:p14="http://schemas.microsoft.com/office/powerpoint/2010/main" val="1140472446"/>
+        <p14:creationId xmlns:p14="http://schemas.microsoft.com/office/powerpoint/2010/main" val="829705835"/>
       </p:ext>
     </p:extLst>
   </p:cSld>
@@ -6555,7 +6555,7 @@
           <p:cNvPr id="14" name="">
             <a:extLst xmlns:a="http://schemas.openxmlformats.org/drawingml/2006/main">
               <a:ext uri="{FF2B5EF4-FFF2-40B4-BE49-F238E27FC236}">
-                <a16:creationId xmlns:a16="http://schemas.microsoft.com/office/drawing/2014/main" id="{28C25CEE-88BE-4CFC-BDB0-3D403E6C170E}"/>
+                <a16:creationId xmlns:a16="http://schemas.microsoft.com/office/drawing/2014/main" id="{0923F183-4C32-42B2-87C4-57C74FFC96A3}"/>
               </a:ext>
             </a:extLst>
           </p:cNvPr>
@@ -6711,7 +6711,7 @@
           <p:cNvPr id="2" name="">
             <a:extLst xmlns:a="http://schemas.openxmlformats.org/drawingml/2006/main">
               <a:ext uri="{FF2B5EF4-FFF2-40B4-BE49-F238E27FC236}">
-                <a16:creationId xmlns:a16="http://schemas.microsoft.com/office/drawing/2014/main" id="{4AA0EF36-F9AB-4860-8CD8-B80F4F27E12A}"/>
+                <a16:creationId xmlns:a16="http://schemas.microsoft.com/office/drawing/2014/main" id="{110A6920-854C-4CCB-B26D-AB01D37A6FCD}"/>
               </a:ext>
             </a:extLst>
           </p:cNvPr>
@@ -6867,7 +6867,7 @@
           <p:cNvPr id="3" name="">
             <a:extLst xmlns:a="http://schemas.openxmlformats.org/drawingml/2006/main">
               <a:ext uri="{FF2B5EF4-FFF2-40B4-BE49-F238E27FC236}">
-                <a16:creationId xmlns:a16="http://schemas.microsoft.com/office/drawing/2014/main" id="{8EB98FC6-055B-43D2-9274-F4AF9C84B92D}"/>
+                <a16:creationId xmlns:a16="http://schemas.microsoft.com/office/drawing/2014/main" id="{CAB99C2B-F325-4866-8F68-0995514228EF}"/>
               </a:ext>
             </a:extLst>
           </p:cNvPr>
@@ -7023,7 +7023,7 @@
           <p:cNvPr id="4" name="">
             <a:extLst xmlns:a="http://schemas.openxmlformats.org/drawingml/2006/main">
               <a:ext uri="{FF2B5EF4-FFF2-40B4-BE49-F238E27FC236}">
-                <a16:creationId xmlns:a16="http://schemas.microsoft.com/office/drawing/2014/main" id="{EB46C945-B9F0-42F2-BE8C-A4719FFC5286}"/>
+                <a16:creationId xmlns:a16="http://schemas.microsoft.com/office/drawing/2014/main" id="{04DEBED9-26D4-4404-BC2E-550A7786073B}"/>
               </a:ext>
             </a:extLst>
           </p:cNvPr>
@@ -7179,7 +7179,7 @@
           <p:cNvPr id="5" name="">
             <a:extLst xmlns:a="http://schemas.openxmlformats.org/drawingml/2006/main">
               <a:ext uri="{FF2B5EF4-FFF2-40B4-BE49-F238E27FC236}">
-                <a16:creationId xmlns:a16="http://schemas.microsoft.com/office/drawing/2014/main" id="{7F0318EB-3FAD-4356-9189-A7404A46C801}"/>
+                <a16:creationId xmlns:a16="http://schemas.microsoft.com/office/drawing/2014/main" id="{EF18561C-2965-41F8-AB12-BBBC0F1A955A}"/>
               </a:ext>
             </a:extLst>
           </p:cNvPr>
@@ -7335,7 +7335,7 @@
           <p:cNvPr id="6" name="">
             <a:extLst xmlns:a="http://schemas.openxmlformats.org/drawingml/2006/main">
               <a:ext uri="{FF2B5EF4-FFF2-40B4-BE49-F238E27FC236}">
-                <a16:creationId xmlns:a16="http://schemas.microsoft.com/office/drawing/2014/main" id="{A6B1AD68-C85D-4393-B520-6ED1A3331A2D}"/>
+                <a16:creationId xmlns:a16="http://schemas.microsoft.com/office/drawing/2014/main" id="{F710CFEC-3A3A-467F-9076-D5B91EF2A020}"/>
               </a:ext>
             </a:extLst>
           </p:cNvPr>
@@ -7491,7 +7491,7 @@
           <p:cNvPr id="7" name="">
             <a:extLst xmlns:a="http://schemas.openxmlformats.org/drawingml/2006/main">
               <a:ext uri="{FF2B5EF4-FFF2-40B4-BE49-F238E27FC236}">
-                <a16:creationId xmlns:a16="http://schemas.microsoft.com/office/drawing/2014/main" id="{44E40D9E-B261-4134-9B78-3A2D7755C27A}"/>
+                <a16:creationId xmlns:a16="http://schemas.microsoft.com/office/drawing/2014/main" id="{36ED53D6-71B9-4A71-A8E4-55B6D40BABD2}"/>
               </a:ext>
             </a:extLst>
           </p:cNvPr>
@@ -7647,7 +7647,7 @@
           <p:cNvPr id="8" name="">
             <a:extLst xmlns:a="http://schemas.openxmlformats.org/drawingml/2006/main">
               <a:ext uri="{FF2B5EF4-FFF2-40B4-BE49-F238E27FC236}">
-                <a16:creationId xmlns:a16="http://schemas.microsoft.com/office/drawing/2014/main" id="{C4014B52-3FB4-497C-89EB-C8D2CB9D833B}"/>
+                <a16:creationId xmlns:a16="http://schemas.microsoft.com/office/drawing/2014/main" id="{ADA79870-483F-48B6-B978-013349CF87EB}"/>
               </a:ext>
             </a:extLst>
           </p:cNvPr>
@@ -7803,7 +7803,7 @@
           <p:cNvPr id="9" name="">
             <a:extLst xmlns:a="http://schemas.openxmlformats.org/drawingml/2006/main">
               <a:ext uri="{FF2B5EF4-FFF2-40B4-BE49-F238E27FC236}">
-                <a16:creationId xmlns:a16="http://schemas.microsoft.com/office/drawing/2014/main" id="{03845682-3950-4282-9D90-AC542B32BDC8}"/>
+                <a16:creationId xmlns:a16="http://schemas.microsoft.com/office/drawing/2014/main" id="{799FF9C4-1313-41F3-8E54-575854E4EF0B}"/>
               </a:ext>
             </a:extLst>
           </p:cNvPr>
@@ -7959,7 +7959,7 @@
           <p:cNvPr id="10" name="">
             <a:extLst xmlns:a="http://schemas.openxmlformats.org/drawingml/2006/main">
               <a:ext uri="{FF2B5EF4-FFF2-40B4-BE49-F238E27FC236}">
-                <a16:creationId xmlns:a16="http://schemas.microsoft.com/office/drawing/2014/main" id="{11539135-533C-4241-B4C1-D4E2225B08E0}"/>
+                <a16:creationId xmlns:a16="http://schemas.microsoft.com/office/drawing/2014/main" id="{F64A83AA-17B9-4CA6-93A3-6EF4B01E3A9A}"/>
               </a:ext>
             </a:extLst>
           </p:cNvPr>
@@ -8115,7 +8115,7 @@
           <p:cNvPr id="11" name="">
             <a:extLst xmlns:a="http://schemas.openxmlformats.org/drawingml/2006/main">
               <a:ext uri="{FF2B5EF4-FFF2-40B4-BE49-F238E27FC236}">
-                <a16:creationId xmlns:a16="http://schemas.microsoft.com/office/drawing/2014/main" id="{8D306007-3E83-4301-8A9F-06A527335EA7}"/>
+                <a16:creationId xmlns:a16="http://schemas.microsoft.com/office/drawing/2014/main" id="{ED7D8125-00D4-43C1-AF24-CC9953EF460B}"/>
               </a:ext>
             </a:extLst>
           </p:cNvPr>
@@ -8271,7 +8271,7 @@
           <p:cNvPr id="12" name="">
             <a:extLst xmlns:a="http://schemas.openxmlformats.org/drawingml/2006/main">
               <a:ext uri="{FF2B5EF4-FFF2-40B4-BE49-F238E27FC236}">
-                <a16:creationId xmlns:a16="http://schemas.microsoft.com/office/drawing/2014/main" id="{9FEC8039-ECB6-4A20-9A18-7C3D4A3265D1}"/>
+                <a16:creationId xmlns:a16="http://schemas.microsoft.com/office/drawing/2014/main" id="{8A35DA0E-DD17-41B8-9A68-D31EFAC3E493}"/>
               </a:ext>
             </a:extLst>
           </p:cNvPr>
@@ -8427,7 +8427,7 @@
           <p:cNvPr id="13" name="">
             <a:extLst xmlns:a="http://schemas.openxmlformats.org/drawingml/2006/main">
               <a:ext uri="{FF2B5EF4-FFF2-40B4-BE49-F238E27FC236}">
-                <a16:creationId xmlns:a16="http://schemas.microsoft.com/office/drawing/2014/main" id="{DD36833D-E75F-4F0C-8FFF-653152FB61DB}"/>
+                <a16:creationId xmlns:a16="http://schemas.microsoft.com/office/drawing/2014/main" id="{D441342C-23A2-4976-A871-93AD7F660A80}"/>
               </a:ext>
             </a:extLst>
           </p:cNvPr>
@@ -8573,7 +8573,7 @@
                 <a:ea typeface="Arial"/>
                 <a:cs typeface="Arial"/>
               </a:rPr>
-              <a:t>Failed controls: indeterminate. Valid drug negative: stop the tested approach.</a:t>
+              <a:t>Failed controls: indeterminate. Imprecise benefit: inconclusive.</a:t>
             </a:r>
           </a:p>
         </p:txBody>
@@ -8581,7 +8581,7 @@
     </p:spTree>
     <p:extLst>
       <p:ext uri="{BB962C8B-B14F-4D97-AF65-F5344CB8AC3E}">
-        <p14:creationId xmlns:p14="http://schemas.microsoft.com/office/powerpoint/2010/main" val="1319984067"/>
+        <p14:creationId xmlns:p14="http://schemas.microsoft.com/office/powerpoint/2010/main" val="450152459"/>
       </p:ext>
     </p:extLst>
   </p:cSld>
@@ -8612,7 +8612,7 @@
           <p:cNvPr id="8" name="">
             <a:extLst xmlns:a="http://schemas.openxmlformats.org/drawingml/2006/main">
               <a:ext uri="{FF2B5EF4-FFF2-40B4-BE49-F238E27FC236}">
-                <a16:creationId xmlns:a16="http://schemas.microsoft.com/office/drawing/2014/main" id="{1A4C2374-A9F1-443C-BCD8-51716206D385}"/>
+                <a16:creationId xmlns:a16="http://schemas.microsoft.com/office/drawing/2014/main" id="{F7921839-C9E2-485D-8BEC-C77FE55CE71B}"/>
               </a:ext>
             </a:extLst>
           </p:cNvPr>
@@ -8768,7 +8768,7 @@
           <p:cNvPr id="2" name="">
             <a:extLst xmlns:a="http://schemas.openxmlformats.org/drawingml/2006/main">
               <a:ext uri="{FF2B5EF4-FFF2-40B4-BE49-F238E27FC236}">
-                <a16:creationId xmlns:a16="http://schemas.microsoft.com/office/drawing/2014/main" id="{EBBA75DD-244D-402A-BFC0-7B746125AC1D}"/>
+                <a16:creationId xmlns:a16="http://schemas.microsoft.com/office/drawing/2014/main" id="{8D91B7CF-5870-440D-9B00-466AFEBB62C7}"/>
               </a:ext>
             </a:extLst>
           </p:cNvPr>
@@ -8924,7 +8924,7 @@
           <p:cNvPr id="3" name="">
             <a:extLst xmlns:a="http://schemas.openxmlformats.org/drawingml/2006/main">
               <a:ext uri="{FF2B5EF4-FFF2-40B4-BE49-F238E27FC236}">
-                <a16:creationId xmlns:a16="http://schemas.microsoft.com/office/drawing/2014/main" id="{B6FE5B9C-2732-40ED-8999-6CD9C5DE9ABB}"/>
+                <a16:creationId xmlns:a16="http://schemas.microsoft.com/office/drawing/2014/main" id="{FA6D18F6-62BB-4B9A-94E7-BC0E510E680A}"/>
               </a:ext>
             </a:extLst>
           </p:cNvPr>
@@ -9080,7 +9080,7 @@
           <p:cNvPr id="4" name="">
             <a:extLst xmlns:a="http://schemas.openxmlformats.org/drawingml/2006/main">
               <a:ext uri="{FF2B5EF4-FFF2-40B4-BE49-F238E27FC236}">
-                <a16:creationId xmlns:a16="http://schemas.microsoft.com/office/drawing/2014/main" id="{F181680B-8BB7-4CD7-BB44-6E36FD41DB30}"/>
+                <a16:creationId xmlns:a16="http://schemas.microsoft.com/office/drawing/2014/main" id="{9EAE199B-E311-48A1-82AC-4FDE572B9897}"/>
               </a:ext>
             </a:extLst>
           </p:cNvPr>
@@ -9090,7 +9090,7 @@
           <p:nvPr/>
         </p:nvPicPr>
         <p:blipFill>
-          <a:blip xmlns:r="http://schemas.openxmlformats.org/officeDocument/2006/relationships" xmlns:a="http://schemas.openxmlformats.org/drawingml/2006/main" r:embed="R3127376f20c947ed"/>
+          <a:blip xmlns:r="http://schemas.openxmlformats.org/officeDocument/2006/relationships" xmlns:a="http://schemas.openxmlformats.org/drawingml/2006/main" r:embed="R20eb72fb89ab42d4"/>
           <a:stretch xmlns:a="http://schemas.openxmlformats.org/drawingml/2006/main"/>
         </p:blipFill>
         <p:spPr>
@@ -9108,7 +9108,7 @@
           <p:cNvPr id="5" name="">
             <a:extLst xmlns:a="http://schemas.openxmlformats.org/drawingml/2006/main">
               <a:ext uri="{FF2B5EF4-FFF2-40B4-BE49-F238E27FC236}">
-                <a16:creationId xmlns:a16="http://schemas.microsoft.com/office/drawing/2014/main" id="{1BC9EB1C-4DFB-462B-8051-A4446A6A9869}"/>
+                <a16:creationId xmlns:a16="http://schemas.microsoft.com/office/drawing/2014/main" id="{91C27E03-CE54-4DD5-8A63-CED22F23F59C}"/>
               </a:ext>
             </a:extLst>
           </p:cNvPr>
@@ -9264,7 +9264,7 @@
           <p:cNvPr id="6" name="">
             <a:extLst xmlns:a="http://schemas.openxmlformats.org/drawingml/2006/main">
               <a:ext uri="{FF2B5EF4-FFF2-40B4-BE49-F238E27FC236}">
-                <a16:creationId xmlns:a16="http://schemas.microsoft.com/office/drawing/2014/main" id="{A0386C30-A5F4-41FB-A68D-4129467B735C}"/>
+                <a16:creationId xmlns:a16="http://schemas.microsoft.com/office/drawing/2014/main" id="{107E701A-6D80-47DE-A3C8-A17550537059}"/>
               </a:ext>
             </a:extLst>
           </p:cNvPr>
@@ -9466,7 +9466,7 @@
           <p:cNvPr id="7" name="">
             <a:extLst xmlns:a="http://schemas.openxmlformats.org/drawingml/2006/main">
               <a:ext uri="{FF2B5EF4-FFF2-40B4-BE49-F238E27FC236}">
-                <a16:creationId xmlns:a16="http://schemas.microsoft.com/office/drawing/2014/main" id="{A96ADB55-4218-4156-B600-0A30C7317F49}"/>
+                <a16:creationId xmlns:a16="http://schemas.microsoft.com/office/drawing/2014/main" id="{4A798470-100E-4940-B55A-586A5A10C701}"/>
               </a:ext>
             </a:extLst>
           </p:cNvPr>
@@ -9643,7 +9643,7 @@
     </p:spTree>
     <p:extLst>
       <p:ext uri="{BB962C8B-B14F-4D97-AF65-F5344CB8AC3E}">
-        <p14:creationId xmlns:p14="http://schemas.microsoft.com/office/powerpoint/2010/main" val="1764304328"/>
+        <p14:creationId xmlns:p14="http://schemas.microsoft.com/office/powerpoint/2010/main" val="544544023"/>
       </p:ext>
     </p:extLst>
   </p:cSld>
@@ -9674,7 +9674,7 @@
           <p:cNvPr id="9" name="">
             <a:extLst xmlns:a="http://schemas.openxmlformats.org/drawingml/2006/main">
               <a:ext uri="{FF2B5EF4-FFF2-40B4-BE49-F238E27FC236}">
-                <a16:creationId xmlns:a16="http://schemas.microsoft.com/office/drawing/2014/main" id="{B6CB65B3-4CA2-465C-B1AE-C71011499843}"/>
+                <a16:creationId xmlns:a16="http://schemas.microsoft.com/office/drawing/2014/main" id="{A2FD012E-B9E8-4CF9-8D05-58A8A888734B}"/>
               </a:ext>
             </a:extLst>
           </p:cNvPr>
@@ -9830,7 +9830,7 @@
           <p:cNvPr id="2" name="">
             <a:extLst xmlns:a="http://schemas.openxmlformats.org/drawingml/2006/main">
               <a:ext uri="{FF2B5EF4-FFF2-40B4-BE49-F238E27FC236}">
-                <a16:creationId xmlns:a16="http://schemas.microsoft.com/office/drawing/2014/main" id="{9B6A8B4C-9F3E-4460-BA06-E7D6A071C912}"/>
+                <a16:creationId xmlns:a16="http://schemas.microsoft.com/office/drawing/2014/main" id="{BA3EED25-DC51-4DB2-B486-2F477713471D}"/>
               </a:ext>
             </a:extLst>
           </p:cNvPr>
@@ -9986,7 +9986,7 @@
           <p:cNvPr id="3" name="">
             <a:extLst xmlns:a="http://schemas.openxmlformats.org/drawingml/2006/main">
               <a:ext uri="{FF2B5EF4-FFF2-40B4-BE49-F238E27FC236}">
-                <a16:creationId xmlns:a16="http://schemas.microsoft.com/office/drawing/2014/main" id="{023F6515-FA28-4606-9B1D-76712BDB6E5A}"/>
+                <a16:creationId xmlns:a16="http://schemas.microsoft.com/office/drawing/2014/main" id="{D7F8E497-020F-44A2-9D74-9BEE49ACC154}"/>
               </a:ext>
             </a:extLst>
           </p:cNvPr>
@@ -10142,7 +10142,7 @@
           <p:cNvPr id="4" name="">
             <a:extLst xmlns:a="http://schemas.openxmlformats.org/drawingml/2006/main">
               <a:ext uri="{FF2B5EF4-FFF2-40B4-BE49-F238E27FC236}">
-                <a16:creationId xmlns:a16="http://schemas.microsoft.com/office/drawing/2014/main" id="{E291F26E-FBA0-411C-AA08-9FE7DD8BBCED}"/>
+                <a16:creationId xmlns:a16="http://schemas.microsoft.com/office/drawing/2014/main" id="{844D340B-D18B-464B-AA5C-58F46E879747}"/>
               </a:ext>
             </a:extLst>
           </p:cNvPr>
@@ -10298,7 +10298,7 @@
           <p:cNvPr id="5" name="">
             <a:extLst xmlns:a="http://schemas.openxmlformats.org/drawingml/2006/main">
               <a:ext uri="{FF2B5EF4-FFF2-40B4-BE49-F238E27FC236}">
-                <a16:creationId xmlns:a16="http://schemas.microsoft.com/office/drawing/2014/main" id="{E660D5CB-3BF0-4832-98A7-65DDBB4F7A7F}"/>
+                <a16:creationId xmlns:a16="http://schemas.microsoft.com/office/drawing/2014/main" id="{80524306-BC06-4755-82D1-257F827108DA}"/>
               </a:ext>
             </a:extLst>
           </p:cNvPr>
@@ -10454,7 +10454,7 @@
           <p:cNvPr id="6" name="">
             <a:extLst xmlns:a="http://schemas.openxmlformats.org/drawingml/2006/main">
               <a:ext uri="{FF2B5EF4-FFF2-40B4-BE49-F238E27FC236}">
-                <a16:creationId xmlns:a16="http://schemas.microsoft.com/office/drawing/2014/main" id="{1B3E0DD4-35A1-4BF1-8308-48311D1958CC}"/>
+                <a16:creationId xmlns:a16="http://schemas.microsoft.com/office/drawing/2014/main" id="{99D26763-D367-4BF8-A174-EBA1888F8D54}"/>
               </a:ext>
             </a:extLst>
           </p:cNvPr>
@@ -10633,7 +10633,7 @@
           <p:cNvPr id="7" name="">
             <a:extLst xmlns:a="http://schemas.openxmlformats.org/drawingml/2006/main">
               <a:ext uri="{FF2B5EF4-FFF2-40B4-BE49-F238E27FC236}">
-                <a16:creationId xmlns:a16="http://schemas.microsoft.com/office/drawing/2014/main" id="{85DE068E-2829-4C20-B726-501D38596083}"/>
+                <a16:creationId xmlns:a16="http://schemas.microsoft.com/office/drawing/2014/main" id="{C0DB61E8-80CC-454E-A88E-2F914C706C8A}"/>
               </a:ext>
             </a:extLst>
           </p:cNvPr>
@@ -10789,7 +10789,7 @@
           <p:cNvPr id="8" name="">
             <a:extLst xmlns:a="http://schemas.openxmlformats.org/drawingml/2006/main">
               <a:ext uri="{FF2B5EF4-FFF2-40B4-BE49-F238E27FC236}">
-                <a16:creationId xmlns:a16="http://schemas.microsoft.com/office/drawing/2014/main" id="{38A0DDFC-D1B1-46F7-B6F7-BA0BE2CFD66F}"/>
+                <a16:creationId xmlns:a16="http://schemas.microsoft.com/office/drawing/2014/main" id="{0AF138E5-DEE7-4E26-9D4D-D0956F8B9736}"/>
               </a:ext>
             </a:extLst>
           </p:cNvPr>
@@ -10943,7 +10943,7 @@
     </p:spTree>
     <p:extLst>
       <p:ext uri="{BB962C8B-B14F-4D97-AF65-F5344CB8AC3E}">
-        <p14:creationId xmlns:p14="http://schemas.microsoft.com/office/powerpoint/2010/main" val="2123343537"/>
+        <p14:creationId xmlns:p14="http://schemas.microsoft.com/office/powerpoint/2010/main" val="383201112"/>
       </p:ext>
     </p:extLst>
   </p:cSld>
@@ -10974,7 +10974,7 @@
           <p:cNvPr id="9" name="">
             <a:extLst xmlns:a="http://schemas.openxmlformats.org/drawingml/2006/main">
               <a:ext uri="{FF2B5EF4-FFF2-40B4-BE49-F238E27FC236}">
-                <a16:creationId xmlns:a16="http://schemas.microsoft.com/office/drawing/2014/main" id="{6DA3F263-58BC-4E93-A5EF-B03AED03BA09}"/>
+                <a16:creationId xmlns:a16="http://schemas.microsoft.com/office/drawing/2014/main" id="{EAB6B0D7-6B9C-41D1-B8C8-1B60C82D6496}"/>
               </a:ext>
             </a:extLst>
           </p:cNvPr>
@@ -11130,7 +11130,7 @@
           <p:cNvPr id="2" name="">
             <a:extLst xmlns:a="http://schemas.openxmlformats.org/drawingml/2006/main">
               <a:ext uri="{FF2B5EF4-FFF2-40B4-BE49-F238E27FC236}">
-                <a16:creationId xmlns:a16="http://schemas.microsoft.com/office/drawing/2014/main" id="{3FEACB47-71E6-4F64-B52E-656C525D95C7}"/>
+                <a16:creationId xmlns:a16="http://schemas.microsoft.com/office/drawing/2014/main" id="{490E6C18-4DCB-4278-A2A5-F25070191DAB}"/>
               </a:ext>
             </a:extLst>
           </p:cNvPr>
@@ -11286,7 +11286,7 @@
           <p:cNvPr id="3" name="">
             <a:extLst xmlns:a="http://schemas.openxmlformats.org/drawingml/2006/main">
               <a:ext uri="{FF2B5EF4-FFF2-40B4-BE49-F238E27FC236}">
-                <a16:creationId xmlns:a16="http://schemas.microsoft.com/office/drawing/2014/main" id="{0382ADFD-672E-403B-86C1-6FA07DC1A740}"/>
+                <a16:creationId xmlns:a16="http://schemas.microsoft.com/office/drawing/2014/main" id="{3B1728DF-7CC7-4319-8250-E698D9C1340C}"/>
               </a:ext>
             </a:extLst>
           </p:cNvPr>
@@ -11442,7 +11442,7 @@
           <p:cNvPr id="4" name="">
             <a:extLst xmlns:a="http://schemas.openxmlformats.org/drawingml/2006/main">
               <a:ext uri="{FF2B5EF4-FFF2-40B4-BE49-F238E27FC236}">
-                <a16:creationId xmlns:a16="http://schemas.microsoft.com/office/drawing/2014/main" id="{C8282A43-CE61-4DC9-933D-B4C502930E1B}"/>
+                <a16:creationId xmlns:a16="http://schemas.microsoft.com/office/drawing/2014/main" id="{1FDB4CC0-8E6A-43AF-A5AB-24F2D5C59E66}"/>
               </a:ext>
             </a:extLst>
           </p:cNvPr>
@@ -11621,7 +11621,7 @@
           <p:cNvPr id="5" name="">
             <a:extLst xmlns:a="http://schemas.openxmlformats.org/drawingml/2006/main">
               <a:ext uri="{FF2B5EF4-FFF2-40B4-BE49-F238E27FC236}">
-                <a16:creationId xmlns:a16="http://schemas.microsoft.com/office/drawing/2014/main" id="{6A473AAB-27FB-4F1A-85E8-A14FC2D1517C}"/>
+                <a16:creationId xmlns:a16="http://schemas.microsoft.com/office/drawing/2014/main" id="{C7B3F6D4-5ACF-42ED-B487-E7117893040F}"/>
               </a:ext>
             </a:extLst>
           </p:cNvPr>
@@ -11777,7 +11777,7 @@
           <p:cNvPr id="6" name="">
             <a:extLst xmlns:a="http://schemas.openxmlformats.org/drawingml/2006/main">
               <a:ext uri="{FF2B5EF4-FFF2-40B4-BE49-F238E27FC236}">
-                <a16:creationId xmlns:a16="http://schemas.microsoft.com/office/drawing/2014/main" id="{E0EB1513-8980-49DC-A425-6015282F326F}"/>
+                <a16:creationId xmlns:a16="http://schemas.microsoft.com/office/drawing/2014/main" id="{DB980BD5-7E77-44E1-B487-E5D165EAAE2A}"/>
               </a:ext>
             </a:extLst>
           </p:cNvPr>
@@ -11956,7 +11956,7 @@
           <p:cNvPr id="7" name="">
             <a:extLst xmlns:a="http://schemas.openxmlformats.org/drawingml/2006/main">
               <a:ext uri="{FF2B5EF4-FFF2-40B4-BE49-F238E27FC236}">
-                <a16:creationId xmlns:a16="http://schemas.microsoft.com/office/drawing/2014/main" id="{E9897986-353D-45A1-9DFE-8CF319399A2B}"/>
+                <a16:creationId xmlns:a16="http://schemas.microsoft.com/office/drawing/2014/main" id="{5D2BEB0C-1FC0-4558-82B9-4752616A229B}"/>
               </a:ext>
             </a:extLst>
           </p:cNvPr>
@@ -12112,7 +12112,7 @@
           <p:cNvPr id="8" name="">
             <a:extLst xmlns:a="http://schemas.openxmlformats.org/drawingml/2006/main">
               <a:ext uri="{FF2B5EF4-FFF2-40B4-BE49-F238E27FC236}">
-                <a16:creationId xmlns:a16="http://schemas.microsoft.com/office/drawing/2014/main" id="{B225B3AD-8A3A-4357-95AE-2C69EB7D5FD5}"/>
+                <a16:creationId xmlns:a16="http://schemas.microsoft.com/office/drawing/2014/main" id="{89A7A01D-FA81-49EC-9E05-6288A134D280}"/>
               </a:ext>
             </a:extLst>
           </p:cNvPr>
@@ -12289,7 +12289,7 @@
     </p:spTree>
     <p:extLst>
       <p:ext uri="{BB962C8B-B14F-4D97-AF65-F5344CB8AC3E}">
-        <p14:creationId xmlns:p14="http://schemas.microsoft.com/office/powerpoint/2010/main" val="814717005"/>
+        <p14:creationId xmlns:p14="http://schemas.microsoft.com/office/powerpoint/2010/main" val="1875102641"/>
       </p:ext>
     </p:extLst>
   </p:cSld>

--- a/submissions/pitch/pitch-editable.pptx
+++ b/submissions/pitch/pitch-editable.pptx
@@ -2,18 +2,18 @@
 <file path=ppt/presentation.xml><?xml version="1.0" encoding="utf-8"?>
 <p:presentation xmlns:p="http://schemas.openxmlformats.org/presentationml/2006/main">
   <p:sldMasterIdLst>
-    <p:sldMasterId xmlns:r="http://schemas.openxmlformats.org/officeDocument/2006/relationships" id="2147483648" r:id="Rafa5318c5c72451c"/>
+    <p:sldMasterId xmlns:r="http://schemas.openxmlformats.org/officeDocument/2006/relationships" id="2147483648" r:id="Reeb124c1bf334d01"/>
   </p:sldMasterIdLst>
   <p:notesMasterIdLst>
-    <p:notesMasterId xmlns:r="http://schemas.openxmlformats.org/officeDocument/2006/relationships" r:id="Rb02eef124d8e4376"/>
+    <p:notesMasterId xmlns:r="http://schemas.openxmlformats.org/officeDocument/2006/relationships" r:id="R95f541fcda6647ba"/>
   </p:notesMasterIdLst>
   <p:sldIdLst>
-    <p:sldId xmlns:r="http://schemas.openxmlformats.org/officeDocument/2006/relationships" id="256" r:id="Rd98137ac917b4a69"/>
-    <p:sldId xmlns:r="http://schemas.openxmlformats.org/officeDocument/2006/relationships" id="257" r:id="R481dc5c167ca4381"/>
-    <p:sldId xmlns:r="http://schemas.openxmlformats.org/officeDocument/2006/relationships" id="258" r:id="R28eacfc30c5a460e"/>
-    <p:sldId xmlns:r="http://schemas.openxmlformats.org/officeDocument/2006/relationships" id="259" r:id="Reaa05814bf9a4976"/>
-    <p:sldId xmlns:r="http://schemas.openxmlformats.org/officeDocument/2006/relationships" id="260" r:id="Rcee72dd333e64d65"/>
-    <p:sldId xmlns:r="http://schemas.openxmlformats.org/officeDocument/2006/relationships" id="261" r:id="R3986d87e1ab94195"/>
+    <p:sldId xmlns:r="http://schemas.openxmlformats.org/officeDocument/2006/relationships" id="256" r:id="Rd560c23864ba47d3"/>
+    <p:sldId xmlns:r="http://schemas.openxmlformats.org/officeDocument/2006/relationships" id="257" r:id="Ra8ff1ba2e7d14078"/>
+    <p:sldId xmlns:r="http://schemas.openxmlformats.org/officeDocument/2006/relationships" id="258" r:id="R3a23deec2b544a1c"/>
+    <p:sldId xmlns:r="http://schemas.openxmlformats.org/officeDocument/2006/relationships" id="259" r:id="R0fabc190a12e4c46"/>
+    <p:sldId xmlns:r="http://schemas.openxmlformats.org/officeDocument/2006/relationships" id="260" r:id="Rf28e243fa24340bc"/>
+    <p:sldId xmlns:r="http://schemas.openxmlformats.org/officeDocument/2006/relationships" id="261" r:id="R5b59a9299c9d4750"/>
   </p:sldIdLst>
   <p:sldSz cx="12192000" cy="6858000"/>
   <p:notesSz cx="6858000" cy="9144000"/>
@@ -462,7 +462,12 @@
           </a:p>
           <a:p xmlns:a="http://schemas.openxmlformats.org/drawingml/2006/main">
             <a:r>
-              <a:t>See the Track 2 report for linked primary references. Proposal, not demonstrated therapeutic rescue.</a:t>
+              <a:t>submissions/adriamasnou_track2_report.md</a:t>
+            </a:r>
+          </a:p>
+          <a:p xmlns:a="http://schemas.openxmlformats.org/drawingml/2006/main">
+            <a:r>
+              <a:t>Research proposal. No demonstrated therapeutic rescue or clinical eligibility result.</a:t>
             </a:r>
           </a:p>
         </p:txBody>
@@ -532,7 +537,7 @@
           <a:lstStyle xmlns:a="http://schemas.openxmlformats.org/drawingml/2006/main"/>
           <a:p xmlns:a="http://schemas.openxmlformats.org/drawingml/2006/main">
             <a:r>
-              <a:t>The two identified variants affect the gene that makes Bub R one, a protein involved in chromosome separation. Their phase is inferred. The exact protein consequences remain unmeasured. The missense variant could reduce abundance, impair function, do both, or remain indeterminate. We compare full-length normal and altered protein at matched abundance. An isolated fragment's melting curve cannot settle that question.</a:t>
+              <a:t>The two identified variants affect the gene that makes Bub R one, a protein involved in chromosome separation. Their phase is inferred. The exact protein consequences remain unmeasured. The missense variant could reduce abundance, impair function, do both, or remain indeterminate. The proposed experiment compares full-length normal and altered protein at matched abundance. An isolated fragment's melting curve cannot settle that question.</a:t>
             </a:r>
           </a:p>
           <a:p xmlns:a="http://schemas.openxmlformats.org/drawingml/2006/main">
@@ -547,7 +552,12 @@
           </a:p>
           <a:p xmlns:a="http://schemas.openxmlformats.org/drawingml/2006/main">
             <a:r>
-              <a:t>See the Track 2 report for linked primary references. Proposal, not demonstrated therapeutic rescue.</a:t>
+              <a:t>submissions/adriamasnou_track2_report.md</a:t>
+            </a:r>
+          </a:p>
+          <a:p xmlns:a="http://schemas.openxmlformats.org/drawingml/2006/main">
+            <a:r>
+              <a:t>Research proposal. No demonstrated therapeutic rescue or clinical eligibility result.</a:t>
             </a:r>
           </a:p>
         </p:txBody>
@@ -617,7 +627,7 @@
           <a:lstStyle xmlns:a="http://schemas.openxmlformats.org/drawingml/2006/main"/>
           <a:p xmlns:a="http://schemas.openxmlformats.org/drawingml/2006/main">
             <a:r>
-              <a:t>Arimoclomol has a human approval in a different disease. Its reported effects depend on the cell and the stress. That makes exposure a gate, not a footnote. First, qualify the model and measurement. Second, test whether the proposed response occurs at relevant exposure. Third, require better chromosome segregation, while tracking division, survival and cell fate. More protein alone does not pass. Neither does an apparent improvement caused by stopping division or selectively losing abnormal cells. Failed controls are indeterminate; imprecise results are inconclusive. Rejection requires ruling out the predefined worthwhile benefit for that tested approach.</a:t>
+              <a:t>The protocol has four gates. Gate A establishes the variant's effect using full-length protein at matched abundance. Gate B qualifies measurement, pathway response and exposure. Gate C measures chromosome segregation while separately tracking division and cell fate. Gate D applies prespecified confidence bounds. More protein alone cannot pass. Neither can apparent improvement from stopping division or selectively losing abnormal cells. Failed controls are indeterminate. An interval touching the worthwhile-benefit threshold is inconclusive. Only an interval entirely below that threshold rules out the programme's worthwhile benefit at that exposure. These are proposed research rules, not clinical thresholds.</a:t>
             </a:r>
           </a:p>
           <a:p xmlns:a="http://schemas.openxmlformats.org/drawingml/2006/main">
@@ -627,12 +637,22 @@
           </a:p>
           <a:p xmlns:a="http://schemas.openxmlformats.org/drawingml/2006/main">
             <a:r>
-              <a:t>Evidence: PMID 31900865 · MIPLYFFA label §12 · proposed protocol</a:t>
+              <a:t>Evidence: Functional rescue plan, gates A-D / proposed experiments</a:t>
             </a:r>
           </a:p>
           <a:p xmlns:a="http://schemas.openxmlformats.org/drawingml/2006/main">
             <a:r>
-              <a:t>See the Track 2 report for linked primary references. Proposal, not demonstrated therapeutic rescue.</a:t>
+              <a:t>submissions/functional-rescue-plan.md</a:t>
+            </a:r>
+          </a:p>
+          <a:p xmlns:a="http://schemas.openxmlformats.org/drawingml/2006/main">
+            <a:r>
+              <a:t>submissions/rescue-decision-validation.md</a:t>
+            </a:r>
+          </a:p>
+          <a:p xmlns:a="http://schemas.openxmlformats.org/drawingml/2006/main">
+            <a:r>
+              <a:t>Research proposal. No demonstrated therapeutic rescue or clinical eligibility result.</a:t>
             </a:r>
           </a:p>
         </p:txBody>
@@ -702,7 +722,7 @@
           <a:lstStyle xmlns:a="http://schemas.openxmlformats.org/drawingml/2006/main"/>
           <a:p xmlns:a="http://schemas.openxmlformats.org/drawingml/2006/main">
             <a:r>
-              <a:t>We also built a practical gene-to-condition navigator. Search a gene, inspect its candidate condition mappings, and follow the source evidence. It includes every row of a dated, two thousand and sixty-three row register snapshot, including thirty-five unmapped rows and source disagreements. A match is not an eligibility decision, and no match is not evidence of ineligibility. Queries stay on the device.</a:t>
+              <a:t>The offline navigator links genes to candidate conditions and shows each source's association role. Twenty-eight selected queries passed, with complete review of every returned source association: forty-seven gene and register-row pairs. This was a developer evaluation using the same source snapshots, not independent clinical validation. All register rows remain visible, including unmapped entries. A match does not establish eligibility. Queries stay on the device.</a:t>
             </a:r>
           </a:p>
           <a:p xmlns:a="http://schemas.openxmlformats.org/drawingml/2006/main">
@@ -712,12 +732,27 @@
           </a:p>
           <a:p xmlns:a="http://schemas.openxmlformats.org/drawingml/2006/main">
             <a:r>
-              <a:t>Evidence: HFEA workbook 2026-08-05 · hashed mapping sources</a:t>
+              <a:t>Evidence: Expanded frozen query audit / HFEA register 2026-08-05</a:t>
             </a:r>
           </a:p>
           <a:p xmlns:a="http://schemas.openxmlformats.org/drawingml/2006/main">
             <a:r>
-              <a:t>See the Track 2 report for linked primary references. Proposal, not demonstrated therapeutic rescue.</a:t>
+              <a:t>submissions/pgtm-expanded-validation.json</a:t>
+            </a:r>
+          </a:p>
+          <a:p xmlns:a="http://schemas.openxmlformats.org/drawingml/2006/main">
+            <a:r>
+              <a:t>submissions/pgtm-expanded-validation.md</a:t>
+            </a:r>
+          </a:p>
+          <a:p xmlns:a="http://schemas.openxmlformats.org/drawingml/2006/main">
+            <a:r>
+              <a:t>submissions/pgtm-navigator.html</a:t>
+            </a:r>
+          </a:p>
+          <a:p xmlns:a="http://schemas.openxmlformats.org/drawingml/2006/main">
+            <a:r>
+              <a:t>Research proposal. No demonstrated therapeutic rescue or clinical eligibility result.</a:t>
             </a:r>
           </a:p>
         </p:txBody>
@@ -787,7 +822,7 @@
           <a:lstStyle xmlns:a="http://schemas.openxmlformats.org/drawingml/2006/main"/>
           <a:p xmlns:a="http://schemas.openxmlformats.org/drawingml/2006/main">
             <a:r>
-              <a:t>Our interpretation canary checks that a model has actually answered. Real Splice A I inference passes six controls. A separate checker self-test rejects nine injected failures, including missing and nonfinite output. We distinguish those tests from clinical accuracy. A public-genome spike-in also demonstrates scale, while leaving diagnostic performance and knowledge leakage unresolved.</a:t>
+              <a:t>We implemented these rescue-decision rules as a research software prototype. All forty frozen synthetic cases matched their expected decisions, including protein-only signals, selective killing, missing data and confidence-boundary cases. This verifies software behaviour, not biological rescue. Separately, real Splice A I inference passes six controls. Its checker rejects nine injected failures. Laboratory function, exposure and independent replication remain unmeasured.</a:t>
             </a:r>
           </a:p>
           <a:p xmlns:a="http://schemas.openxmlformats.org/drawingml/2006/main">
@@ -797,12 +832,32 @@
           </a:p>
           <a:p xmlns:a="http://schemas.openxmlformats.org/drawingml/2006/main">
             <a:r>
-              <a:t>Evidence: Measured SpliceAI output 2026-10-23 · public HG002 smoke test</a:t>
+              <a:t>Evidence: Rescue-decision validation / SpliceAI measured controls and checker</a:t>
             </a:r>
           </a:p>
           <a:p xmlns:a="http://schemas.openxmlformats.org/drawingml/2006/main">
             <a:r>
-              <a:t>See the Track 2 report for linked primary references. Proposal, not demonstrated therapeutic rescue.</a:t>
+              <a:t>submissions/rescue-decision-validation.json</a:t>
+            </a:r>
+          </a:p>
+          <a:p xmlns:a="http://schemas.openxmlformats.org/drawingml/2006/main">
+            <a:r>
+              <a:t>submissions/rescue-decision-validation.md</a:t>
+            </a:r>
+          </a:p>
+          <a:p xmlns:a="http://schemas.openxmlformats.org/drawingml/2006/main">
+            <a:r>
+              <a:t>canary/measured-results-2026-10-23.txt</a:t>
+            </a:r>
+          </a:p>
+          <a:p xmlns:a="http://schemas.openxmlformats.org/drawingml/2006/main">
+            <a:r>
+              <a:t>canary/README.md</a:t>
+            </a:r>
+          </a:p>
+          <a:p xmlns:a="http://schemas.openxmlformats.org/drawingml/2006/main">
+            <a:r>
+              <a:t>Research proposal. No demonstrated therapeutic rescue or clinical eligibility result.</a:t>
             </a:r>
           </a:p>
         </p:txBody>
@@ -887,7 +942,12 @@
           </a:p>
           <a:p xmlns:a="http://schemas.openxmlformats.org/drawingml/2006/main">
             <a:r>
-              <a:t>See the Track 2 report for linked primary references. Proposal, not demonstrated therapeutic rescue.</a:t>
+              <a:t>submissions/adriamasnou_track2_report.md</a:t>
+            </a:r>
+          </a:p>
+          <a:p xmlns:a="http://schemas.openxmlformats.org/drawingml/2006/main">
+            <a:r>
+              <a:t>Research proposal. No demonstrated therapeutic rescue or clinical eligibility result.</a:t>
             </a:r>
           </a:p>
         </p:txBody>
@@ -3330,12 +3390,12 @@
   </p:cSld>
   <p:clrMap bg1="lt1" tx1="dk1" bg2="lt2" tx2="dk2" accent1="accent1" accent2="accent2" accent3="accent3" accent4="accent4" accent5="accent5" accent6="accent6" hlink="hlink" folHlink="folHlink"/>
   <p:sldLayoutIdLst>
-    <p:sldLayoutId xmlns:r="http://schemas.openxmlformats.org/officeDocument/2006/relationships" id="2147483649" r:id="Rfc0cb8d32bbc4365"/>
-    <p:sldLayoutId xmlns:r="http://schemas.openxmlformats.org/officeDocument/2006/relationships" id="2147483650" r:id="Ra677f5e220424af5"/>
-    <p:sldLayoutId xmlns:r="http://schemas.openxmlformats.org/officeDocument/2006/relationships" id="2147483651" r:id="Rf742069349334e45"/>
-    <p:sldLayoutId xmlns:r="http://schemas.openxmlformats.org/officeDocument/2006/relationships" id="2147483652" r:id="R51161aecb67d46b2"/>
-    <p:sldLayoutId xmlns:r="http://schemas.openxmlformats.org/officeDocument/2006/relationships" id="2147483653" r:id="R644f210e19c34de6"/>
-    <p:sldLayoutId xmlns:r="http://schemas.openxmlformats.org/officeDocument/2006/relationships" id="2147483654" r:id="R7d468a65e2284368"/>
+    <p:sldLayoutId xmlns:r="http://schemas.openxmlformats.org/officeDocument/2006/relationships" id="2147483649" r:id="Re7315ada428942d9"/>
+    <p:sldLayoutId xmlns:r="http://schemas.openxmlformats.org/officeDocument/2006/relationships" id="2147483650" r:id="R66ffaa3d79f04443"/>
+    <p:sldLayoutId xmlns:r="http://schemas.openxmlformats.org/officeDocument/2006/relationships" id="2147483651" r:id="Rb46e16a7c5a14284"/>
+    <p:sldLayoutId xmlns:r="http://schemas.openxmlformats.org/officeDocument/2006/relationships" id="2147483652" r:id="R8b489f8505314f22"/>
+    <p:sldLayoutId xmlns:r="http://schemas.openxmlformats.org/officeDocument/2006/relationships" id="2147483653" r:id="R47f40511c3234458"/>
+    <p:sldLayoutId xmlns:r="http://schemas.openxmlformats.org/officeDocument/2006/relationships" id="2147483654" r:id="R43741e572024434a"/>
   </p:sldLayoutIdLst>
   <p:txStyles>
     <p:titleStyle>
@@ -3922,6 +3982,7 @@
               </a:defRPr>
             </a:defPPr>
             <a:lvl1pPr>
+              <a:buNone/>
               <a:defRPr sz="4350" b="1">
                 <a:solidFill>
                   <a:srgbClr val="17333E"/>
@@ -3932,6 +3993,7 @@
               </a:defRPr>
             </a:lvl1pPr>
             <a:lvl2pPr>
+              <a:buNone/>
               <a:defRPr sz="4350" b="1">
                 <a:solidFill>
                   <a:srgbClr val="17333E"/>
@@ -3942,6 +4004,7 @@
               </a:defRPr>
             </a:lvl2pPr>
             <a:lvl3pPr>
+              <a:buNone/>
               <a:defRPr sz="4350" b="1">
                 <a:solidFill>
                   <a:srgbClr val="17333E"/>
@@ -3952,6 +4015,7 @@
               </a:defRPr>
             </a:lvl3pPr>
             <a:lvl4pPr>
+              <a:buNone/>
               <a:defRPr sz="4350" b="1">
                 <a:solidFill>
                   <a:srgbClr val="17333E"/>
@@ -3962,6 +4026,7 @@
               </a:defRPr>
             </a:lvl4pPr>
             <a:lvl5pPr>
+              <a:buNone/>
               <a:defRPr sz="4350" b="1">
                 <a:solidFill>
                   <a:srgbClr val="17333E"/>
@@ -3972,6 +4037,7 @@
               </a:defRPr>
             </a:lvl5pPr>
             <a:lvl6pPr>
+              <a:buNone/>
               <a:defRPr sz="4350" b="1">
                 <a:solidFill>
                   <a:srgbClr val="17333E"/>
@@ -3982,6 +4048,7 @@
               </a:defRPr>
             </a:lvl6pPr>
             <a:lvl7pPr>
+              <a:buNone/>
               <a:defRPr sz="4350" b="1">
                 <a:solidFill>
                   <a:srgbClr val="17333E"/>
@@ -3992,6 +4059,7 @@
               </a:defRPr>
             </a:lvl7pPr>
             <a:lvl8pPr>
+              <a:buNone/>
               <a:defRPr sz="4350" b="1">
                 <a:solidFill>
                   <a:srgbClr val="17333E"/>
@@ -4002,6 +4070,7 @@
               </a:defRPr>
             </a:lvl8pPr>
             <a:lvl9pPr>
+              <a:buNone/>
               <a:defRPr sz="4350" b="1">
                 <a:solidFill>
                   <a:srgbClr val="17333E"/>
@@ -4014,6 +4083,7 @@
           </a:lstStyle>
           <a:p xmlns:a="http://schemas.openxmlformats.org/drawingml/2006/main">
             <a:pPr>
+              <a:buNone/>
               <a:defRPr sz="4350" b="1">
                 <a:solidFill>
                   <a:srgbClr val="17333E"/>
@@ -4078,6 +4148,7 @@
               </a:defRPr>
             </a:defPPr>
             <a:lvl1pPr>
+              <a:buNone/>
               <a:defRPr sz="1350" b="0">
                 <a:solidFill>
                   <a:srgbClr val="526971"/>
@@ -4088,6 +4159,7 @@
               </a:defRPr>
             </a:lvl1pPr>
             <a:lvl2pPr>
+              <a:buNone/>
               <a:defRPr sz="1350" b="0">
                 <a:solidFill>
                   <a:srgbClr val="526971"/>
@@ -4098,6 +4170,7 @@
               </a:defRPr>
             </a:lvl2pPr>
             <a:lvl3pPr>
+              <a:buNone/>
               <a:defRPr sz="1350" b="0">
                 <a:solidFill>
                   <a:srgbClr val="526971"/>
@@ -4108,6 +4181,7 @@
               </a:defRPr>
             </a:lvl3pPr>
             <a:lvl4pPr>
+              <a:buNone/>
               <a:defRPr sz="1350" b="0">
                 <a:solidFill>
                   <a:srgbClr val="526971"/>
@@ -4118,6 +4192,7 @@
               </a:defRPr>
             </a:lvl4pPr>
             <a:lvl5pPr>
+              <a:buNone/>
               <a:defRPr sz="1350" b="0">
                 <a:solidFill>
                   <a:srgbClr val="526971"/>
@@ -4128,6 +4203,7 @@
               </a:defRPr>
             </a:lvl5pPr>
             <a:lvl6pPr>
+              <a:buNone/>
               <a:defRPr sz="1350" b="0">
                 <a:solidFill>
                   <a:srgbClr val="526971"/>
@@ -4138,6 +4214,7 @@
               </a:defRPr>
             </a:lvl6pPr>
             <a:lvl7pPr>
+              <a:buNone/>
               <a:defRPr sz="1350" b="0">
                 <a:solidFill>
                   <a:srgbClr val="526971"/>
@@ -4148,6 +4225,7 @@
               </a:defRPr>
             </a:lvl7pPr>
             <a:lvl8pPr>
+              <a:buNone/>
               <a:defRPr sz="1350" b="0">
                 <a:solidFill>
                   <a:srgbClr val="526971"/>
@@ -4158,6 +4236,7 @@
               </a:defRPr>
             </a:lvl8pPr>
             <a:lvl9pPr>
+              <a:buNone/>
               <a:defRPr sz="1350" b="0">
                 <a:solidFill>
                   <a:srgbClr val="526971"/>
@@ -4170,6 +4249,7 @@
           </a:lstStyle>
           <a:p xmlns:a="http://schemas.openxmlformats.org/drawingml/2006/main">
             <a:pPr>
+              <a:buNone/>
               <a:defRPr sz="1350" b="0">
                 <a:solidFill>
                   <a:srgbClr val="526971"/>
@@ -4234,6 +4314,7 @@
               </a:defRPr>
             </a:defPPr>
             <a:lvl1pPr>
+              <a:buNone/>
               <a:defRPr sz="1200" b="0">
                 <a:solidFill>
                   <a:srgbClr val="526971"/>
@@ -4244,6 +4325,7 @@
               </a:defRPr>
             </a:lvl1pPr>
             <a:lvl2pPr>
+              <a:buNone/>
               <a:defRPr sz="1200" b="0">
                 <a:solidFill>
                   <a:srgbClr val="526971"/>
@@ -4254,6 +4336,7 @@
               </a:defRPr>
             </a:lvl2pPr>
             <a:lvl3pPr>
+              <a:buNone/>
               <a:defRPr sz="1200" b="0">
                 <a:solidFill>
                   <a:srgbClr val="526971"/>
@@ -4264,6 +4347,7 @@
               </a:defRPr>
             </a:lvl3pPr>
             <a:lvl4pPr>
+              <a:buNone/>
               <a:defRPr sz="1200" b="0">
                 <a:solidFill>
                   <a:srgbClr val="526971"/>
@@ -4274,6 +4358,7 @@
               </a:defRPr>
             </a:lvl4pPr>
             <a:lvl5pPr>
+              <a:buNone/>
               <a:defRPr sz="1200" b="0">
                 <a:solidFill>
                   <a:srgbClr val="526971"/>
@@ -4284,6 +4369,7 @@
               </a:defRPr>
             </a:lvl5pPr>
             <a:lvl6pPr>
+              <a:buNone/>
               <a:defRPr sz="1200" b="0">
                 <a:solidFill>
                   <a:srgbClr val="526971"/>
@@ -4294,6 +4380,7 @@
               </a:defRPr>
             </a:lvl6pPr>
             <a:lvl7pPr>
+              <a:buNone/>
               <a:defRPr sz="1200" b="0">
                 <a:solidFill>
                   <a:srgbClr val="526971"/>
@@ -4304,6 +4391,7 @@
               </a:defRPr>
             </a:lvl7pPr>
             <a:lvl8pPr>
+              <a:buNone/>
               <a:defRPr sz="1200" b="0">
                 <a:solidFill>
                   <a:srgbClr val="526971"/>
@@ -4314,6 +4402,7 @@
               </a:defRPr>
             </a:lvl8pPr>
             <a:lvl9pPr>
+              <a:buNone/>
               <a:defRPr sz="1200" b="0">
                 <a:solidFill>
                   <a:srgbClr val="526971"/>
@@ -4326,6 +4415,7 @@
           </a:lstStyle>
           <a:p xmlns:a="http://schemas.openxmlformats.org/drawingml/2006/main">
             <a:pPr>
+              <a:buNone/>
               <a:defRPr sz="1200" b="0">
                 <a:solidFill>
                   <a:srgbClr val="526971"/>
@@ -4390,6 +4480,7 @@
               </a:defRPr>
             </a:defPPr>
             <a:lvl1pPr>
+              <a:buNone/>
               <a:defRPr sz="2550" b="0">
                 <a:solidFill>
                   <a:srgbClr val="176C63"/>
@@ -4400,6 +4491,7 @@
               </a:defRPr>
             </a:lvl1pPr>
             <a:lvl2pPr>
+              <a:buNone/>
               <a:defRPr sz="2550" b="0">
                 <a:solidFill>
                   <a:srgbClr val="176C63"/>
@@ -4410,6 +4502,7 @@
               </a:defRPr>
             </a:lvl2pPr>
             <a:lvl3pPr>
+              <a:buNone/>
               <a:defRPr sz="2550" b="0">
                 <a:solidFill>
                   <a:srgbClr val="176C63"/>
@@ -4420,6 +4513,7 @@
               </a:defRPr>
             </a:lvl3pPr>
             <a:lvl4pPr>
+              <a:buNone/>
               <a:defRPr sz="2550" b="0">
                 <a:solidFill>
                   <a:srgbClr val="176C63"/>
@@ -4430,6 +4524,7 @@
               </a:defRPr>
             </a:lvl4pPr>
             <a:lvl5pPr>
+              <a:buNone/>
               <a:defRPr sz="2550" b="0">
                 <a:solidFill>
                   <a:srgbClr val="176C63"/>
@@ -4440,6 +4535,7 @@
               </a:defRPr>
             </a:lvl5pPr>
             <a:lvl6pPr>
+              <a:buNone/>
               <a:defRPr sz="2550" b="0">
                 <a:solidFill>
                   <a:srgbClr val="176C63"/>
@@ -4450,6 +4546,7 @@
               </a:defRPr>
             </a:lvl6pPr>
             <a:lvl7pPr>
+              <a:buNone/>
               <a:defRPr sz="2550" b="0">
                 <a:solidFill>
                   <a:srgbClr val="176C63"/>
@@ -4460,6 +4557,7 @@
               </a:defRPr>
             </a:lvl7pPr>
             <a:lvl8pPr>
+              <a:buNone/>
               <a:defRPr sz="2550" b="0">
                 <a:solidFill>
                   <a:srgbClr val="176C63"/>
@@ -4470,6 +4568,7 @@
               </a:defRPr>
             </a:lvl8pPr>
             <a:lvl9pPr>
+              <a:buNone/>
               <a:defRPr sz="2550" b="0">
                 <a:solidFill>
                   <a:srgbClr val="176C63"/>
@@ -4482,6 +4581,7 @@
           </a:lstStyle>
           <a:p xmlns:a="http://schemas.openxmlformats.org/drawingml/2006/main">
             <a:pPr>
+              <a:buNone/>
               <a:defRPr sz="2550" b="0">
                 <a:solidFill>
                   <a:srgbClr val="176C63"/>
@@ -4546,6 +4646,7 @@
               </a:defRPr>
             </a:defPPr>
             <a:lvl1pPr>
+              <a:buNone/>
               <a:defRPr sz="4200" b="1">
                 <a:solidFill>
                   <a:srgbClr val="17333E"/>
@@ -4556,6 +4657,7 @@
               </a:defRPr>
             </a:lvl1pPr>
             <a:lvl2pPr>
+              <a:buNone/>
               <a:defRPr sz="4200" b="1">
                 <a:solidFill>
                   <a:srgbClr val="17333E"/>
@@ -4566,6 +4668,7 @@
               </a:defRPr>
             </a:lvl2pPr>
             <a:lvl3pPr>
+              <a:buNone/>
               <a:defRPr sz="4200" b="1">
                 <a:solidFill>
                   <a:srgbClr val="17333E"/>
@@ -4576,6 +4679,7 @@
               </a:defRPr>
             </a:lvl3pPr>
             <a:lvl4pPr>
+              <a:buNone/>
               <a:defRPr sz="4200" b="1">
                 <a:solidFill>
                   <a:srgbClr val="17333E"/>
@@ -4586,6 +4690,7 @@
               </a:defRPr>
             </a:lvl4pPr>
             <a:lvl5pPr>
+              <a:buNone/>
               <a:defRPr sz="4200" b="1">
                 <a:solidFill>
                   <a:srgbClr val="17333E"/>
@@ -4596,6 +4701,7 @@
               </a:defRPr>
             </a:lvl5pPr>
             <a:lvl6pPr>
+              <a:buNone/>
               <a:defRPr sz="4200" b="1">
                 <a:solidFill>
                   <a:srgbClr val="17333E"/>
@@ -4606,6 +4712,7 @@
               </a:defRPr>
             </a:lvl6pPr>
             <a:lvl7pPr>
+              <a:buNone/>
               <a:defRPr sz="4200" b="1">
                 <a:solidFill>
                   <a:srgbClr val="17333E"/>
@@ -4616,6 +4723,7 @@
               </a:defRPr>
             </a:lvl7pPr>
             <a:lvl8pPr>
+              <a:buNone/>
               <a:defRPr sz="4200" b="1">
                 <a:solidFill>
                   <a:srgbClr val="17333E"/>
@@ -4626,6 +4734,7 @@
               </a:defRPr>
             </a:lvl8pPr>
             <a:lvl9pPr>
+              <a:buNone/>
               <a:defRPr sz="4200" b="1">
                 <a:solidFill>
                   <a:srgbClr val="17333E"/>
@@ -4638,6 +4747,7 @@
           </a:lstStyle>
           <a:p xmlns:a="http://schemas.openxmlformats.org/drawingml/2006/main">
             <a:pPr>
+              <a:buNone/>
               <a:defRPr sz="4200" b="1">
                 <a:solidFill>
                   <a:srgbClr val="17333E"/>
@@ -4661,6 +4771,7 @@
           </a:p>
           <a:p xmlns:a="http://schemas.openxmlformats.org/drawingml/2006/main">
             <a:pPr>
+              <a:buNone/>
               <a:defRPr sz="4200" b="1">
                 <a:solidFill>
                   <a:srgbClr val="17333E"/>
@@ -4725,6 +4836,7 @@
               </a:defRPr>
             </a:defPPr>
             <a:lvl1pPr>
+              <a:buNone/>
               <a:defRPr sz="1875" b="0">
                 <a:solidFill>
                   <a:srgbClr val="526971"/>
@@ -4735,6 +4847,7 @@
               </a:defRPr>
             </a:lvl1pPr>
             <a:lvl2pPr>
+              <a:buNone/>
               <a:defRPr sz="1875" b="0">
                 <a:solidFill>
                   <a:srgbClr val="526971"/>
@@ -4745,6 +4858,7 @@
               </a:defRPr>
             </a:lvl2pPr>
             <a:lvl3pPr>
+              <a:buNone/>
               <a:defRPr sz="1875" b="0">
                 <a:solidFill>
                   <a:srgbClr val="526971"/>
@@ -4755,6 +4869,7 @@
               </a:defRPr>
             </a:lvl3pPr>
             <a:lvl4pPr>
+              <a:buNone/>
               <a:defRPr sz="1875" b="0">
                 <a:solidFill>
                   <a:srgbClr val="526971"/>
@@ -4765,6 +4880,7 @@
               </a:defRPr>
             </a:lvl4pPr>
             <a:lvl5pPr>
+              <a:buNone/>
               <a:defRPr sz="1875" b="0">
                 <a:solidFill>
                   <a:srgbClr val="526971"/>
@@ -4775,6 +4891,7 @@
               </a:defRPr>
             </a:lvl5pPr>
             <a:lvl6pPr>
+              <a:buNone/>
               <a:defRPr sz="1875" b="0">
                 <a:solidFill>
                   <a:srgbClr val="526971"/>
@@ -4785,6 +4902,7 @@
               </a:defRPr>
             </a:lvl6pPr>
             <a:lvl7pPr>
+              <a:buNone/>
               <a:defRPr sz="1875" b="0">
                 <a:solidFill>
                   <a:srgbClr val="526971"/>
@@ -4795,6 +4913,7 @@
               </a:defRPr>
             </a:lvl7pPr>
             <a:lvl8pPr>
+              <a:buNone/>
               <a:defRPr sz="1875" b="0">
                 <a:solidFill>
                   <a:srgbClr val="526971"/>
@@ -4805,6 +4924,7 @@
               </a:defRPr>
             </a:lvl8pPr>
             <a:lvl9pPr>
+              <a:buNone/>
               <a:defRPr sz="1875" b="0">
                 <a:solidFill>
                   <a:srgbClr val="526971"/>
@@ -4817,6 +4937,7 @@
           </a:lstStyle>
           <a:p xmlns:a="http://schemas.openxmlformats.org/drawingml/2006/main">
             <a:pPr>
+              <a:buNone/>
               <a:defRPr sz="1875" b="0">
                 <a:solidFill>
                   <a:srgbClr val="526971"/>
@@ -4840,6 +4961,7 @@
           </a:p>
           <a:p xmlns:a="http://schemas.openxmlformats.org/drawingml/2006/main">
             <a:pPr>
+              <a:buNone/>
               <a:defRPr sz="1875" b="0">
                 <a:solidFill>
                   <a:srgbClr val="526971"/>
@@ -4904,6 +5026,7 @@
               </a:defRPr>
             </a:defPPr>
             <a:lvl1pPr>
+              <a:buNone/>
               <a:defRPr sz="1875" b="0">
                 <a:solidFill>
                   <a:srgbClr val="526971"/>
@@ -4914,6 +5037,7 @@
               </a:defRPr>
             </a:lvl1pPr>
             <a:lvl2pPr>
+              <a:buNone/>
               <a:defRPr sz="1875" b="0">
                 <a:solidFill>
                   <a:srgbClr val="526971"/>
@@ -4924,6 +5048,7 @@
               </a:defRPr>
             </a:lvl2pPr>
             <a:lvl3pPr>
+              <a:buNone/>
               <a:defRPr sz="1875" b="0">
                 <a:solidFill>
                   <a:srgbClr val="526971"/>
@@ -4934,6 +5059,7 @@
               </a:defRPr>
             </a:lvl3pPr>
             <a:lvl4pPr>
+              <a:buNone/>
               <a:defRPr sz="1875" b="0">
                 <a:solidFill>
                   <a:srgbClr val="526971"/>
@@ -4944,6 +5070,7 @@
               </a:defRPr>
             </a:lvl4pPr>
             <a:lvl5pPr>
+              <a:buNone/>
               <a:defRPr sz="1875" b="0">
                 <a:solidFill>
                   <a:srgbClr val="526971"/>
@@ -4954,6 +5081,7 @@
               </a:defRPr>
             </a:lvl5pPr>
             <a:lvl6pPr>
+              <a:buNone/>
               <a:defRPr sz="1875" b="0">
                 <a:solidFill>
                   <a:srgbClr val="526971"/>
@@ -4964,6 +5092,7 @@
               </a:defRPr>
             </a:lvl6pPr>
             <a:lvl7pPr>
+              <a:buNone/>
               <a:defRPr sz="1875" b="0">
                 <a:solidFill>
                   <a:srgbClr val="526971"/>
@@ -4974,6 +5103,7 @@
               </a:defRPr>
             </a:lvl7pPr>
             <a:lvl8pPr>
+              <a:buNone/>
               <a:defRPr sz="1875" b="0">
                 <a:solidFill>
                   <a:srgbClr val="526971"/>
@@ -4984,6 +5114,7 @@
               </a:defRPr>
             </a:lvl8pPr>
             <a:lvl9pPr>
+              <a:buNone/>
               <a:defRPr sz="1875" b="0">
                 <a:solidFill>
                   <a:srgbClr val="526971"/>
@@ -4996,6 +5127,7 @@
           </a:lstStyle>
           <a:p xmlns:a="http://schemas.openxmlformats.org/drawingml/2006/main">
             <a:pPr>
+              <a:buNone/>
               <a:defRPr sz="1875" b="0">
                 <a:solidFill>
                   <a:srgbClr val="526971"/>
@@ -5019,6 +5151,7 @@
           </a:p>
           <a:p xmlns:a="http://schemas.openxmlformats.org/drawingml/2006/main">
             <a:pPr>
+              <a:buNone/>
               <a:defRPr sz="1875" b="0">
                 <a:solidFill>
                   <a:srgbClr val="526971"/>
@@ -5112,6 +5245,7 @@
               </a:defRPr>
             </a:defPPr>
             <a:lvl1pPr>
+              <a:buNone/>
               <a:defRPr sz="3750" b="1">
                 <a:solidFill>
                   <a:srgbClr val="17333E"/>
@@ -5122,6 +5256,7 @@
               </a:defRPr>
             </a:lvl1pPr>
             <a:lvl2pPr>
+              <a:buNone/>
               <a:defRPr sz="3750" b="1">
                 <a:solidFill>
                   <a:srgbClr val="17333E"/>
@@ -5132,6 +5267,7 @@
               </a:defRPr>
             </a:lvl2pPr>
             <a:lvl3pPr>
+              <a:buNone/>
               <a:defRPr sz="3750" b="1">
                 <a:solidFill>
                   <a:srgbClr val="17333E"/>
@@ -5142,6 +5278,7 @@
               </a:defRPr>
             </a:lvl3pPr>
             <a:lvl4pPr>
+              <a:buNone/>
               <a:defRPr sz="3750" b="1">
                 <a:solidFill>
                   <a:srgbClr val="17333E"/>
@@ -5152,6 +5289,7 @@
               </a:defRPr>
             </a:lvl4pPr>
             <a:lvl5pPr>
+              <a:buNone/>
               <a:defRPr sz="3750" b="1">
                 <a:solidFill>
                   <a:srgbClr val="17333E"/>
@@ -5162,6 +5300,7 @@
               </a:defRPr>
             </a:lvl5pPr>
             <a:lvl6pPr>
+              <a:buNone/>
               <a:defRPr sz="3750" b="1">
                 <a:solidFill>
                   <a:srgbClr val="17333E"/>
@@ -5172,6 +5311,7 @@
               </a:defRPr>
             </a:lvl6pPr>
             <a:lvl7pPr>
+              <a:buNone/>
               <a:defRPr sz="3750" b="1">
                 <a:solidFill>
                   <a:srgbClr val="17333E"/>
@@ -5182,6 +5322,7 @@
               </a:defRPr>
             </a:lvl7pPr>
             <a:lvl8pPr>
+              <a:buNone/>
               <a:defRPr sz="3750" b="1">
                 <a:solidFill>
                   <a:srgbClr val="17333E"/>
@@ -5192,6 +5333,7 @@
               </a:defRPr>
             </a:lvl8pPr>
             <a:lvl9pPr>
+              <a:buNone/>
               <a:defRPr sz="3750" b="1">
                 <a:solidFill>
                   <a:srgbClr val="17333E"/>
@@ -5204,6 +5346,7 @@
           </a:lstStyle>
           <a:p xmlns:a="http://schemas.openxmlformats.org/drawingml/2006/main">
             <a:pPr>
+              <a:buNone/>
               <a:defRPr sz="3750" b="1">
                 <a:solidFill>
                   <a:srgbClr val="17333E"/>
@@ -5268,6 +5411,7 @@
               </a:defRPr>
             </a:defPPr>
             <a:lvl1pPr>
+              <a:buNone/>
               <a:defRPr sz="1350" b="0">
                 <a:solidFill>
                   <a:srgbClr val="526971"/>
@@ -5278,6 +5422,7 @@
               </a:defRPr>
             </a:lvl1pPr>
             <a:lvl2pPr>
+              <a:buNone/>
               <a:defRPr sz="1350" b="0">
                 <a:solidFill>
                   <a:srgbClr val="526971"/>
@@ -5288,6 +5433,7 @@
               </a:defRPr>
             </a:lvl2pPr>
             <a:lvl3pPr>
+              <a:buNone/>
               <a:defRPr sz="1350" b="0">
                 <a:solidFill>
                   <a:srgbClr val="526971"/>
@@ -5298,6 +5444,7 @@
               </a:defRPr>
             </a:lvl3pPr>
             <a:lvl4pPr>
+              <a:buNone/>
               <a:defRPr sz="1350" b="0">
                 <a:solidFill>
                   <a:srgbClr val="526971"/>
@@ -5308,6 +5455,7 @@
               </a:defRPr>
             </a:lvl4pPr>
             <a:lvl5pPr>
+              <a:buNone/>
               <a:defRPr sz="1350" b="0">
                 <a:solidFill>
                   <a:srgbClr val="526971"/>
@@ -5318,6 +5466,7 @@
               </a:defRPr>
             </a:lvl5pPr>
             <a:lvl6pPr>
+              <a:buNone/>
               <a:defRPr sz="1350" b="0">
                 <a:solidFill>
                   <a:srgbClr val="526971"/>
@@ -5328,6 +5477,7 @@
               </a:defRPr>
             </a:lvl6pPr>
             <a:lvl7pPr>
+              <a:buNone/>
               <a:defRPr sz="1350" b="0">
                 <a:solidFill>
                   <a:srgbClr val="526971"/>
@@ -5338,6 +5488,7 @@
               </a:defRPr>
             </a:lvl7pPr>
             <a:lvl8pPr>
+              <a:buNone/>
               <a:defRPr sz="1350" b="0">
                 <a:solidFill>
                   <a:srgbClr val="526971"/>
@@ -5348,6 +5499,7 @@
               </a:defRPr>
             </a:lvl8pPr>
             <a:lvl9pPr>
+              <a:buNone/>
               <a:defRPr sz="1350" b="0">
                 <a:solidFill>
                   <a:srgbClr val="526971"/>
@@ -5360,6 +5512,7 @@
           </a:lstStyle>
           <a:p xmlns:a="http://schemas.openxmlformats.org/drawingml/2006/main">
             <a:pPr>
+              <a:buNone/>
               <a:defRPr sz="1350" b="0">
                 <a:solidFill>
                   <a:srgbClr val="526971"/>
@@ -5424,6 +5577,7 @@
               </a:defRPr>
             </a:defPPr>
             <a:lvl1pPr>
+              <a:buNone/>
               <a:defRPr sz="1200" b="0">
                 <a:solidFill>
                   <a:srgbClr val="526971"/>
@@ -5434,6 +5588,7 @@
               </a:defRPr>
             </a:lvl1pPr>
             <a:lvl2pPr>
+              <a:buNone/>
               <a:defRPr sz="1200" b="0">
                 <a:solidFill>
                   <a:srgbClr val="526971"/>
@@ -5444,6 +5599,7 @@
               </a:defRPr>
             </a:lvl2pPr>
             <a:lvl3pPr>
+              <a:buNone/>
               <a:defRPr sz="1200" b="0">
                 <a:solidFill>
                   <a:srgbClr val="526971"/>
@@ -5454,6 +5610,7 @@
               </a:defRPr>
             </a:lvl3pPr>
             <a:lvl4pPr>
+              <a:buNone/>
               <a:defRPr sz="1200" b="0">
                 <a:solidFill>
                   <a:srgbClr val="526971"/>
@@ -5464,6 +5621,7 @@
               </a:defRPr>
             </a:lvl4pPr>
             <a:lvl5pPr>
+              <a:buNone/>
               <a:defRPr sz="1200" b="0">
                 <a:solidFill>
                   <a:srgbClr val="526971"/>
@@ -5474,6 +5632,7 @@
               </a:defRPr>
             </a:lvl5pPr>
             <a:lvl6pPr>
+              <a:buNone/>
               <a:defRPr sz="1200" b="0">
                 <a:solidFill>
                   <a:srgbClr val="526971"/>
@@ -5484,6 +5643,7 @@
               </a:defRPr>
             </a:lvl6pPr>
             <a:lvl7pPr>
+              <a:buNone/>
               <a:defRPr sz="1200" b="0">
                 <a:solidFill>
                   <a:srgbClr val="526971"/>
@@ -5494,6 +5654,7 @@
               </a:defRPr>
             </a:lvl7pPr>
             <a:lvl8pPr>
+              <a:buNone/>
               <a:defRPr sz="1200" b="0">
                 <a:solidFill>
                   <a:srgbClr val="526971"/>
@@ -5504,6 +5665,7 @@
               </a:defRPr>
             </a:lvl8pPr>
             <a:lvl9pPr>
+              <a:buNone/>
               <a:defRPr sz="1200" b="0">
                 <a:solidFill>
                   <a:srgbClr val="526971"/>
@@ -5516,6 +5678,7 @@
           </a:lstStyle>
           <a:p xmlns:a="http://schemas.openxmlformats.org/drawingml/2006/main">
             <a:pPr>
+              <a:buNone/>
               <a:defRPr sz="1200" b="0">
                 <a:solidFill>
                   <a:srgbClr val="526971"/>
@@ -5580,6 +5743,7 @@
               </a:defRPr>
             </a:defPPr>
             <a:lvl1pPr>
+              <a:buNone/>
               <a:defRPr sz="2250" b="0">
                 <a:solidFill>
                   <a:srgbClr val="526971"/>
@@ -5590,6 +5754,7 @@
               </a:defRPr>
             </a:lvl1pPr>
             <a:lvl2pPr>
+              <a:buNone/>
               <a:defRPr sz="2250" b="0">
                 <a:solidFill>
                   <a:srgbClr val="526971"/>
@@ -5600,6 +5765,7 @@
               </a:defRPr>
             </a:lvl2pPr>
             <a:lvl3pPr>
+              <a:buNone/>
               <a:defRPr sz="2250" b="0">
                 <a:solidFill>
                   <a:srgbClr val="526971"/>
@@ -5610,6 +5776,7 @@
               </a:defRPr>
             </a:lvl3pPr>
             <a:lvl4pPr>
+              <a:buNone/>
               <a:defRPr sz="2250" b="0">
                 <a:solidFill>
                   <a:srgbClr val="526971"/>
@@ -5620,6 +5787,7 @@
               </a:defRPr>
             </a:lvl4pPr>
             <a:lvl5pPr>
+              <a:buNone/>
               <a:defRPr sz="2250" b="0">
                 <a:solidFill>
                   <a:srgbClr val="526971"/>
@@ -5630,6 +5798,7 @@
               </a:defRPr>
             </a:lvl5pPr>
             <a:lvl6pPr>
+              <a:buNone/>
               <a:defRPr sz="2250" b="0">
                 <a:solidFill>
                   <a:srgbClr val="526971"/>
@@ -5640,6 +5809,7 @@
               </a:defRPr>
             </a:lvl6pPr>
             <a:lvl7pPr>
+              <a:buNone/>
               <a:defRPr sz="2250" b="0">
                 <a:solidFill>
                   <a:srgbClr val="526971"/>
@@ -5650,6 +5820,7 @@
               </a:defRPr>
             </a:lvl7pPr>
             <a:lvl8pPr>
+              <a:buNone/>
               <a:defRPr sz="2250" b="0">
                 <a:solidFill>
                   <a:srgbClr val="526971"/>
@@ -5660,6 +5831,7 @@
               </a:defRPr>
             </a:lvl8pPr>
             <a:lvl9pPr>
+              <a:buNone/>
               <a:defRPr sz="2250" b="0">
                 <a:solidFill>
                   <a:srgbClr val="526971"/>
@@ -5672,6 +5844,7 @@
           </a:lstStyle>
           <a:p xmlns:a="http://schemas.openxmlformats.org/drawingml/2006/main">
             <a:pPr>
+              <a:buNone/>
               <a:defRPr sz="2250" b="0">
                 <a:solidFill>
                   <a:srgbClr val="526971"/>
@@ -5736,6 +5909,7 @@
               </a:defRPr>
             </a:defPPr>
             <a:lvl1pPr>
+              <a:buNone/>
               <a:defRPr sz="3000" b="1">
                 <a:solidFill>
                   <a:srgbClr val="176C63"/>
@@ -5746,6 +5920,7 @@
               </a:defRPr>
             </a:lvl1pPr>
             <a:lvl2pPr>
+              <a:buNone/>
               <a:defRPr sz="3000" b="1">
                 <a:solidFill>
                   <a:srgbClr val="176C63"/>
@@ -5756,6 +5931,7 @@
               </a:defRPr>
             </a:lvl2pPr>
             <a:lvl3pPr>
+              <a:buNone/>
               <a:defRPr sz="3000" b="1">
                 <a:solidFill>
                   <a:srgbClr val="176C63"/>
@@ -5766,6 +5942,7 @@
               </a:defRPr>
             </a:lvl3pPr>
             <a:lvl4pPr>
+              <a:buNone/>
               <a:defRPr sz="3000" b="1">
                 <a:solidFill>
                   <a:srgbClr val="176C63"/>
@@ -5776,6 +5953,7 @@
               </a:defRPr>
             </a:lvl4pPr>
             <a:lvl5pPr>
+              <a:buNone/>
               <a:defRPr sz="3000" b="1">
                 <a:solidFill>
                   <a:srgbClr val="176C63"/>
@@ -5786,6 +5964,7 @@
               </a:defRPr>
             </a:lvl5pPr>
             <a:lvl6pPr>
+              <a:buNone/>
               <a:defRPr sz="3000" b="1">
                 <a:solidFill>
                   <a:srgbClr val="176C63"/>
@@ -5796,6 +5975,7 @@
               </a:defRPr>
             </a:lvl6pPr>
             <a:lvl7pPr>
+              <a:buNone/>
               <a:defRPr sz="3000" b="1">
                 <a:solidFill>
                   <a:srgbClr val="176C63"/>
@@ -5806,6 +5986,7 @@
               </a:defRPr>
             </a:lvl7pPr>
             <a:lvl8pPr>
+              <a:buNone/>
               <a:defRPr sz="3000" b="1">
                 <a:solidFill>
                   <a:srgbClr val="176C63"/>
@@ -5816,6 +5997,7 @@
               </a:defRPr>
             </a:lvl8pPr>
             <a:lvl9pPr>
+              <a:buNone/>
               <a:defRPr sz="3000" b="1">
                 <a:solidFill>
                   <a:srgbClr val="176C63"/>
@@ -5828,6 +6010,7 @@
           </a:lstStyle>
           <a:p xmlns:a="http://schemas.openxmlformats.org/drawingml/2006/main">
             <a:pPr>
+              <a:buNone/>
               <a:defRPr sz="3000" b="1">
                 <a:solidFill>
                   <a:srgbClr val="176C63"/>
@@ -5892,6 +6075,7 @@
               </a:defRPr>
             </a:defPPr>
             <a:lvl1pPr>
+              <a:buNone/>
               <a:defRPr sz="2550" b="0">
                 <a:solidFill>
                   <a:srgbClr val="17333E"/>
@@ -5902,6 +6086,7 @@
               </a:defRPr>
             </a:lvl1pPr>
             <a:lvl2pPr>
+              <a:buNone/>
               <a:defRPr sz="2550" b="0">
                 <a:solidFill>
                   <a:srgbClr val="17333E"/>
@@ -5912,6 +6097,7 @@
               </a:defRPr>
             </a:lvl2pPr>
             <a:lvl3pPr>
+              <a:buNone/>
               <a:defRPr sz="2550" b="0">
                 <a:solidFill>
                   <a:srgbClr val="17333E"/>
@@ -5922,6 +6108,7 @@
               </a:defRPr>
             </a:lvl3pPr>
             <a:lvl4pPr>
+              <a:buNone/>
               <a:defRPr sz="2550" b="0">
                 <a:solidFill>
                   <a:srgbClr val="17333E"/>
@@ -5932,6 +6119,7 @@
               </a:defRPr>
             </a:lvl4pPr>
             <a:lvl5pPr>
+              <a:buNone/>
               <a:defRPr sz="2550" b="0">
                 <a:solidFill>
                   <a:srgbClr val="17333E"/>
@@ -5942,6 +6130,7 @@
               </a:defRPr>
             </a:lvl5pPr>
             <a:lvl6pPr>
+              <a:buNone/>
               <a:defRPr sz="2550" b="0">
                 <a:solidFill>
                   <a:srgbClr val="17333E"/>
@@ -5952,6 +6141,7 @@
               </a:defRPr>
             </a:lvl6pPr>
             <a:lvl7pPr>
+              <a:buNone/>
               <a:defRPr sz="2550" b="0">
                 <a:solidFill>
                   <a:srgbClr val="17333E"/>
@@ -5962,6 +6152,7 @@
               </a:defRPr>
             </a:lvl7pPr>
             <a:lvl8pPr>
+              <a:buNone/>
               <a:defRPr sz="2550" b="0">
                 <a:solidFill>
                   <a:srgbClr val="17333E"/>
@@ -5972,6 +6163,7 @@
               </a:defRPr>
             </a:lvl8pPr>
             <a:lvl9pPr>
+              <a:buNone/>
               <a:defRPr sz="2550" b="0">
                 <a:solidFill>
                   <a:srgbClr val="17333E"/>
@@ -5984,6 +6176,7 @@
           </a:lstStyle>
           <a:p xmlns:a="http://schemas.openxmlformats.org/drawingml/2006/main">
             <a:pPr>
+              <a:buNone/>
               <a:defRPr sz="2550" b="0">
                 <a:solidFill>
                   <a:srgbClr val="17333E"/>
@@ -6007,6 +6200,7 @@
           </a:p>
           <a:p xmlns:a="http://schemas.openxmlformats.org/drawingml/2006/main">
             <a:pPr>
+              <a:buNone/>
               <a:defRPr sz="2550" b="0">
                 <a:solidFill>
                   <a:srgbClr val="17333E"/>
@@ -6071,6 +6265,7 @@
               </a:defRPr>
             </a:defPPr>
             <a:lvl1pPr>
+              <a:buNone/>
               <a:defRPr sz="3000" b="1">
                 <a:solidFill>
                   <a:srgbClr val="176C63"/>
@@ -6081,6 +6276,7 @@
               </a:defRPr>
             </a:lvl1pPr>
             <a:lvl2pPr>
+              <a:buNone/>
               <a:defRPr sz="3000" b="1">
                 <a:solidFill>
                   <a:srgbClr val="176C63"/>
@@ -6091,6 +6287,7 @@
               </a:defRPr>
             </a:lvl2pPr>
             <a:lvl3pPr>
+              <a:buNone/>
               <a:defRPr sz="3000" b="1">
                 <a:solidFill>
                   <a:srgbClr val="176C63"/>
@@ -6101,6 +6298,7 @@
               </a:defRPr>
             </a:lvl3pPr>
             <a:lvl4pPr>
+              <a:buNone/>
               <a:defRPr sz="3000" b="1">
                 <a:solidFill>
                   <a:srgbClr val="176C63"/>
@@ -6111,6 +6309,7 @@
               </a:defRPr>
             </a:lvl4pPr>
             <a:lvl5pPr>
+              <a:buNone/>
               <a:defRPr sz="3000" b="1">
                 <a:solidFill>
                   <a:srgbClr val="176C63"/>
@@ -6121,6 +6320,7 @@
               </a:defRPr>
             </a:lvl5pPr>
             <a:lvl6pPr>
+              <a:buNone/>
               <a:defRPr sz="3000" b="1">
                 <a:solidFill>
                   <a:srgbClr val="176C63"/>
@@ -6131,6 +6331,7 @@
               </a:defRPr>
             </a:lvl6pPr>
             <a:lvl7pPr>
+              <a:buNone/>
               <a:defRPr sz="3000" b="1">
                 <a:solidFill>
                   <a:srgbClr val="176C63"/>
@@ -6141,6 +6342,7 @@
               </a:defRPr>
             </a:lvl7pPr>
             <a:lvl8pPr>
+              <a:buNone/>
               <a:defRPr sz="3000" b="1">
                 <a:solidFill>
                   <a:srgbClr val="176C63"/>
@@ -6151,6 +6353,7 @@
               </a:defRPr>
             </a:lvl8pPr>
             <a:lvl9pPr>
+              <a:buNone/>
               <a:defRPr sz="3000" b="1">
                 <a:solidFill>
                   <a:srgbClr val="176C63"/>
@@ -6163,6 +6366,7 @@
           </a:lstStyle>
           <a:p xmlns:a="http://schemas.openxmlformats.org/drawingml/2006/main">
             <a:pPr>
+              <a:buNone/>
               <a:defRPr sz="3000" b="1">
                 <a:solidFill>
                   <a:srgbClr val="176C63"/>
@@ -6227,6 +6431,7 @@
               </a:defRPr>
             </a:defPPr>
             <a:lvl1pPr>
+              <a:buNone/>
               <a:defRPr sz="2400" b="0">
                 <a:solidFill>
                   <a:srgbClr val="17333E"/>
@@ -6237,6 +6442,7 @@
               </a:defRPr>
             </a:lvl1pPr>
             <a:lvl2pPr>
+              <a:buNone/>
               <a:defRPr sz="2400" b="0">
                 <a:solidFill>
                   <a:srgbClr val="17333E"/>
@@ -6247,6 +6453,7 @@
               </a:defRPr>
             </a:lvl2pPr>
             <a:lvl3pPr>
+              <a:buNone/>
               <a:defRPr sz="2400" b="0">
                 <a:solidFill>
                   <a:srgbClr val="17333E"/>
@@ -6257,6 +6464,7 @@
               </a:defRPr>
             </a:lvl3pPr>
             <a:lvl4pPr>
+              <a:buNone/>
               <a:defRPr sz="2400" b="0">
                 <a:solidFill>
                   <a:srgbClr val="17333E"/>
@@ -6267,6 +6475,7 @@
               </a:defRPr>
             </a:lvl4pPr>
             <a:lvl5pPr>
+              <a:buNone/>
               <a:defRPr sz="2400" b="0">
                 <a:solidFill>
                   <a:srgbClr val="17333E"/>
@@ -6277,6 +6486,7 @@
               </a:defRPr>
             </a:lvl5pPr>
             <a:lvl6pPr>
+              <a:buNone/>
               <a:defRPr sz="2400" b="0">
                 <a:solidFill>
                   <a:srgbClr val="17333E"/>
@@ -6287,6 +6497,7 @@
               </a:defRPr>
             </a:lvl6pPr>
             <a:lvl7pPr>
+              <a:buNone/>
               <a:defRPr sz="2400" b="0">
                 <a:solidFill>
                   <a:srgbClr val="17333E"/>
@@ -6297,6 +6508,7 @@
               </a:defRPr>
             </a:lvl7pPr>
             <a:lvl8pPr>
+              <a:buNone/>
               <a:defRPr sz="2400" b="0">
                 <a:solidFill>
                   <a:srgbClr val="17333E"/>
@@ -6307,6 +6519,7 @@
               </a:defRPr>
             </a:lvl8pPr>
             <a:lvl9pPr>
+              <a:buNone/>
               <a:defRPr sz="2400" b="0">
                 <a:solidFill>
                   <a:srgbClr val="17333E"/>
@@ -6319,6 +6532,7 @@
           </a:lstStyle>
           <a:p xmlns:a="http://schemas.openxmlformats.org/drawingml/2006/main">
             <a:pPr>
+              <a:buNone/>
               <a:defRPr sz="2400" b="0">
                 <a:solidFill>
                   <a:srgbClr val="17333E"/>
@@ -6342,6 +6556,7 @@
           </a:p>
           <a:p xmlns:a="http://schemas.openxmlformats.org/drawingml/2006/main">
             <a:pPr>
+              <a:buNone/>
               <a:defRPr sz="2400" b="0">
                 <a:solidFill>
                   <a:srgbClr val="17333E"/>
@@ -6406,6 +6621,7 @@
               </a:defRPr>
             </a:defPPr>
             <a:lvl1pPr>
+              <a:buNone/>
               <a:defRPr sz="2100" b="0">
                 <a:solidFill>
                   <a:srgbClr val="526971"/>
@@ -6416,6 +6632,7 @@
               </a:defRPr>
             </a:lvl1pPr>
             <a:lvl2pPr>
+              <a:buNone/>
               <a:defRPr sz="2100" b="0">
                 <a:solidFill>
                   <a:srgbClr val="526971"/>
@@ -6426,6 +6643,7 @@
               </a:defRPr>
             </a:lvl2pPr>
             <a:lvl3pPr>
+              <a:buNone/>
               <a:defRPr sz="2100" b="0">
                 <a:solidFill>
                   <a:srgbClr val="526971"/>
@@ -6436,6 +6654,7 @@
               </a:defRPr>
             </a:lvl3pPr>
             <a:lvl4pPr>
+              <a:buNone/>
               <a:defRPr sz="2100" b="0">
                 <a:solidFill>
                   <a:srgbClr val="526971"/>
@@ -6446,6 +6665,7 @@
               </a:defRPr>
             </a:lvl4pPr>
             <a:lvl5pPr>
+              <a:buNone/>
               <a:defRPr sz="2100" b="0">
                 <a:solidFill>
                   <a:srgbClr val="526971"/>
@@ -6456,6 +6676,7 @@
               </a:defRPr>
             </a:lvl5pPr>
             <a:lvl6pPr>
+              <a:buNone/>
               <a:defRPr sz="2100" b="0">
                 <a:solidFill>
                   <a:srgbClr val="526971"/>
@@ -6466,6 +6687,7 @@
               </a:defRPr>
             </a:lvl6pPr>
             <a:lvl7pPr>
+              <a:buNone/>
               <a:defRPr sz="2100" b="0">
                 <a:solidFill>
                   <a:srgbClr val="526971"/>
@@ -6476,6 +6698,7 @@
               </a:defRPr>
             </a:lvl7pPr>
             <a:lvl8pPr>
+              <a:buNone/>
               <a:defRPr sz="2100" b="0">
                 <a:solidFill>
                   <a:srgbClr val="526971"/>
@@ -6486,6 +6709,7 @@
               </a:defRPr>
             </a:lvl8pPr>
             <a:lvl9pPr>
+              <a:buNone/>
               <a:defRPr sz="2100" b="0">
                 <a:solidFill>
                   <a:srgbClr val="526971"/>
@@ -6498,6 +6722,7 @@
           </a:lstStyle>
           <a:p xmlns:a="http://schemas.openxmlformats.org/drawingml/2006/main">
             <a:pPr>
+              <a:buNone/>
               <a:defRPr sz="2100" b="0">
                 <a:solidFill>
                   <a:srgbClr val="526971"/>
@@ -6591,6 +6816,7 @@
               </a:defRPr>
             </a:defPPr>
             <a:lvl1pPr>
+              <a:buNone/>
               <a:defRPr sz="3750" b="1">
                 <a:solidFill>
                   <a:srgbClr val="17333E"/>
@@ -6601,6 +6827,7 @@
               </a:defRPr>
             </a:lvl1pPr>
             <a:lvl2pPr>
+              <a:buNone/>
               <a:defRPr sz="3750" b="1">
                 <a:solidFill>
                   <a:srgbClr val="17333E"/>
@@ -6611,6 +6838,7 @@
               </a:defRPr>
             </a:lvl2pPr>
             <a:lvl3pPr>
+              <a:buNone/>
               <a:defRPr sz="3750" b="1">
                 <a:solidFill>
                   <a:srgbClr val="17333E"/>
@@ -6621,6 +6849,7 @@
               </a:defRPr>
             </a:lvl3pPr>
             <a:lvl4pPr>
+              <a:buNone/>
               <a:defRPr sz="3750" b="1">
                 <a:solidFill>
                   <a:srgbClr val="17333E"/>
@@ -6631,6 +6860,7 @@
               </a:defRPr>
             </a:lvl4pPr>
             <a:lvl5pPr>
+              <a:buNone/>
               <a:defRPr sz="3750" b="1">
                 <a:solidFill>
                   <a:srgbClr val="17333E"/>
@@ -6641,6 +6871,7 @@
               </a:defRPr>
             </a:lvl5pPr>
             <a:lvl6pPr>
+              <a:buNone/>
               <a:defRPr sz="3750" b="1">
                 <a:solidFill>
                   <a:srgbClr val="17333E"/>
@@ -6651,6 +6882,7 @@
               </a:defRPr>
             </a:lvl6pPr>
             <a:lvl7pPr>
+              <a:buNone/>
               <a:defRPr sz="3750" b="1">
                 <a:solidFill>
                   <a:srgbClr val="17333E"/>
@@ -6661,6 +6893,7 @@
               </a:defRPr>
             </a:lvl7pPr>
             <a:lvl8pPr>
+              <a:buNone/>
               <a:defRPr sz="3750" b="1">
                 <a:solidFill>
                   <a:srgbClr val="17333E"/>
@@ -6671,6 +6904,7 @@
               </a:defRPr>
             </a:lvl8pPr>
             <a:lvl9pPr>
+              <a:buNone/>
               <a:defRPr sz="3750" b="1">
                 <a:solidFill>
                   <a:srgbClr val="17333E"/>
@@ -6683,6 +6917,7 @@
           </a:lstStyle>
           <a:p xmlns:a="http://schemas.openxmlformats.org/drawingml/2006/main">
             <a:pPr>
+              <a:buNone/>
               <a:defRPr sz="3750" b="1">
                 <a:solidFill>
                   <a:srgbClr val="17333E"/>
@@ -6701,7 +6936,7 @@
                 <a:ea typeface="Arial"/>
                 <a:cs typeface="Arial"/>
               </a:rPr>
-              <a:t>Three experimental gates</a:t>
+              <a:t>Four experimental gates</a:t>
             </a:r>
           </a:p>
         </p:txBody>
@@ -6747,6 +6982,7 @@
               </a:defRPr>
             </a:defPPr>
             <a:lvl1pPr>
+              <a:buNone/>
               <a:defRPr sz="1350" b="0">
                 <a:solidFill>
                   <a:srgbClr val="526971"/>
@@ -6757,6 +6993,7 @@
               </a:defRPr>
             </a:lvl1pPr>
             <a:lvl2pPr>
+              <a:buNone/>
               <a:defRPr sz="1350" b="0">
                 <a:solidFill>
                   <a:srgbClr val="526971"/>
@@ -6767,6 +7004,7 @@
               </a:defRPr>
             </a:lvl2pPr>
             <a:lvl3pPr>
+              <a:buNone/>
               <a:defRPr sz="1350" b="0">
                 <a:solidFill>
                   <a:srgbClr val="526971"/>
@@ -6777,6 +7015,7 @@
               </a:defRPr>
             </a:lvl3pPr>
             <a:lvl4pPr>
+              <a:buNone/>
               <a:defRPr sz="1350" b="0">
                 <a:solidFill>
                   <a:srgbClr val="526971"/>
@@ -6787,6 +7026,7 @@
               </a:defRPr>
             </a:lvl4pPr>
             <a:lvl5pPr>
+              <a:buNone/>
               <a:defRPr sz="1350" b="0">
                 <a:solidFill>
                   <a:srgbClr val="526971"/>
@@ -6797,6 +7037,7 @@
               </a:defRPr>
             </a:lvl5pPr>
             <a:lvl6pPr>
+              <a:buNone/>
               <a:defRPr sz="1350" b="0">
                 <a:solidFill>
                   <a:srgbClr val="526971"/>
@@ -6807,6 +7048,7 @@
               </a:defRPr>
             </a:lvl6pPr>
             <a:lvl7pPr>
+              <a:buNone/>
               <a:defRPr sz="1350" b="0">
                 <a:solidFill>
                   <a:srgbClr val="526971"/>
@@ -6817,6 +7059,7 @@
               </a:defRPr>
             </a:lvl7pPr>
             <a:lvl8pPr>
+              <a:buNone/>
               <a:defRPr sz="1350" b="0">
                 <a:solidFill>
                   <a:srgbClr val="526971"/>
@@ -6827,6 +7070,7 @@
               </a:defRPr>
             </a:lvl8pPr>
             <a:lvl9pPr>
+              <a:buNone/>
               <a:defRPr sz="1350" b="0">
                 <a:solidFill>
                   <a:srgbClr val="526971"/>
@@ -6839,6 +7083,7 @@
           </a:lstStyle>
           <a:p xmlns:a="http://schemas.openxmlformats.org/drawingml/2006/main">
             <a:pPr>
+              <a:buNone/>
               <a:defRPr sz="1350" b="0">
                 <a:solidFill>
                   <a:srgbClr val="526971"/>
@@ -6903,6 +7148,7 @@
               </a:defRPr>
             </a:defPPr>
             <a:lvl1pPr>
+              <a:buNone/>
               <a:defRPr sz="1200" b="0">
                 <a:solidFill>
                   <a:srgbClr val="526971"/>
@@ -6913,6 +7159,7 @@
               </a:defRPr>
             </a:lvl1pPr>
             <a:lvl2pPr>
+              <a:buNone/>
               <a:defRPr sz="1200" b="0">
                 <a:solidFill>
                   <a:srgbClr val="526971"/>
@@ -6923,6 +7170,7 @@
               </a:defRPr>
             </a:lvl2pPr>
             <a:lvl3pPr>
+              <a:buNone/>
               <a:defRPr sz="1200" b="0">
                 <a:solidFill>
                   <a:srgbClr val="526971"/>
@@ -6933,6 +7181,7 @@
               </a:defRPr>
             </a:lvl3pPr>
             <a:lvl4pPr>
+              <a:buNone/>
               <a:defRPr sz="1200" b="0">
                 <a:solidFill>
                   <a:srgbClr val="526971"/>
@@ -6943,6 +7192,7 @@
               </a:defRPr>
             </a:lvl4pPr>
             <a:lvl5pPr>
+              <a:buNone/>
               <a:defRPr sz="1200" b="0">
                 <a:solidFill>
                   <a:srgbClr val="526971"/>
@@ -6953,6 +7203,7 @@
               </a:defRPr>
             </a:lvl5pPr>
             <a:lvl6pPr>
+              <a:buNone/>
               <a:defRPr sz="1200" b="0">
                 <a:solidFill>
                   <a:srgbClr val="526971"/>
@@ -6963,6 +7214,7 @@
               </a:defRPr>
             </a:lvl6pPr>
             <a:lvl7pPr>
+              <a:buNone/>
               <a:defRPr sz="1200" b="0">
                 <a:solidFill>
                   <a:srgbClr val="526971"/>
@@ -6973,6 +7225,7 @@
               </a:defRPr>
             </a:lvl7pPr>
             <a:lvl8pPr>
+              <a:buNone/>
               <a:defRPr sz="1200" b="0">
                 <a:solidFill>
                   <a:srgbClr val="526971"/>
@@ -6983,6 +7236,7 @@
               </a:defRPr>
             </a:lvl8pPr>
             <a:lvl9pPr>
+              <a:buNone/>
               <a:defRPr sz="1200" b="0">
                 <a:solidFill>
                   <a:srgbClr val="526971"/>
@@ -6995,6 +7249,7 @@
           </a:lstStyle>
           <a:p xmlns:a="http://schemas.openxmlformats.org/drawingml/2006/main">
             <a:pPr>
+              <a:buNone/>
               <a:defRPr sz="1200" b="0">
                 <a:solidFill>
                   <a:srgbClr val="526971"/>
@@ -7013,7 +7268,7 @@
                 <a:ea typeface="Arial"/>
                 <a:cs typeface="Arial"/>
               </a:rPr>
-              <a:t>PMID 31900865  /  MIPLYFFA label §12  /  proposed protocol</a:t>
+              <a:t>Functional rescue plan, gates A-D / proposed experiments</a:t>
             </a:r>
           </a:p>
         </p:txBody>
@@ -7034,8 +7289,8 @@
         </p:nvSpPr>
         <p:spPr>
           <a:xfrm xmlns:a="http://schemas.openxmlformats.org/drawingml/2006/main">
-            <a:off x="609600" y="1905000"/>
-            <a:ext cx="619125" cy="571500"/>
+            <a:off x="609600" y="1685925"/>
+            <a:ext cx="619125" cy="523875"/>
           </a:xfrm>
           <a:prstGeom xmlns:a="http://schemas.openxmlformats.org/drawingml/2006/main" prst="rect">
             <a:avLst/>
@@ -7059,6 +7314,7 @@
               </a:defRPr>
             </a:defPPr>
             <a:lvl1pPr>
+              <a:buNone/>
               <a:defRPr sz="3450" b="1">
                 <a:solidFill>
                   <a:srgbClr val="176C63"/>
@@ -7069,6 +7325,7 @@
               </a:defRPr>
             </a:lvl1pPr>
             <a:lvl2pPr>
+              <a:buNone/>
               <a:defRPr sz="3450" b="1">
                 <a:solidFill>
                   <a:srgbClr val="176C63"/>
@@ -7079,6 +7336,7 @@
               </a:defRPr>
             </a:lvl2pPr>
             <a:lvl3pPr>
+              <a:buNone/>
               <a:defRPr sz="3450" b="1">
                 <a:solidFill>
                   <a:srgbClr val="176C63"/>
@@ -7089,6 +7347,7 @@
               </a:defRPr>
             </a:lvl3pPr>
             <a:lvl4pPr>
+              <a:buNone/>
               <a:defRPr sz="3450" b="1">
                 <a:solidFill>
                   <a:srgbClr val="176C63"/>
@@ -7099,6 +7358,7 @@
               </a:defRPr>
             </a:lvl4pPr>
             <a:lvl5pPr>
+              <a:buNone/>
               <a:defRPr sz="3450" b="1">
                 <a:solidFill>
                   <a:srgbClr val="176C63"/>
@@ -7109,6 +7369,7 @@
               </a:defRPr>
             </a:lvl5pPr>
             <a:lvl6pPr>
+              <a:buNone/>
               <a:defRPr sz="3450" b="1">
                 <a:solidFill>
                   <a:srgbClr val="176C63"/>
@@ -7119,6 +7380,7 @@
               </a:defRPr>
             </a:lvl6pPr>
             <a:lvl7pPr>
+              <a:buNone/>
               <a:defRPr sz="3450" b="1">
                 <a:solidFill>
                   <a:srgbClr val="176C63"/>
@@ -7129,6 +7391,7 @@
               </a:defRPr>
             </a:lvl7pPr>
             <a:lvl8pPr>
+              <a:buNone/>
               <a:defRPr sz="3450" b="1">
                 <a:solidFill>
                   <a:srgbClr val="176C63"/>
@@ -7139,6 +7402,7 @@
               </a:defRPr>
             </a:lvl8pPr>
             <a:lvl9pPr>
+              <a:buNone/>
               <a:defRPr sz="3450" b="1">
                 <a:solidFill>
                   <a:srgbClr val="176C63"/>
@@ -7151,6 +7415,7 @@
           </a:lstStyle>
           <a:p xmlns:a="http://schemas.openxmlformats.org/drawingml/2006/main">
             <a:pPr>
+              <a:buNone/>
               <a:defRPr sz="3450" b="1">
                 <a:solidFill>
                   <a:srgbClr val="176C63"/>
@@ -7169,7 +7434,7 @@
                 <a:ea typeface="Arial"/>
                 <a:cs typeface="Arial"/>
               </a:rPr>
-              <a:t>1</a:t>
+              <a:t>A</a:t>
             </a:r>
           </a:p>
         </p:txBody>
@@ -7190,8 +7455,8 @@
         </p:nvSpPr>
         <p:spPr>
           <a:xfrm xmlns:a="http://schemas.openxmlformats.org/drawingml/2006/main">
-            <a:off x="1571625" y="1905000"/>
-            <a:ext cx="9810750" cy="523875"/>
+            <a:off x="1571625" y="1685925"/>
+            <a:ext cx="9810750" cy="428625"/>
           </a:xfrm>
           <a:prstGeom xmlns:a="http://schemas.openxmlformats.org/drawingml/2006/main" prst="rect">
             <a:avLst/>
@@ -7205,7 +7470,7 @@
           <a:bodyPr xmlns:a="http://schemas.openxmlformats.org/drawingml/2006/main" anchor="t"/>
           <a:lstStyle xmlns:a="http://schemas.openxmlformats.org/drawingml/2006/main">
             <a:defPPr>
-              <a:defRPr sz="2550" b="1">
+              <a:defRPr sz="2400" b="1">
                 <a:solidFill>
                   <a:srgbClr val="17333E"/>
                 </a:solidFill>
@@ -7215,6 +7480,7 @@
               </a:defRPr>
             </a:defPPr>
             <a:lvl1pPr>
+              <a:buNone/>
               <a:defRPr sz="2550" b="1">
                 <a:solidFill>
                   <a:srgbClr val="17333E"/>
@@ -7225,6 +7491,7 @@
               </a:defRPr>
             </a:lvl1pPr>
             <a:lvl2pPr>
+              <a:buNone/>
               <a:defRPr sz="2550" b="1">
                 <a:solidFill>
                   <a:srgbClr val="17333E"/>
@@ -7235,6 +7502,7 @@
               </a:defRPr>
             </a:lvl2pPr>
             <a:lvl3pPr>
+              <a:buNone/>
               <a:defRPr sz="2550" b="1">
                 <a:solidFill>
                   <a:srgbClr val="17333E"/>
@@ -7245,6 +7513,7 @@
               </a:defRPr>
             </a:lvl3pPr>
             <a:lvl4pPr>
+              <a:buNone/>
               <a:defRPr sz="2550" b="1">
                 <a:solidFill>
                   <a:srgbClr val="17333E"/>
@@ -7255,6 +7524,7 @@
               </a:defRPr>
             </a:lvl4pPr>
             <a:lvl5pPr>
+              <a:buNone/>
               <a:defRPr sz="2550" b="1">
                 <a:solidFill>
                   <a:srgbClr val="17333E"/>
@@ -7265,6 +7535,7 @@
               </a:defRPr>
             </a:lvl5pPr>
             <a:lvl6pPr>
+              <a:buNone/>
               <a:defRPr sz="2550" b="1">
                 <a:solidFill>
                   <a:srgbClr val="17333E"/>
@@ -7275,6 +7546,7 @@
               </a:defRPr>
             </a:lvl6pPr>
             <a:lvl7pPr>
+              <a:buNone/>
               <a:defRPr sz="2550" b="1">
                 <a:solidFill>
                   <a:srgbClr val="17333E"/>
@@ -7285,6 +7557,7 @@
               </a:defRPr>
             </a:lvl7pPr>
             <a:lvl8pPr>
+              <a:buNone/>
               <a:defRPr sz="2550" b="1">
                 <a:solidFill>
                   <a:srgbClr val="17333E"/>
@@ -7295,6 +7568,7 @@
               </a:defRPr>
             </a:lvl8pPr>
             <a:lvl9pPr>
+              <a:buNone/>
               <a:defRPr sz="2550" b="1">
                 <a:solidFill>
                   <a:srgbClr val="17333E"/>
@@ -7307,7 +7581,8 @@
           </a:lstStyle>
           <a:p xmlns:a="http://schemas.openxmlformats.org/drawingml/2006/main">
             <a:pPr>
-              <a:defRPr sz="2550" b="1">
+              <a:buNone/>
+              <a:defRPr sz="2400" b="1">
                 <a:solidFill>
                   <a:srgbClr val="17333E"/>
                 </a:solidFill>
@@ -7317,7 +7592,7 @@
               </a:defRPr>
             </a:pPr>
             <a:r>
-              <a:rPr sz="2550" b="1">
+              <a:rPr sz="2400" b="1">
                 <a:solidFill>
                   <a:srgbClr val="17333E"/>
                 </a:solidFill>
@@ -7325,7 +7600,7 @@
                 <a:ea typeface="Arial"/>
                 <a:cs typeface="Arial"/>
               </a:rPr>
-              <a:t>Qualify the model</a:t>
+              <a:t>Establish the variant's effect</a:t>
             </a:r>
           </a:p>
         </p:txBody>
@@ -7346,8 +7621,8 @@
         </p:nvSpPr>
         <p:spPr>
           <a:xfrm xmlns:a="http://schemas.openxmlformats.org/drawingml/2006/main">
-            <a:off x="1571625" y="2419350"/>
-            <a:ext cx="9810750" cy="476250"/>
+            <a:off x="1571625" y="2105025"/>
+            <a:ext cx="9810750" cy="400050"/>
           </a:xfrm>
           <a:prstGeom xmlns:a="http://schemas.openxmlformats.org/drawingml/2006/main" prst="rect">
             <a:avLst/>
@@ -7361,7 +7636,7 @@
           <a:bodyPr xmlns:a="http://schemas.openxmlformats.org/drawingml/2006/main" anchor="t"/>
           <a:lstStyle xmlns:a="http://schemas.openxmlformats.org/drawingml/2006/main">
             <a:defPPr>
-              <a:defRPr sz="2100" b="0">
+              <a:defRPr sz="1950" b="0">
                 <a:solidFill>
                   <a:srgbClr val="526971"/>
                 </a:solidFill>
@@ -7371,6 +7646,7 @@
               </a:defRPr>
             </a:defPPr>
             <a:lvl1pPr>
+              <a:buNone/>
               <a:defRPr sz="2100" b="0">
                 <a:solidFill>
                   <a:srgbClr val="526971"/>
@@ -7381,6 +7657,7 @@
               </a:defRPr>
             </a:lvl1pPr>
             <a:lvl2pPr>
+              <a:buNone/>
               <a:defRPr sz="2100" b="0">
                 <a:solidFill>
                   <a:srgbClr val="526971"/>
@@ -7391,6 +7668,7 @@
               </a:defRPr>
             </a:lvl2pPr>
             <a:lvl3pPr>
+              <a:buNone/>
               <a:defRPr sz="2100" b="0">
                 <a:solidFill>
                   <a:srgbClr val="526971"/>
@@ -7401,6 +7679,7 @@
               </a:defRPr>
             </a:lvl3pPr>
             <a:lvl4pPr>
+              <a:buNone/>
               <a:defRPr sz="2100" b="0">
                 <a:solidFill>
                   <a:srgbClr val="526971"/>
@@ -7411,6 +7690,7 @@
               </a:defRPr>
             </a:lvl4pPr>
             <a:lvl5pPr>
+              <a:buNone/>
               <a:defRPr sz="2100" b="0">
                 <a:solidFill>
                   <a:srgbClr val="526971"/>
@@ -7421,6 +7701,7 @@
               </a:defRPr>
             </a:lvl5pPr>
             <a:lvl6pPr>
+              <a:buNone/>
               <a:defRPr sz="2100" b="0">
                 <a:solidFill>
                   <a:srgbClr val="526971"/>
@@ -7431,6 +7712,7 @@
               </a:defRPr>
             </a:lvl6pPr>
             <a:lvl7pPr>
+              <a:buNone/>
               <a:defRPr sz="2100" b="0">
                 <a:solidFill>
                   <a:srgbClr val="526971"/>
@@ -7441,6 +7723,7 @@
               </a:defRPr>
             </a:lvl7pPr>
             <a:lvl8pPr>
+              <a:buNone/>
               <a:defRPr sz="2100" b="0">
                 <a:solidFill>
                   <a:srgbClr val="526971"/>
@@ -7451,6 +7734,7 @@
               </a:defRPr>
             </a:lvl8pPr>
             <a:lvl9pPr>
+              <a:buNone/>
               <a:defRPr sz="2100" b="0">
                 <a:solidFill>
                   <a:srgbClr val="526971"/>
@@ -7463,7 +7747,8 @@
           </a:lstStyle>
           <a:p xmlns:a="http://schemas.openxmlformats.org/drawingml/2006/main">
             <a:pPr>
-              <a:defRPr sz="2100" b="0">
+              <a:buNone/>
+              <a:defRPr sz="1950" b="0">
                 <a:solidFill>
                   <a:srgbClr val="526971"/>
                 </a:solidFill>
@@ -7473,7 +7758,7 @@
               </a:defRPr>
             </a:pPr>
             <a:r>
-              <a:rPr sz="2100" b="0">
+              <a:rPr sz="1950" b="0">
                 <a:solidFill>
                   <a:srgbClr val="526971"/>
                 </a:solidFill>
@@ -7481,7 +7766,7 @@
                 <a:ea typeface="Arial"/>
                 <a:cs typeface="Arial"/>
               </a:rPr>
-              <a:t>Full-length protein and controls</a:t>
+              <a:t>Full-length protein at matched abundance</a:t>
             </a:r>
           </a:p>
         </p:txBody>
@@ -7502,8 +7787,8 @@
         </p:nvSpPr>
         <p:spPr>
           <a:xfrm xmlns:a="http://schemas.openxmlformats.org/drawingml/2006/main">
-            <a:off x="609600" y="3095625"/>
-            <a:ext cx="619125" cy="571500"/>
+            <a:off x="609600" y="2638425"/>
+            <a:ext cx="619125" cy="523875"/>
           </a:xfrm>
           <a:prstGeom xmlns:a="http://schemas.openxmlformats.org/drawingml/2006/main" prst="rect">
             <a:avLst/>
@@ -7527,6 +7812,7 @@
               </a:defRPr>
             </a:defPPr>
             <a:lvl1pPr>
+              <a:buNone/>
               <a:defRPr sz="3450" b="1">
                 <a:solidFill>
                   <a:srgbClr val="176C63"/>
@@ -7537,6 +7823,7 @@
               </a:defRPr>
             </a:lvl1pPr>
             <a:lvl2pPr>
+              <a:buNone/>
               <a:defRPr sz="3450" b="1">
                 <a:solidFill>
                   <a:srgbClr val="176C63"/>
@@ -7547,6 +7834,7 @@
               </a:defRPr>
             </a:lvl2pPr>
             <a:lvl3pPr>
+              <a:buNone/>
               <a:defRPr sz="3450" b="1">
                 <a:solidFill>
                   <a:srgbClr val="176C63"/>
@@ -7557,6 +7845,7 @@
               </a:defRPr>
             </a:lvl3pPr>
             <a:lvl4pPr>
+              <a:buNone/>
               <a:defRPr sz="3450" b="1">
                 <a:solidFill>
                   <a:srgbClr val="176C63"/>
@@ -7567,6 +7856,7 @@
               </a:defRPr>
             </a:lvl4pPr>
             <a:lvl5pPr>
+              <a:buNone/>
               <a:defRPr sz="3450" b="1">
                 <a:solidFill>
                   <a:srgbClr val="176C63"/>
@@ -7577,6 +7867,7 @@
               </a:defRPr>
             </a:lvl5pPr>
             <a:lvl6pPr>
+              <a:buNone/>
               <a:defRPr sz="3450" b="1">
                 <a:solidFill>
                   <a:srgbClr val="176C63"/>
@@ -7587,6 +7878,7 @@
               </a:defRPr>
             </a:lvl6pPr>
             <a:lvl7pPr>
+              <a:buNone/>
               <a:defRPr sz="3450" b="1">
                 <a:solidFill>
                   <a:srgbClr val="176C63"/>
@@ -7597,6 +7889,7 @@
               </a:defRPr>
             </a:lvl7pPr>
             <a:lvl8pPr>
+              <a:buNone/>
               <a:defRPr sz="3450" b="1">
                 <a:solidFill>
                   <a:srgbClr val="176C63"/>
@@ -7607,6 +7900,7 @@
               </a:defRPr>
             </a:lvl8pPr>
             <a:lvl9pPr>
+              <a:buNone/>
               <a:defRPr sz="3450" b="1">
                 <a:solidFill>
                   <a:srgbClr val="176C63"/>
@@ -7619,6 +7913,7 @@
           </a:lstStyle>
           <a:p xmlns:a="http://schemas.openxmlformats.org/drawingml/2006/main">
             <a:pPr>
+              <a:buNone/>
               <a:defRPr sz="3450" b="1">
                 <a:solidFill>
                   <a:srgbClr val="176C63"/>
@@ -7637,7 +7932,7 @@
                 <a:ea typeface="Arial"/>
                 <a:cs typeface="Arial"/>
               </a:rPr>
-              <a:t>2</a:t>
+              <a:t>B</a:t>
             </a:r>
           </a:p>
         </p:txBody>
@@ -7658,8 +7953,8 @@
         </p:nvSpPr>
         <p:spPr>
           <a:xfrm xmlns:a="http://schemas.openxmlformats.org/drawingml/2006/main">
-            <a:off x="1571625" y="3095625"/>
-            <a:ext cx="9810750" cy="523875"/>
+            <a:off x="1571625" y="2638425"/>
+            <a:ext cx="9810750" cy="428625"/>
           </a:xfrm>
           <a:prstGeom xmlns:a="http://schemas.openxmlformats.org/drawingml/2006/main" prst="rect">
             <a:avLst/>
@@ -7673,7 +7968,7 @@
           <a:bodyPr xmlns:a="http://schemas.openxmlformats.org/drawingml/2006/main" anchor="t"/>
           <a:lstStyle xmlns:a="http://schemas.openxmlformats.org/drawingml/2006/main">
             <a:defPPr>
-              <a:defRPr sz="2550" b="1">
+              <a:defRPr sz="2400" b="1">
                 <a:solidFill>
                   <a:srgbClr val="17333E"/>
                 </a:solidFill>
@@ -7683,6 +7978,7 @@
               </a:defRPr>
             </a:defPPr>
             <a:lvl1pPr>
+              <a:buNone/>
               <a:defRPr sz="2550" b="1">
                 <a:solidFill>
                   <a:srgbClr val="17333E"/>
@@ -7693,6 +7989,7 @@
               </a:defRPr>
             </a:lvl1pPr>
             <a:lvl2pPr>
+              <a:buNone/>
               <a:defRPr sz="2550" b="1">
                 <a:solidFill>
                   <a:srgbClr val="17333E"/>
@@ -7703,6 +8000,7 @@
               </a:defRPr>
             </a:lvl2pPr>
             <a:lvl3pPr>
+              <a:buNone/>
               <a:defRPr sz="2550" b="1">
                 <a:solidFill>
                   <a:srgbClr val="17333E"/>
@@ -7713,6 +8011,7 @@
               </a:defRPr>
             </a:lvl3pPr>
             <a:lvl4pPr>
+              <a:buNone/>
               <a:defRPr sz="2550" b="1">
                 <a:solidFill>
                   <a:srgbClr val="17333E"/>
@@ -7723,6 +8022,7 @@
               </a:defRPr>
             </a:lvl4pPr>
             <a:lvl5pPr>
+              <a:buNone/>
               <a:defRPr sz="2550" b="1">
                 <a:solidFill>
                   <a:srgbClr val="17333E"/>
@@ -7733,6 +8033,7 @@
               </a:defRPr>
             </a:lvl5pPr>
             <a:lvl6pPr>
+              <a:buNone/>
               <a:defRPr sz="2550" b="1">
                 <a:solidFill>
                   <a:srgbClr val="17333E"/>
@@ -7743,6 +8044,7 @@
               </a:defRPr>
             </a:lvl6pPr>
             <a:lvl7pPr>
+              <a:buNone/>
               <a:defRPr sz="2550" b="1">
                 <a:solidFill>
                   <a:srgbClr val="17333E"/>
@@ -7753,6 +8055,7 @@
               </a:defRPr>
             </a:lvl7pPr>
             <a:lvl8pPr>
+              <a:buNone/>
               <a:defRPr sz="2550" b="1">
                 <a:solidFill>
                   <a:srgbClr val="17333E"/>
@@ -7763,6 +8066,7 @@
               </a:defRPr>
             </a:lvl8pPr>
             <a:lvl9pPr>
+              <a:buNone/>
               <a:defRPr sz="2550" b="1">
                 <a:solidFill>
                   <a:srgbClr val="17333E"/>
@@ -7775,7 +8079,8 @@
           </a:lstStyle>
           <a:p xmlns:a="http://schemas.openxmlformats.org/drawingml/2006/main">
             <a:pPr>
-              <a:defRPr sz="2550" b="1">
+              <a:buNone/>
+              <a:defRPr sz="2400" b="1">
                 <a:solidFill>
                   <a:srgbClr val="17333E"/>
                 </a:solidFill>
@@ -7785,7 +8090,7 @@
               </a:defRPr>
             </a:pPr>
             <a:r>
-              <a:rPr sz="2550" b="1">
+              <a:rPr sz="2400" b="1">
                 <a:solidFill>
                   <a:srgbClr val="17333E"/>
                 </a:solidFill>
@@ -7793,7 +8098,7 @@
                 <a:ea typeface="Arial"/>
                 <a:cs typeface="Arial"/>
               </a:rPr>
-              <a:t>Check exposure and response</a:t>
+              <a:t>Validate measurement and response</a:t>
             </a:r>
           </a:p>
         </p:txBody>
@@ -7814,8 +8119,8 @@
         </p:nvSpPr>
         <p:spPr>
           <a:xfrm xmlns:a="http://schemas.openxmlformats.org/drawingml/2006/main">
-            <a:off x="1571625" y="3609975"/>
-            <a:ext cx="9810750" cy="476250"/>
+            <a:off x="1571625" y="3057525"/>
+            <a:ext cx="9810750" cy="400050"/>
           </a:xfrm>
           <a:prstGeom xmlns:a="http://schemas.openxmlformats.org/drawingml/2006/main" prst="rect">
             <a:avLst/>
@@ -7829,7 +8134,7 @@
           <a:bodyPr xmlns:a="http://schemas.openxmlformats.org/drawingml/2006/main" anchor="t"/>
           <a:lstStyle xmlns:a="http://schemas.openxmlformats.org/drawingml/2006/main">
             <a:defPPr>
-              <a:defRPr sz="2100" b="0">
+              <a:defRPr sz="1950" b="0">
                 <a:solidFill>
                   <a:srgbClr val="526971"/>
                 </a:solidFill>
@@ -7839,6 +8144,7 @@
               </a:defRPr>
             </a:defPPr>
             <a:lvl1pPr>
+              <a:buNone/>
               <a:defRPr sz="2100" b="0">
                 <a:solidFill>
                   <a:srgbClr val="526971"/>
@@ -7849,6 +8155,7 @@
               </a:defRPr>
             </a:lvl1pPr>
             <a:lvl2pPr>
+              <a:buNone/>
               <a:defRPr sz="2100" b="0">
                 <a:solidFill>
                   <a:srgbClr val="526971"/>
@@ -7859,6 +8166,7 @@
               </a:defRPr>
             </a:lvl2pPr>
             <a:lvl3pPr>
+              <a:buNone/>
               <a:defRPr sz="2100" b="0">
                 <a:solidFill>
                   <a:srgbClr val="526971"/>
@@ -7869,6 +8177,7 @@
               </a:defRPr>
             </a:lvl3pPr>
             <a:lvl4pPr>
+              <a:buNone/>
               <a:defRPr sz="2100" b="0">
                 <a:solidFill>
                   <a:srgbClr val="526971"/>
@@ -7879,6 +8188,7 @@
               </a:defRPr>
             </a:lvl4pPr>
             <a:lvl5pPr>
+              <a:buNone/>
               <a:defRPr sz="2100" b="0">
                 <a:solidFill>
                   <a:srgbClr val="526971"/>
@@ -7889,6 +8199,7 @@
               </a:defRPr>
             </a:lvl5pPr>
             <a:lvl6pPr>
+              <a:buNone/>
               <a:defRPr sz="2100" b="0">
                 <a:solidFill>
                   <a:srgbClr val="526971"/>
@@ -7899,6 +8210,7 @@
               </a:defRPr>
             </a:lvl6pPr>
             <a:lvl7pPr>
+              <a:buNone/>
               <a:defRPr sz="2100" b="0">
                 <a:solidFill>
                   <a:srgbClr val="526971"/>
@@ -7909,6 +8221,7 @@
               </a:defRPr>
             </a:lvl7pPr>
             <a:lvl8pPr>
+              <a:buNone/>
               <a:defRPr sz="2100" b="0">
                 <a:solidFill>
                   <a:srgbClr val="526971"/>
@@ -7919,6 +8232,7 @@
               </a:defRPr>
             </a:lvl8pPr>
             <a:lvl9pPr>
+              <a:buNone/>
               <a:defRPr sz="2100" b="0">
                 <a:solidFill>
                   <a:srgbClr val="526971"/>
@@ -7931,7 +8245,8 @@
           </a:lstStyle>
           <a:p xmlns:a="http://schemas.openxmlformats.org/drawingml/2006/main">
             <a:pPr>
-              <a:defRPr sz="2100" b="0">
+              <a:buNone/>
+              <a:defRPr sz="1950" b="0">
                 <a:solidFill>
                   <a:srgbClr val="526971"/>
                 </a:solidFill>
@@ -7941,7 +8256,7 @@
               </a:defRPr>
             </a:pPr>
             <a:r>
-              <a:rPr sz="2100" b="0">
+              <a:rPr sz="1950" b="0">
                 <a:solidFill>
                   <a:srgbClr val="526971"/>
                 </a:solidFill>
@@ -7949,7 +8264,7 @@
                 <a:ea typeface="Arial"/>
                 <a:cs typeface="Arial"/>
               </a:rPr>
-              <a:t>Test the clinically anchored range</a:t>
+              <a:t>Qualified controls and measured exposure</a:t>
             </a:r>
           </a:p>
         </p:txBody>
@@ -7970,8 +8285,8 @@
         </p:nvSpPr>
         <p:spPr>
           <a:xfrm xmlns:a="http://schemas.openxmlformats.org/drawingml/2006/main">
-            <a:off x="609600" y="4286250"/>
-            <a:ext cx="619125" cy="571500"/>
+            <a:off x="609600" y="3590925"/>
+            <a:ext cx="619125" cy="523875"/>
           </a:xfrm>
           <a:prstGeom xmlns:a="http://schemas.openxmlformats.org/drawingml/2006/main" prst="rect">
             <a:avLst/>
@@ -7995,6 +8310,7 @@
               </a:defRPr>
             </a:defPPr>
             <a:lvl1pPr>
+              <a:buNone/>
               <a:defRPr sz="3450" b="1">
                 <a:solidFill>
                   <a:srgbClr val="176C63"/>
@@ -8005,6 +8321,7 @@
               </a:defRPr>
             </a:lvl1pPr>
             <a:lvl2pPr>
+              <a:buNone/>
               <a:defRPr sz="3450" b="1">
                 <a:solidFill>
                   <a:srgbClr val="176C63"/>
@@ -8015,6 +8332,7 @@
               </a:defRPr>
             </a:lvl2pPr>
             <a:lvl3pPr>
+              <a:buNone/>
               <a:defRPr sz="3450" b="1">
                 <a:solidFill>
                   <a:srgbClr val="176C63"/>
@@ -8025,6 +8343,7 @@
               </a:defRPr>
             </a:lvl3pPr>
             <a:lvl4pPr>
+              <a:buNone/>
               <a:defRPr sz="3450" b="1">
                 <a:solidFill>
                   <a:srgbClr val="176C63"/>
@@ -8035,6 +8354,7 @@
               </a:defRPr>
             </a:lvl4pPr>
             <a:lvl5pPr>
+              <a:buNone/>
               <a:defRPr sz="3450" b="1">
                 <a:solidFill>
                   <a:srgbClr val="176C63"/>
@@ -8045,6 +8365,7 @@
               </a:defRPr>
             </a:lvl5pPr>
             <a:lvl6pPr>
+              <a:buNone/>
               <a:defRPr sz="3450" b="1">
                 <a:solidFill>
                   <a:srgbClr val="176C63"/>
@@ -8055,6 +8376,7 @@
               </a:defRPr>
             </a:lvl6pPr>
             <a:lvl7pPr>
+              <a:buNone/>
               <a:defRPr sz="3450" b="1">
                 <a:solidFill>
                   <a:srgbClr val="176C63"/>
@@ -8065,6 +8387,7 @@
               </a:defRPr>
             </a:lvl7pPr>
             <a:lvl8pPr>
+              <a:buNone/>
               <a:defRPr sz="3450" b="1">
                 <a:solidFill>
                   <a:srgbClr val="176C63"/>
@@ -8075,6 +8398,7 @@
               </a:defRPr>
             </a:lvl8pPr>
             <a:lvl9pPr>
+              <a:buNone/>
               <a:defRPr sz="3450" b="1">
                 <a:solidFill>
                   <a:srgbClr val="176C63"/>
@@ -8087,6 +8411,7 @@
           </a:lstStyle>
           <a:p xmlns:a="http://schemas.openxmlformats.org/drawingml/2006/main">
             <a:pPr>
+              <a:buNone/>
               <a:defRPr sz="3450" b="1">
                 <a:solidFill>
                   <a:srgbClr val="176C63"/>
@@ -8105,7 +8430,7 @@
                 <a:ea typeface="Arial"/>
                 <a:cs typeface="Arial"/>
               </a:rPr>
-              <a:t>3</a:t>
+              <a:t>C</a:t>
             </a:r>
           </a:p>
         </p:txBody>
@@ -8126,8 +8451,8 @@
         </p:nvSpPr>
         <p:spPr>
           <a:xfrm xmlns:a="http://schemas.openxmlformats.org/drawingml/2006/main">
-            <a:off x="1571625" y="4286250"/>
-            <a:ext cx="9810750" cy="523875"/>
+            <a:off x="1571625" y="3590925"/>
+            <a:ext cx="9810750" cy="428625"/>
           </a:xfrm>
           <a:prstGeom xmlns:a="http://schemas.openxmlformats.org/drawingml/2006/main" prst="rect">
             <a:avLst/>
@@ -8141,7 +8466,7 @@
           <a:bodyPr xmlns:a="http://schemas.openxmlformats.org/drawingml/2006/main" anchor="t"/>
           <a:lstStyle xmlns:a="http://schemas.openxmlformats.org/drawingml/2006/main">
             <a:defPPr>
-              <a:defRPr sz="2550" b="1">
+              <a:defRPr sz="2400" b="1">
                 <a:solidFill>
                   <a:srgbClr val="17333E"/>
                 </a:solidFill>
@@ -8151,6 +8476,7 @@
               </a:defRPr>
             </a:defPPr>
             <a:lvl1pPr>
+              <a:buNone/>
               <a:defRPr sz="2550" b="1">
                 <a:solidFill>
                   <a:srgbClr val="17333E"/>
@@ -8161,6 +8487,7 @@
               </a:defRPr>
             </a:lvl1pPr>
             <a:lvl2pPr>
+              <a:buNone/>
               <a:defRPr sz="2550" b="1">
                 <a:solidFill>
                   <a:srgbClr val="17333E"/>
@@ -8171,6 +8498,7 @@
               </a:defRPr>
             </a:lvl2pPr>
             <a:lvl3pPr>
+              <a:buNone/>
               <a:defRPr sz="2550" b="1">
                 <a:solidFill>
                   <a:srgbClr val="17333E"/>
@@ -8181,6 +8509,7 @@
               </a:defRPr>
             </a:lvl3pPr>
             <a:lvl4pPr>
+              <a:buNone/>
               <a:defRPr sz="2550" b="1">
                 <a:solidFill>
                   <a:srgbClr val="17333E"/>
@@ -8191,6 +8520,7 @@
               </a:defRPr>
             </a:lvl4pPr>
             <a:lvl5pPr>
+              <a:buNone/>
               <a:defRPr sz="2550" b="1">
                 <a:solidFill>
                   <a:srgbClr val="17333E"/>
@@ -8201,6 +8531,7 @@
               </a:defRPr>
             </a:lvl5pPr>
             <a:lvl6pPr>
+              <a:buNone/>
               <a:defRPr sz="2550" b="1">
                 <a:solidFill>
                   <a:srgbClr val="17333E"/>
@@ -8211,6 +8542,7 @@
               </a:defRPr>
             </a:lvl6pPr>
             <a:lvl7pPr>
+              <a:buNone/>
               <a:defRPr sz="2550" b="1">
                 <a:solidFill>
                   <a:srgbClr val="17333E"/>
@@ -8221,6 +8553,7 @@
               </a:defRPr>
             </a:lvl7pPr>
             <a:lvl8pPr>
+              <a:buNone/>
               <a:defRPr sz="2550" b="1">
                 <a:solidFill>
                   <a:srgbClr val="17333E"/>
@@ -8231,6 +8564,7 @@
               </a:defRPr>
             </a:lvl8pPr>
             <a:lvl9pPr>
+              <a:buNone/>
               <a:defRPr sz="2550" b="1">
                 <a:solidFill>
                   <a:srgbClr val="17333E"/>
@@ -8243,7 +8577,8 @@
           </a:lstStyle>
           <a:p xmlns:a="http://schemas.openxmlformats.org/drawingml/2006/main">
             <a:pPr>
-              <a:defRPr sz="2550" b="1">
+              <a:buNone/>
+              <a:defRPr sz="2400" b="1">
                 <a:solidFill>
                   <a:srgbClr val="17333E"/>
                 </a:solidFill>
@@ -8253,7 +8588,7 @@
               </a:defRPr>
             </a:pPr>
             <a:r>
-              <a:rPr sz="2550" b="1">
+              <a:rPr sz="2400" b="1">
                 <a:solidFill>
                   <a:srgbClr val="17333E"/>
                 </a:solidFill>
@@ -8261,7 +8596,7 @@
                 <a:ea typeface="Arial"/>
                 <a:cs typeface="Arial"/>
               </a:rPr>
-              <a:t>Require chromosome-segregation benefit</a:t>
+              <a:t>Measure segregation and cell fate</a:t>
             </a:r>
           </a:p>
         </p:txBody>
@@ -8282,8 +8617,8 @@
         </p:nvSpPr>
         <p:spPr>
           <a:xfrm xmlns:a="http://schemas.openxmlformats.org/drawingml/2006/main">
-            <a:off x="1571625" y="4800600"/>
-            <a:ext cx="9810750" cy="476250"/>
+            <a:off x="1571625" y="4010025"/>
+            <a:ext cx="9810750" cy="400050"/>
           </a:xfrm>
           <a:prstGeom xmlns:a="http://schemas.openxmlformats.org/drawingml/2006/main" prst="rect">
             <a:avLst/>
@@ -8297,7 +8632,7 @@
           <a:bodyPr xmlns:a="http://schemas.openxmlformats.org/drawingml/2006/main" anchor="t"/>
           <a:lstStyle xmlns:a="http://schemas.openxmlformats.org/drawingml/2006/main">
             <a:defPPr>
-              <a:defRPr sz="2100" b="0">
+              <a:defRPr sz="1950" b="0">
                 <a:solidFill>
                   <a:srgbClr val="526971"/>
                 </a:solidFill>
@@ -8307,6 +8642,7 @@
               </a:defRPr>
             </a:defPPr>
             <a:lvl1pPr>
+              <a:buNone/>
               <a:defRPr sz="2100" b="0">
                 <a:solidFill>
                   <a:srgbClr val="526971"/>
@@ -8317,6 +8653,7 @@
               </a:defRPr>
             </a:lvl1pPr>
             <a:lvl2pPr>
+              <a:buNone/>
               <a:defRPr sz="2100" b="0">
                 <a:solidFill>
                   <a:srgbClr val="526971"/>
@@ -8327,6 +8664,7 @@
               </a:defRPr>
             </a:lvl2pPr>
             <a:lvl3pPr>
+              <a:buNone/>
               <a:defRPr sz="2100" b="0">
                 <a:solidFill>
                   <a:srgbClr val="526971"/>
@@ -8337,6 +8675,7 @@
               </a:defRPr>
             </a:lvl3pPr>
             <a:lvl4pPr>
+              <a:buNone/>
               <a:defRPr sz="2100" b="0">
                 <a:solidFill>
                   <a:srgbClr val="526971"/>
@@ -8347,6 +8686,7 @@
               </a:defRPr>
             </a:lvl4pPr>
             <a:lvl5pPr>
+              <a:buNone/>
               <a:defRPr sz="2100" b="0">
                 <a:solidFill>
                   <a:srgbClr val="526971"/>
@@ -8357,6 +8697,7 @@
               </a:defRPr>
             </a:lvl5pPr>
             <a:lvl6pPr>
+              <a:buNone/>
               <a:defRPr sz="2100" b="0">
                 <a:solidFill>
                   <a:srgbClr val="526971"/>
@@ -8367,6 +8708,7 @@
               </a:defRPr>
             </a:lvl6pPr>
             <a:lvl7pPr>
+              <a:buNone/>
               <a:defRPr sz="2100" b="0">
                 <a:solidFill>
                   <a:srgbClr val="526971"/>
@@ -8377,6 +8719,7 @@
               </a:defRPr>
             </a:lvl7pPr>
             <a:lvl8pPr>
+              <a:buNone/>
               <a:defRPr sz="2100" b="0">
                 <a:solidFill>
                   <a:srgbClr val="526971"/>
@@ -8387,6 +8730,7 @@
               </a:defRPr>
             </a:lvl8pPr>
             <a:lvl9pPr>
+              <a:buNone/>
               <a:defRPr sz="2100" b="0">
                 <a:solidFill>
                   <a:srgbClr val="526971"/>
@@ -8399,7 +8743,8 @@
           </a:lstStyle>
           <a:p xmlns:a="http://schemas.openxmlformats.org/drawingml/2006/main">
             <a:pPr>
-              <a:defRPr sz="2100" b="0">
+              <a:buNone/>
+              <a:defRPr sz="1950" b="0">
                 <a:solidFill>
                   <a:srgbClr val="526971"/>
                 </a:solidFill>
@@ -8409,7 +8754,7 @@
               </a:defRPr>
             </a:pPr>
             <a:r>
-              <a:rPr sz="2100" b="0">
+              <a:rPr sz="1950" b="0">
                 <a:solidFill>
                   <a:srgbClr val="526971"/>
                 </a:solidFill>
@@ -8417,7 +8762,7 @@
                 <a:ea typeface="Arial"/>
                 <a:cs typeface="Arial"/>
               </a:rPr>
-              <a:t>Track division, survival and selection</a:t>
+              <a:t>Separate division, death, arrest and selection</a:t>
             </a:r>
           </a:p>
         </p:txBody>
@@ -8438,8 +8783,8 @@
         </p:nvSpPr>
         <p:spPr>
           <a:xfrm xmlns:a="http://schemas.openxmlformats.org/drawingml/2006/main">
-            <a:off x="609600" y="5715000"/>
-            <a:ext cx="10972800" cy="476250"/>
+            <a:off x="609600" y="5810250"/>
+            <a:ext cx="10972800" cy="400050"/>
           </a:xfrm>
           <a:prstGeom xmlns:a="http://schemas.openxmlformats.org/drawingml/2006/main" prst="rect">
             <a:avLst/>
@@ -8453,7 +8798,7 @@
           <a:bodyPr xmlns:a="http://schemas.openxmlformats.org/drawingml/2006/main" anchor="t"/>
           <a:lstStyle xmlns:a="http://schemas.openxmlformats.org/drawingml/2006/main">
             <a:defPPr>
-              <a:defRPr sz="1875" b="0">
+              <a:defRPr sz="1800" b="0">
                 <a:solidFill>
                   <a:srgbClr val="176C63"/>
                 </a:solidFill>
@@ -8463,6 +8808,7 @@
               </a:defRPr>
             </a:defPPr>
             <a:lvl1pPr>
+              <a:buNone/>
               <a:defRPr sz="1875" b="0">
                 <a:solidFill>
                   <a:srgbClr val="176C63"/>
@@ -8473,6 +8819,7 @@
               </a:defRPr>
             </a:lvl1pPr>
             <a:lvl2pPr>
+              <a:buNone/>
               <a:defRPr sz="1875" b="0">
                 <a:solidFill>
                   <a:srgbClr val="176C63"/>
@@ -8483,6 +8830,7 @@
               </a:defRPr>
             </a:lvl2pPr>
             <a:lvl3pPr>
+              <a:buNone/>
               <a:defRPr sz="1875" b="0">
                 <a:solidFill>
                   <a:srgbClr val="176C63"/>
@@ -8493,6 +8841,7 @@
               </a:defRPr>
             </a:lvl3pPr>
             <a:lvl4pPr>
+              <a:buNone/>
               <a:defRPr sz="1875" b="0">
                 <a:solidFill>
                   <a:srgbClr val="176C63"/>
@@ -8503,6 +8852,7 @@
               </a:defRPr>
             </a:lvl4pPr>
             <a:lvl5pPr>
+              <a:buNone/>
               <a:defRPr sz="1875" b="0">
                 <a:solidFill>
                   <a:srgbClr val="176C63"/>
@@ -8513,6 +8863,7 @@
               </a:defRPr>
             </a:lvl5pPr>
             <a:lvl6pPr>
+              <a:buNone/>
               <a:defRPr sz="1875" b="0">
                 <a:solidFill>
                   <a:srgbClr val="176C63"/>
@@ -8523,6 +8874,7 @@
               </a:defRPr>
             </a:lvl6pPr>
             <a:lvl7pPr>
+              <a:buNone/>
               <a:defRPr sz="1875" b="0">
                 <a:solidFill>
                   <a:srgbClr val="176C63"/>
@@ -8533,6 +8885,7 @@
               </a:defRPr>
             </a:lvl7pPr>
             <a:lvl8pPr>
+              <a:buNone/>
               <a:defRPr sz="1875" b="0">
                 <a:solidFill>
                   <a:srgbClr val="176C63"/>
@@ -8543,6 +8896,7 @@
               </a:defRPr>
             </a:lvl8pPr>
             <a:lvl9pPr>
+              <a:buNone/>
               <a:defRPr sz="1875" b="0">
                 <a:solidFill>
                   <a:srgbClr val="176C63"/>
@@ -8555,7 +8909,8 @@
           </a:lstStyle>
           <a:p xmlns:a="http://schemas.openxmlformats.org/drawingml/2006/main">
             <a:pPr>
-              <a:defRPr sz="1875" b="0">
+              <a:buNone/>
+              <a:defRPr sz="1800" b="0">
                 <a:solidFill>
                   <a:srgbClr val="176C63"/>
                 </a:solidFill>
@@ -8565,7 +8920,7 @@
               </a:defRPr>
             </a:pPr>
             <a:r>
-              <a:rPr sz="1875" b="0">
+              <a:rPr sz="1800" b="0">
                 <a:solidFill>
                   <a:srgbClr val="176C63"/>
                 </a:solidFill>
@@ -8573,7 +8928,475 @@
                 <a:ea typeface="Arial"/>
                 <a:cs typeface="Arial"/>
               </a:rPr>
-              <a:t>Failed controls: indeterminate. Imprecise benefit: inconclusive.</a:t>
+              <a:t>Failed controls: indeterminate. Threshold-touching intervals: inconclusive.</a:t>
+            </a:r>
+          </a:p>
+        </p:txBody>
+      </p:sp>
+      <p:sp>
+        <p:nvSpPr>
+          <p:cNvPr id="15" name="">
+            <a:extLst xmlns:a="http://schemas.openxmlformats.org/drawingml/2006/main">
+              <a:ext uri="{FF2B5EF4-FFF2-40B4-BE49-F238E27FC236}">
+                <a16:creationId xmlns:a16="http://schemas.microsoft.com/office/drawing/2014/main" id="{8EDD333E-CA3E-455C-8A47-33604E03056B}"/>
+              </a:ext>
+            </a:extLst>
+          </p:cNvPr>
+          <p:cNvSpPr>
+            <a:spLocks xmlns:a="http://schemas.openxmlformats.org/drawingml/2006/main" noGrp="1"/>
+          </p:cNvSpPr>
+          <p:nvPr/>
+        </p:nvSpPr>
+        <p:spPr>
+          <a:xfrm xmlns:a="http://schemas.openxmlformats.org/drawingml/2006/main">
+            <a:off x="609600" y="4543425"/>
+            <a:ext cx="619125" cy="523875"/>
+          </a:xfrm>
+          <a:prstGeom xmlns:a="http://schemas.openxmlformats.org/drawingml/2006/main" prst="rect">
+            <a:avLst/>
+          </a:prstGeom>
+          <a:noFill xmlns:a="http://schemas.openxmlformats.org/drawingml/2006/main"/>
+          <a:ln xmlns:a="http://schemas.openxmlformats.org/drawingml/2006/main" w="0">
+            <a:noFill/>
+          </a:ln>
+        </p:spPr>
+        <p:txBody>
+          <a:bodyPr xmlns:a="http://schemas.openxmlformats.org/drawingml/2006/main" anchor="t"/>
+          <a:lstStyle xmlns:a="http://schemas.openxmlformats.org/drawingml/2006/main">
+            <a:defPPr>
+              <a:defRPr sz="3450" b="1">
+                <a:solidFill>
+                  <a:srgbClr val="176C63"/>
+                </a:solidFill>
+                <a:latin typeface="Arial"/>
+                <a:ea typeface="Arial"/>
+                <a:cs typeface="Arial"/>
+              </a:defRPr>
+            </a:defPPr>
+            <a:lvl1pPr>
+              <a:defRPr sz="3450" b="1">
+                <a:solidFill>
+                  <a:srgbClr val="176C63"/>
+                </a:solidFill>
+                <a:latin typeface="Arial"/>
+                <a:ea typeface="Arial"/>
+                <a:cs typeface="Arial"/>
+              </a:defRPr>
+            </a:lvl1pPr>
+            <a:lvl2pPr>
+              <a:defRPr sz="3450" b="1">
+                <a:solidFill>
+                  <a:srgbClr val="176C63"/>
+                </a:solidFill>
+                <a:latin typeface="Arial"/>
+                <a:ea typeface="Arial"/>
+                <a:cs typeface="Arial"/>
+              </a:defRPr>
+            </a:lvl2pPr>
+            <a:lvl3pPr>
+              <a:defRPr sz="3450" b="1">
+                <a:solidFill>
+                  <a:srgbClr val="176C63"/>
+                </a:solidFill>
+                <a:latin typeface="Arial"/>
+                <a:ea typeface="Arial"/>
+                <a:cs typeface="Arial"/>
+              </a:defRPr>
+            </a:lvl3pPr>
+            <a:lvl4pPr>
+              <a:defRPr sz="3450" b="1">
+                <a:solidFill>
+                  <a:srgbClr val="176C63"/>
+                </a:solidFill>
+                <a:latin typeface="Arial"/>
+                <a:ea typeface="Arial"/>
+                <a:cs typeface="Arial"/>
+              </a:defRPr>
+            </a:lvl4pPr>
+            <a:lvl5pPr>
+              <a:defRPr sz="3450" b="1">
+                <a:solidFill>
+                  <a:srgbClr val="176C63"/>
+                </a:solidFill>
+                <a:latin typeface="Arial"/>
+                <a:ea typeface="Arial"/>
+                <a:cs typeface="Arial"/>
+              </a:defRPr>
+            </a:lvl5pPr>
+            <a:lvl6pPr>
+              <a:defRPr sz="3450" b="1">
+                <a:solidFill>
+                  <a:srgbClr val="176C63"/>
+                </a:solidFill>
+                <a:latin typeface="Arial"/>
+                <a:ea typeface="Arial"/>
+                <a:cs typeface="Arial"/>
+              </a:defRPr>
+            </a:lvl6pPr>
+            <a:lvl7pPr>
+              <a:defRPr sz="3450" b="1">
+                <a:solidFill>
+                  <a:srgbClr val="176C63"/>
+                </a:solidFill>
+                <a:latin typeface="Arial"/>
+                <a:ea typeface="Arial"/>
+                <a:cs typeface="Arial"/>
+              </a:defRPr>
+            </a:lvl7pPr>
+            <a:lvl8pPr>
+              <a:defRPr sz="3450" b="1">
+                <a:solidFill>
+                  <a:srgbClr val="176C63"/>
+                </a:solidFill>
+                <a:latin typeface="Arial"/>
+                <a:ea typeface="Arial"/>
+                <a:cs typeface="Arial"/>
+              </a:defRPr>
+            </a:lvl8pPr>
+            <a:lvl9pPr>
+              <a:defRPr sz="3450" b="1">
+                <a:solidFill>
+                  <a:srgbClr val="176C63"/>
+                </a:solidFill>
+                <a:latin typeface="Arial"/>
+                <a:ea typeface="Arial"/>
+                <a:cs typeface="Arial"/>
+              </a:defRPr>
+            </a:lvl9pPr>
+          </a:lstStyle>
+          <a:p xmlns:a="http://schemas.openxmlformats.org/drawingml/2006/main">
+            <a:pPr>
+              <a:defRPr sz="3450" b="1">
+                <a:solidFill>
+                  <a:srgbClr val="176C63"/>
+                </a:solidFill>
+                <a:latin typeface="Arial"/>
+                <a:ea typeface="Arial"/>
+                <a:cs typeface="Arial"/>
+              </a:defRPr>
+            </a:pPr>
+            <a:r>
+              <a:rPr sz="3450" b="1">
+                <a:solidFill>
+                  <a:srgbClr val="176C63"/>
+                </a:solidFill>
+                <a:latin typeface="Arial"/>
+                <a:ea typeface="Arial"/>
+                <a:cs typeface="Arial"/>
+              </a:rPr>
+              <a:t>D</a:t>
+            </a:r>
+          </a:p>
+        </p:txBody>
+      </p:sp>
+      <p:sp>
+        <p:nvSpPr>
+          <p:cNvPr id="16" name="">
+            <a:extLst xmlns:a="http://schemas.openxmlformats.org/drawingml/2006/main">
+              <a:ext uri="{FF2B5EF4-FFF2-40B4-BE49-F238E27FC236}">
+                <a16:creationId xmlns:a16="http://schemas.microsoft.com/office/drawing/2014/main" id="{6091566F-0FFD-41E1-B53E-90630669F206}"/>
+              </a:ext>
+            </a:extLst>
+          </p:cNvPr>
+          <p:cNvSpPr>
+            <a:spLocks xmlns:a="http://schemas.openxmlformats.org/drawingml/2006/main" noGrp="1"/>
+          </p:cNvSpPr>
+          <p:nvPr/>
+        </p:nvSpPr>
+        <p:spPr>
+          <a:xfrm xmlns:a="http://schemas.openxmlformats.org/drawingml/2006/main">
+            <a:off x="1571625" y="4543425"/>
+            <a:ext cx="9810750" cy="428625"/>
+          </a:xfrm>
+          <a:prstGeom xmlns:a="http://schemas.openxmlformats.org/drawingml/2006/main" prst="rect">
+            <a:avLst/>
+          </a:prstGeom>
+          <a:noFill xmlns:a="http://schemas.openxmlformats.org/drawingml/2006/main"/>
+          <a:ln xmlns:a="http://schemas.openxmlformats.org/drawingml/2006/main" w="0">
+            <a:noFill/>
+          </a:ln>
+        </p:spPr>
+        <p:txBody>
+          <a:bodyPr xmlns:a="http://schemas.openxmlformats.org/drawingml/2006/main" anchor="t"/>
+          <a:lstStyle xmlns:a="http://schemas.openxmlformats.org/drawingml/2006/main">
+            <a:defPPr>
+              <a:defRPr sz="2400" b="1">
+                <a:solidFill>
+                  <a:srgbClr val="17333E"/>
+                </a:solidFill>
+                <a:latin typeface="Arial"/>
+                <a:ea typeface="Arial"/>
+                <a:cs typeface="Arial"/>
+              </a:defRPr>
+            </a:defPPr>
+            <a:lvl1pPr>
+              <a:defRPr sz="2400" b="1">
+                <a:solidFill>
+                  <a:srgbClr val="17333E"/>
+                </a:solidFill>
+                <a:latin typeface="Arial"/>
+                <a:ea typeface="Arial"/>
+                <a:cs typeface="Arial"/>
+              </a:defRPr>
+            </a:lvl1pPr>
+            <a:lvl2pPr>
+              <a:defRPr sz="2400" b="1">
+                <a:solidFill>
+                  <a:srgbClr val="17333E"/>
+                </a:solidFill>
+                <a:latin typeface="Arial"/>
+                <a:ea typeface="Arial"/>
+                <a:cs typeface="Arial"/>
+              </a:defRPr>
+            </a:lvl2pPr>
+            <a:lvl3pPr>
+              <a:defRPr sz="2400" b="1">
+                <a:solidFill>
+                  <a:srgbClr val="17333E"/>
+                </a:solidFill>
+                <a:latin typeface="Arial"/>
+                <a:ea typeface="Arial"/>
+                <a:cs typeface="Arial"/>
+              </a:defRPr>
+            </a:lvl3pPr>
+            <a:lvl4pPr>
+              <a:defRPr sz="2400" b="1">
+                <a:solidFill>
+                  <a:srgbClr val="17333E"/>
+                </a:solidFill>
+                <a:latin typeface="Arial"/>
+                <a:ea typeface="Arial"/>
+                <a:cs typeface="Arial"/>
+              </a:defRPr>
+            </a:lvl4pPr>
+            <a:lvl5pPr>
+              <a:defRPr sz="2400" b="1">
+                <a:solidFill>
+                  <a:srgbClr val="17333E"/>
+                </a:solidFill>
+                <a:latin typeface="Arial"/>
+                <a:ea typeface="Arial"/>
+                <a:cs typeface="Arial"/>
+              </a:defRPr>
+            </a:lvl5pPr>
+            <a:lvl6pPr>
+              <a:defRPr sz="2400" b="1">
+                <a:solidFill>
+                  <a:srgbClr val="17333E"/>
+                </a:solidFill>
+                <a:latin typeface="Arial"/>
+                <a:ea typeface="Arial"/>
+                <a:cs typeface="Arial"/>
+              </a:defRPr>
+            </a:lvl6pPr>
+            <a:lvl7pPr>
+              <a:defRPr sz="2400" b="1">
+                <a:solidFill>
+                  <a:srgbClr val="17333E"/>
+                </a:solidFill>
+                <a:latin typeface="Arial"/>
+                <a:ea typeface="Arial"/>
+                <a:cs typeface="Arial"/>
+              </a:defRPr>
+            </a:lvl7pPr>
+            <a:lvl8pPr>
+              <a:defRPr sz="2400" b="1">
+                <a:solidFill>
+                  <a:srgbClr val="17333E"/>
+                </a:solidFill>
+                <a:latin typeface="Arial"/>
+                <a:ea typeface="Arial"/>
+                <a:cs typeface="Arial"/>
+              </a:defRPr>
+            </a:lvl8pPr>
+            <a:lvl9pPr>
+              <a:defRPr sz="2400" b="1">
+                <a:solidFill>
+                  <a:srgbClr val="17333E"/>
+                </a:solidFill>
+                <a:latin typeface="Arial"/>
+                <a:ea typeface="Arial"/>
+                <a:cs typeface="Arial"/>
+              </a:defRPr>
+            </a:lvl9pPr>
+          </a:lstStyle>
+          <a:p xmlns:a="http://schemas.openxmlformats.org/drawingml/2006/main">
+            <a:pPr>
+              <a:defRPr sz="2400" b="1">
+                <a:solidFill>
+                  <a:srgbClr val="17333E"/>
+                </a:solidFill>
+                <a:latin typeface="Arial"/>
+                <a:ea typeface="Arial"/>
+                <a:cs typeface="Arial"/>
+              </a:defRPr>
+            </a:pPr>
+            <a:r>
+              <a:rPr sz="2400" b="1">
+                <a:solidFill>
+                  <a:srgbClr val="17333E"/>
+                </a:solidFill>
+                <a:latin typeface="Arial"/>
+                <a:ea typeface="Arial"/>
+                <a:cs typeface="Arial"/>
+              </a:rPr>
+              <a:t>Apply the prespecified decision rules</a:t>
+            </a:r>
+          </a:p>
+        </p:txBody>
+      </p:sp>
+      <p:sp>
+        <p:nvSpPr>
+          <p:cNvPr id="17" name="">
+            <a:extLst xmlns:a="http://schemas.openxmlformats.org/drawingml/2006/main">
+              <a:ext uri="{FF2B5EF4-FFF2-40B4-BE49-F238E27FC236}">
+                <a16:creationId xmlns:a16="http://schemas.microsoft.com/office/drawing/2014/main" id="{A772385B-1EE1-4556-AC5A-666A4FD1D260}"/>
+              </a:ext>
+            </a:extLst>
+          </p:cNvPr>
+          <p:cNvSpPr>
+            <a:spLocks xmlns:a="http://schemas.openxmlformats.org/drawingml/2006/main" noGrp="1"/>
+          </p:cNvSpPr>
+          <p:nvPr/>
+        </p:nvSpPr>
+        <p:spPr>
+          <a:xfrm xmlns:a="http://schemas.openxmlformats.org/drawingml/2006/main">
+            <a:off x="1571625" y="4962525"/>
+            <a:ext cx="9810750" cy="400050"/>
+          </a:xfrm>
+          <a:prstGeom xmlns:a="http://schemas.openxmlformats.org/drawingml/2006/main" prst="rect">
+            <a:avLst/>
+          </a:prstGeom>
+          <a:noFill xmlns:a="http://schemas.openxmlformats.org/drawingml/2006/main"/>
+          <a:ln xmlns:a="http://schemas.openxmlformats.org/drawingml/2006/main" w="0">
+            <a:noFill/>
+          </a:ln>
+        </p:spPr>
+        <p:txBody>
+          <a:bodyPr xmlns:a="http://schemas.openxmlformats.org/drawingml/2006/main" anchor="t"/>
+          <a:lstStyle xmlns:a="http://schemas.openxmlformats.org/drawingml/2006/main">
+            <a:defPPr>
+              <a:defRPr sz="1950" b="0">
+                <a:solidFill>
+                  <a:srgbClr val="526971"/>
+                </a:solidFill>
+                <a:latin typeface="Arial"/>
+                <a:ea typeface="Arial"/>
+                <a:cs typeface="Arial"/>
+              </a:defRPr>
+            </a:defPPr>
+            <a:lvl1pPr>
+              <a:defRPr sz="1950" b="0">
+                <a:solidFill>
+                  <a:srgbClr val="526971"/>
+                </a:solidFill>
+                <a:latin typeface="Arial"/>
+                <a:ea typeface="Arial"/>
+                <a:cs typeface="Arial"/>
+              </a:defRPr>
+            </a:lvl1pPr>
+            <a:lvl2pPr>
+              <a:defRPr sz="1950" b="0">
+                <a:solidFill>
+                  <a:srgbClr val="526971"/>
+                </a:solidFill>
+                <a:latin typeface="Arial"/>
+                <a:ea typeface="Arial"/>
+                <a:cs typeface="Arial"/>
+              </a:defRPr>
+            </a:lvl2pPr>
+            <a:lvl3pPr>
+              <a:defRPr sz="1950" b="0">
+                <a:solidFill>
+                  <a:srgbClr val="526971"/>
+                </a:solidFill>
+                <a:latin typeface="Arial"/>
+                <a:ea typeface="Arial"/>
+                <a:cs typeface="Arial"/>
+              </a:defRPr>
+            </a:lvl3pPr>
+            <a:lvl4pPr>
+              <a:defRPr sz="1950" b="0">
+                <a:solidFill>
+                  <a:srgbClr val="526971"/>
+                </a:solidFill>
+                <a:latin typeface="Arial"/>
+                <a:ea typeface="Arial"/>
+                <a:cs typeface="Arial"/>
+              </a:defRPr>
+            </a:lvl4pPr>
+            <a:lvl5pPr>
+              <a:defRPr sz="1950" b="0">
+                <a:solidFill>
+                  <a:srgbClr val="526971"/>
+                </a:solidFill>
+                <a:latin typeface="Arial"/>
+                <a:ea typeface="Arial"/>
+                <a:cs typeface="Arial"/>
+              </a:defRPr>
+            </a:lvl5pPr>
+            <a:lvl6pPr>
+              <a:defRPr sz="1950" b="0">
+                <a:solidFill>
+                  <a:srgbClr val="526971"/>
+                </a:solidFill>
+                <a:latin typeface="Arial"/>
+                <a:ea typeface="Arial"/>
+                <a:cs typeface="Arial"/>
+              </a:defRPr>
+            </a:lvl6pPr>
+            <a:lvl7pPr>
+              <a:defRPr sz="1950" b="0">
+                <a:solidFill>
+                  <a:srgbClr val="526971"/>
+                </a:solidFill>
+                <a:latin typeface="Arial"/>
+                <a:ea typeface="Arial"/>
+                <a:cs typeface="Arial"/>
+              </a:defRPr>
+            </a:lvl7pPr>
+            <a:lvl8pPr>
+              <a:defRPr sz="1950" b="0">
+                <a:solidFill>
+                  <a:srgbClr val="526971"/>
+                </a:solidFill>
+                <a:latin typeface="Arial"/>
+                <a:ea typeface="Arial"/>
+                <a:cs typeface="Arial"/>
+              </a:defRPr>
+            </a:lvl8pPr>
+            <a:lvl9pPr>
+              <a:defRPr sz="1950" b="0">
+                <a:solidFill>
+                  <a:srgbClr val="526971"/>
+                </a:solidFill>
+                <a:latin typeface="Arial"/>
+                <a:ea typeface="Arial"/>
+                <a:cs typeface="Arial"/>
+              </a:defRPr>
+            </a:lvl9pPr>
+          </a:lstStyle>
+          <a:p xmlns:a="http://schemas.openxmlformats.org/drawingml/2006/main">
+            <a:pPr>
+              <a:defRPr sz="1950" b="0">
+                <a:solidFill>
+                  <a:srgbClr val="526971"/>
+                </a:solidFill>
+                <a:latin typeface="Arial"/>
+                <a:ea typeface="Arial"/>
+                <a:cs typeface="Arial"/>
+              </a:defRPr>
+            </a:pPr>
+            <a:r>
+              <a:rPr sz="1950" b="0">
+                <a:solidFill>
+                  <a:srgbClr val="526971"/>
+                </a:solidFill>
+                <a:latin typeface="Arial"/>
+                <a:ea typeface="Arial"/>
+                <a:cs typeface="Arial"/>
+              </a:rPr>
+              <a:t>Confidence bounds separate advance, reject and inconclusive</a:t>
             </a:r>
           </a:p>
         </p:txBody>
@@ -8648,6 +9471,7 @@
               </a:defRPr>
             </a:defPPr>
             <a:lvl1pPr>
+              <a:buNone/>
               <a:defRPr sz="3750" b="1">
                 <a:solidFill>
                   <a:srgbClr val="17333E"/>
@@ -8658,6 +9482,7 @@
               </a:defRPr>
             </a:lvl1pPr>
             <a:lvl2pPr>
+              <a:buNone/>
               <a:defRPr sz="3750" b="1">
                 <a:solidFill>
                   <a:srgbClr val="17333E"/>
@@ -8668,6 +9493,7 @@
               </a:defRPr>
             </a:lvl2pPr>
             <a:lvl3pPr>
+              <a:buNone/>
               <a:defRPr sz="3750" b="1">
                 <a:solidFill>
                   <a:srgbClr val="17333E"/>
@@ -8678,6 +9504,7 @@
               </a:defRPr>
             </a:lvl3pPr>
             <a:lvl4pPr>
+              <a:buNone/>
               <a:defRPr sz="3750" b="1">
                 <a:solidFill>
                   <a:srgbClr val="17333E"/>
@@ -8688,6 +9515,7 @@
               </a:defRPr>
             </a:lvl4pPr>
             <a:lvl5pPr>
+              <a:buNone/>
               <a:defRPr sz="3750" b="1">
                 <a:solidFill>
                   <a:srgbClr val="17333E"/>
@@ -8698,6 +9526,7 @@
               </a:defRPr>
             </a:lvl5pPr>
             <a:lvl6pPr>
+              <a:buNone/>
               <a:defRPr sz="3750" b="1">
                 <a:solidFill>
                   <a:srgbClr val="17333E"/>
@@ -8708,6 +9537,7 @@
               </a:defRPr>
             </a:lvl6pPr>
             <a:lvl7pPr>
+              <a:buNone/>
               <a:defRPr sz="3750" b="1">
                 <a:solidFill>
                   <a:srgbClr val="17333E"/>
@@ -8718,6 +9548,7 @@
               </a:defRPr>
             </a:lvl7pPr>
             <a:lvl8pPr>
+              <a:buNone/>
               <a:defRPr sz="3750" b="1">
                 <a:solidFill>
                   <a:srgbClr val="17333E"/>
@@ -8728,6 +9559,7 @@
               </a:defRPr>
             </a:lvl8pPr>
             <a:lvl9pPr>
+              <a:buNone/>
               <a:defRPr sz="3750" b="1">
                 <a:solidFill>
                   <a:srgbClr val="17333E"/>
@@ -8740,6 +9572,7 @@
           </a:lstStyle>
           <a:p xmlns:a="http://schemas.openxmlformats.org/drawingml/2006/main">
             <a:pPr>
+              <a:buNone/>
               <a:defRPr sz="3750" b="1">
                 <a:solidFill>
                   <a:srgbClr val="17333E"/>
@@ -8804,6 +9637,7 @@
               </a:defRPr>
             </a:defPPr>
             <a:lvl1pPr>
+              <a:buNone/>
               <a:defRPr sz="1350" b="0">
                 <a:solidFill>
                   <a:srgbClr val="526971"/>
@@ -8814,6 +9648,7 @@
               </a:defRPr>
             </a:lvl1pPr>
             <a:lvl2pPr>
+              <a:buNone/>
               <a:defRPr sz="1350" b="0">
                 <a:solidFill>
                   <a:srgbClr val="526971"/>
@@ -8824,6 +9659,7 @@
               </a:defRPr>
             </a:lvl2pPr>
             <a:lvl3pPr>
+              <a:buNone/>
               <a:defRPr sz="1350" b="0">
                 <a:solidFill>
                   <a:srgbClr val="526971"/>
@@ -8834,6 +9670,7 @@
               </a:defRPr>
             </a:lvl3pPr>
             <a:lvl4pPr>
+              <a:buNone/>
               <a:defRPr sz="1350" b="0">
                 <a:solidFill>
                   <a:srgbClr val="526971"/>
@@ -8844,6 +9681,7 @@
               </a:defRPr>
             </a:lvl4pPr>
             <a:lvl5pPr>
+              <a:buNone/>
               <a:defRPr sz="1350" b="0">
                 <a:solidFill>
                   <a:srgbClr val="526971"/>
@@ -8854,6 +9692,7 @@
               </a:defRPr>
             </a:lvl5pPr>
             <a:lvl6pPr>
+              <a:buNone/>
               <a:defRPr sz="1350" b="0">
                 <a:solidFill>
                   <a:srgbClr val="526971"/>
@@ -8864,6 +9703,7 @@
               </a:defRPr>
             </a:lvl6pPr>
             <a:lvl7pPr>
+              <a:buNone/>
               <a:defRPr sz="1350" b="0">
                 <a:solidFill>
                   <a:srgbClr val="526971"/>
@@ -8874,6 +9714,7 @@
               </a:defRPr>
             </a:lvl7pPr>
             <a:lvl8pPr>
+              <a:buNone/>
               <a:defRPr sz="1350" b="0">
                 <a:solidFill>
                   <a:srgbClr val="526971"/>
@@ -8884,6 +9725,7 @@
               </a:defRPr>
             </a:lvl8pPr>
             <a:lvl9pPr>
+              <a:buNone/>
               <a:defRPr sz="1350" b="0">
                 <a:solidFill>
                   <a:srgbClr val="526971"/>
@@ -8896,6 +9738,7 @@
           </a:lstStyle>
           <a:p xmlns:a="http://schemas.openxmlformats.org/drawingml/2006/main">
             <a:pPr>
+              <a:buNone/>
               <a:defRPr sz="1350" b="0">
                 <a:solidFill>
                   <a:srgbClr val="526971"/>
@@ -8960,6 +9803,7 @@
               </a:defRPr>
             </a:defPPr>
             <a:lvl1pPr>
+              <a:buNone/>
               <a:defRPr sz="1200" b="0">
                 <a:solidFill>
                   <a:srgbClr val="526971"/>
@@ -8970,6 +9814,7 @@
               </a:defRPr>
             </a:lvl1pPr>
             <a:lvl2pPr>
+              <a:buNone/>
               <a:defRPr sz="1200" b="0">
                 <a:solidFill>
                   <a:srgbClr val="526971"/>
@@ -8980,6 +9825,7 @@
               </a:defRPr>
             </a:lvl2pPr>
             <a:lvl3pPr>
+              <a:buNone/>
               <a:defRPr sz="1200" b="0">
                 <a:solidFill>
                   <a:srgbClr val="526971"/>
@@ -8990,6 +9836,7 @@
               </a:defRPr>
             </a:lvl3pPr>
             <a:lvl4pPr>
+              <a:buNone/>
               <a:defRPr sz="1200" b="0">
                 <a:solidFill>
                   <a:srgbClr val="526971"/>
@@ -9000,6 +9847,7 @@
               </a:defRPr>
             </a:lvl4pPr>
             <a:lvl5pPr>
+              <a:buNone/>
               <a:defRPr sz="1200" b="0">
                 <a:solidFill>
                   <a:srgbClr val="526971"/>
@@ -9010,6 +9858,7 @@
               </a:defRPr>
             </a:lvl5pPr>
             <a:lvl6pPr>
+              <a:buNone/>
               <a:defRPr sz="1200" b="0">
                 <a:solidFill>
                   <a:srgbClr val="526971"/>
@@ -9020,6 +9869,7 @@
               </a:defRPr>
             </a:lvl6pPr>
             <a:lvl7pPr>
+              <a:buNone/>
               <a:defRPr sz="1200" b="0">
                 <a:solidFill>
                   <a:srgbClr val="526971"/>
@@ -9030,6 +9880,7 @@
               </a:defRPr>
             </a:lvl7pPr>
             <a:lvl8pPr>
+              <a:buNone/>
               <a:defRPr sz="1200" b="0">
                 <a:solidFill>
                   <a:srgbClr val="526971"/>
@@ -9040,6 +9891,7 @@
               </a:defRPr>
             </a:lvl8pPr>
             <a:lvl9pPr>
+              <a:buNone/>
               <a:defRPr sz="1200" b="0">
                 <a:solidFill>
                   <a:srgbClr val="526971"/>
@@ -9052,6 +9904,7 @@
           </a:lstStyle>
           <a:p xmlns:a="http://schemas.openxmlformats.org/drawingml/2006/main">
             <a:pPr>
+              <a:buNone/>
               <a:defRPr sz="1200" b="0">
                 <a:solidFill>
                   <a:srgbClr val="526971"/>
@@ -9070,7 +9923,7 @@
                 <a:ea typeface="Arial"/>
                 <a:cs typeface="Arial"/>
               </a:rPr>
-              <a:t>HFEA workbook 2026-08-05  /  hashed mapping sources</a:t>
+              <a:t>Expanded frozen query audit / HFEA register 2026-08-05</a:t>
             </a:r>
           </a:p>
         </p:txBody>
@@ -9080,7 +9933,7 @@
           <p:cNvPr id="4" name="">
             <a:extLst xmlns:a="http://schemas.openxmlformats.org/drawingml/2006/main">
               <a:ext uri="{FF2B5EF4-FFF2-40B4-BE49-F238E27FC236}">
-                <a16:creationId xmlns:a16="http://schemas.microsoft.com/office/drawing/2014/main" id="{9EAE199B-E311-48A1-82AC-4FDE572B9897}"/>
+                <a16:creationId xmlns:a16="http://schemas.microsoft.com/office/drawing/2014/main" id="{D67536CD-B4B3-4B04-B577-F748560DCF74}"/>
               </a:ext>
             </a:extLst>
           </p:cNvPr>
@@ -9090,13 +9943,14 @@
           <p:nvPr/>
         </p:nvPicPr>
         <p:blipFill>
-          <a:blip xmlns:r="http://schemas.openxmlformats.org/officeDocument/2006/relationships" xmlns:a="http://schemas.openxmlformats.org/drawingml/2006/main" r:embed="R20eb72fb89ab42d4"/>
+          <a:blip xmlns:r="http://schemas.openxmlformats.org/officeDocument/2006/relationships" xmlns:a="http://schemas.openxmlformats.org/drawingml/2006/main" r:embed="R07645afead084427"/>
+          <a:srcRect xmlns:a="http://schemas.openxmlformats.org/drawingml/2006/main" l="0" t="0" r="0" b="0"/>
           <a:stretch xmlns:a="http://schemas.openxmlformats.org/drawingml/2006/main"/>
         </p:blipFill>
         <p:spPr>
           <a:xfrm xmlns:a="http://schemas.openxmlformats.org/drawingml/2006/main">
-            <a:off x="990600" y="1638300"/>
-            <a:ext cx="6286500" cy="4572000"/>
+            <a:off x="609600" y="1638300"/>
+            <a:ext cx="7048500" cy="4572000"/>
           </a:xfrm>
           <a:prstGeom xmlns:a="http://schemas.openxmlformats.org/drawingml/2006/main" prst="rect">
             <a:avLst/>
@@ -9119,8 +9973,8 @@
         </p:nvSpPr>
         <p:spPr>
           <a:xfrm xmlns:a="http://schemas.openxmlformats.org/drawingml/2006/main">
-            <a:off x="8048625" y="2047875"/>
-            <a:ext cx="3476625" cy="714375"/>
+            <a:off x="8048625" y="1809750"/>
+            <a:ext cx="3476625" cy="666750"/>
           </a:xfrm>
           <a:prstGeom xmlns:a="http://schemas.openxmlformats.org/drawingml/2006/main" prst="rect">
             <a:avLst/>
@@ -9144,6 +9998,7 @@
               </a:defRPr>
             </a:defPPr>
             <a:lvl1pPr>
+              <a:buNone/>
               <a:defRPr sz="3150" b="1">
                 <a:solidFill>
                   <a:srgbClr val="176C63"/>
@@ -9154,6 +10009,7 @@
               </a:defRPr>
             </a:lvl1pPr>
             <a:lvl2pPr>
+              <a:buNone/>
               <a:defRPr sz="3150" b="1">
                 <a:solidFill>
                   <a:srgbClr val="176C63"/>
@@ -9164,6 +10020,7 @@
               </a:defRPr>
             </a:lvl2pPr>
             <a:lvl3pPr>
+              <a:buNone/>
               <a:defRPr sz="3150" b="1">
                 <a:solidFill>
                   <a:srgbClr val="176C63"/>
@@ -9174,6 +10031,7 @@
               </a:defRPr>
             </a:lvl3pPr>
             <a:lvl4pPr>
+              <a:buNone/>
               <a:defRPr sz="3150" b="1">
                 <a:solidFill>
                   <a:srgbClr val="176C63"/>
@@ -9184,6 +10042,7 @@
               </a:defRPr>
             </a:lvl4pPr>
             <a:lvl5pPr>
+              <a:buNone/>
               <a:defRPr sz="3150" b="1">
                 <a:solidFill>
                   <a:srgbClr val="176C63"/>
@@ -9194,6 +10053,7 @@
               </a:defRPr>
             </a:lvl5pPr>
             <a:lvl6pPr>
+              <a:buNone/>
               <a:defRPr sz="3150" b="1">
                 <a:solidFill>
                   <a:srgbClr val="176C63"/>
@@ -9204,6 +10064,7 @@
               </a:defRPr>
             </a:lvl6pPr>
             <a:lvl7pPr>
+              <a:buNone/>
               <a:defRPr sz="3150" b="1">
                 <a:solidFill>
                   <a:srgbClr val="176C63"/>
@@ -9214,6 +10075,7 @@
               </a:defRPr>
             </a:lvl7pPr>
             <a:lvl8pPr>
+              <a:buNone/>
               <a:defRPr sz="3150" b="1">
                 <a:solidFill>
                   <a:srgbClr val="176C63"/>
@@ -9224,6 +10086,7 @@
               </a:defRPr>
             </a:lvl8pPr>
             <a:lvl9pPr>
+              <a:buNone/>
               <a:defRPr sz="3150" b="1">
                 <a:solidFill>
                   <a:srgbClr val="176C63"/>
@@ -9236,6 +10099,7 @@
           </a:lstStyle>
           <a:p xmlns:a="http://schemas.openxmlformats.org/drawingml/2006/main">
             <a:pPr>
+              <a:buNone/>
               <a:defRPr sz="3150" b="1">
                 <a:solidFill>
                   <a:srgbClr val="176C63"/>
@@ -9254,7 +10118,7 @@
                 <a:ea typeface="Arial"/>
                 <a:cs typeface="Arial"/>
               </a:rPr>
-              <a:t>2,063 rows</a:t>
+              <a:t>28 queries</a:t>
             </a:r>
           </a:p>
         </p:txBody>
@@ -9275,8 +10139,8 @@
         </p:nvSpPr>
         <p:spPr>
           <a:xfrm xmlns:a="http://schemas.openxmlformats.org/drawingml/2006/main">
-            <a:off x="8048625" y="3048000"/>
-            <a:ext cx="3381375" cy="1619250"/>
+            <a:off x="8048625" y="2647950"/>
+            <a:ext cx="3476625" cy="1809750"/>
           </a:xfrm>
           <a:prstGeom xmlns:a="http://schemas.openxmlformats.org/drawingml/2006/main" prst="rect">
             <a:avLst/>
@@ -9300,6 +10164,7 @@
               </a:defRPr>
             </a:defPPr>
             <a:lvl1pPr>
+              <a:buNone/>
               <a:defRPr sz="2175" b="0">
                 <a:solidFill>
                   <a:srgbClr val="17333E"/>
@@ -9310,6 +10175,7 @@
               </a:defRPr>
             </a:lvl1pPr>
             <a:lvl2pPr>
+              <a:buNone/>
               <a:defRPr sz="2175" b="0">
                 <a:solidFill>
                   <a:srgbClr val="17333E"/>
@@ -9320,6 +10186,7 @@
               </a:defRPr>
             </a:lvl2pPr>
             <a:lvl3pPr>
+              <a:buNone/>
               <a:defRPr sz="2175" b="0">
                 <a:solidFill>
                   <a:srgbClr val="17333E"/>
@@ -9330,6 +10197,7 @@
               </a:defRPr>
             </a:lvl3pPr>
             <a:lvl4pPr>
+              <a:buNone/>
               <a:defRPr sz="2175" b="0">
                 <a:solidFill>
                   <a:srgbClr val="17333E"/>
@@ -9340,6 +10208,7 @@
               </a:defRPr>
             </a:lvl4pPr>
             <a:lvl5pPr>
+              <a:buNone/>
               <a:defRPr sz="2175" b="0">
                 <a:solidFill>
                   <a:srgbClr val="17333E"/>
@@ -9350,6 +10219,7 @@
               </a:defRPr>
             </a:lvl5pPr>
             <a:lvl6pPr>
+              <a:buNone/>
               <a:defRPr sz="2175" b="0">
                 <a:solidFill>
                   <a:srgbClr val="17333E"/>
@@ -9360,6 +10230,7 @@
               </a:defRPr>
             </a:lvl6pPr>
             <a:lvl7pPr>
+              <a:buNone/>
               <a:defRPr sz="2175" b="0">
                 <a:solidFill>
                   <a:srgbClr val="17333E"/>
@@ -9370,6 +10241,7 @@
               </a:defRPr>
             </a:lvl7pPr>
             <a:lvl8pPr>
+              <a:buNone/>
               <a:defRPr sz="2175" b="0">
                 <a:solidFill>
                   <a:srgbClr val="17333E"/>
@@ -9380,6 +10252,7 @@
               </a:defRPr>
             </a:lvl8pPr>
             <a:lvl9pPr>
+              <a:buNone/>
               <a:defRPr sz="2175" b="0">
                 <a:solidFill>
                   <a:srgbClr val="17333E"/>
@@ -9392,6 +10265,7 @@
           </a:lstStyle>
           <a:p xmlns:a="http://schemas.openxmlformats.org/drawingml/2006/main">
             <a:pPr>
+              <a:buNone/>
               <a:defRPr sz="2175" b="0">
                 <a:solidFill>
                   <a:srgbClr val="17333E"/>
@@ -9410,11 +10284,12 @@
                 <a:ea typeface="Arial"/>
                 <a:cs typeface="Arial"/>
               </a:rPr>
-              <a:t>35 unmapped</a:t>
+              <a:t>47 returned gene-row</a:t>
             </a:r>
           </a:p>
           <a:p xmlns:a="http://schemas.openxmlformats.org/drawingml/2006/main">
             <a:pPr>
+              <a:buNone/>
               <a:defRPr sz="2175" b="0">
                 <a:solidFill>
                   <a:srgbClr val="17333E"/>
@@ -9433,11 +10308,12 @@
                 <a:ea typeface="Arial"/>
                 <a:cs typeface="Arial"/>
               </a:rPr>
-              <a:t>Source disagreements visible</a:t>
+              <a:t>associations reviewed</a:t>
             </a:r>
           </a:p>
           <a:p xmlns:a="http://schemas.openxmlformats.org/drawingml/2006/main">
             <a:pPr>
+              <a:buNone/>
               <a:defRPr sz="2175" b="0">
                 <a:solidFill>
                   <a:srgbClr val="17333E"/>
@@ -9456,7 +10332,31 @@
                 <a:ea typeface="Arial"/>
                 <a:cs typeface="Arial"/>
               </a:rPr>
-              <a:t>Queries stay on device</a:t>
+              <a:t/>
+            </a:r>
+          </a:p>
+          <a:p xmlns:a="http://schemas.openxmlformats.org/drawingml/2006/main">
+            <a:pPr>
+              <a:buNone/>
+              <a:defRPr sz="2175" b="0">
+                <a:solidFill>
+                  <a:srgbClr val="17333E"/>
+                </a:solidFill>
+                <a:latin typeface="Arial"/>
+                <a:ea typeface="Arial"/>
+                <a:cs typeface="Arial"/>
+              </a:defRPr>
+            </a:pPr>
+            <a:r>
+              <a:rPr sz="2175" b="0">
+                <a:solidFill>
+                  <a:srgbClr val="17333E"/>
+                </a:solidFill>
+                <a:latin typeface="Arial"/>
+                <a:ea typeface="Arial"/>
+                <a:cs typeface="Arial"/>
+              </a:rPr>
+              <a:t>Source roles visible</a:t>
             </a:r>
           </a:p>
         </p:txBody>
@@ -9477,8 +10377,8 @@
         </p:nvSpPr>
         <p:spPr>
           <a:xfrm xmlns:a="http://schemas.openxmlformats.org/drawingml/2006/main">
-            <a:off x="8048625" y="5143500"/>
-            <a:ext cx="3381375" cy="762000"/>
+            <a:off x="8048625" y="4953000"/>
+            <a:ext cx="3476625" cy="1047750"/>
           </a:xfrm>
           <a:prstGeom xmlns:a="http://schemas.openxmlformats.org/drawingml/2006/main" prst="rect">
             <a:avLst/>
@@ -9492,7 +10392,7 @@
           <a:bodyPr xmlns:a="http://schemas.openxmlformats.org/drawingml/2006/main" anchor="t"/>
           <a:lstStyle xmlns:a="http://schemas.openxmlformats.org/drawingml/2006/main">
             <a:defPPr>
-              <a:defRPr sz="2100" b="0">
+              <a:defRPr sz="1950" b="0">
                 <a:solidFill>
                   <a:srgbClr val="526971"/>
                 </a:solidFill>
@@ -9502,6 +10402,7 @@
               </a:defRPr>
             </a:defPPr>
             <a:lvl1pPr>
+              <a:buNone/>
               <a:defRPr sz="2100" b="0">
                 <a:solidFill>
                   <a:srgbClr val="526971"/>
@@ -9512,6 +10413,7 @@
               </a:defRPr>
             </a:lvl1pPr>
             <a:lvl2pPr>
+              <a:buNone/>
               <a:defRPr sz="2100" b="0">
                 <a:solidFill>
                   <a:srgbClr val="526971"/>
@@ -9522,6 +10424,7 @@
               </a:defRPr>
             </a:lvl2pPr>
             <a:lvl3pPr>
+              <a:buNone/>
               <a:defRPr sz="2100" b="0">
                 <a:solidFill>
                   <a:srgbClr val="526971"/>
@@ -9532,6 +10435,7 @@
               </a:defRPr>
             </a:lvl3pPr>
             <a:lvl4pPr>
+              <a:buNone/>
               <a:defRPr sz="2100" b="0">
                 <a:solidFill>
                   <a:srgbClr val="526971"/>
@@ -9542,6 +10446,7 @@
               </a:defRPr>
             </a:lvl4pPr>
             <a:lvl5pPr>
+              <a:buNone/>
               <a:defRPr sz="2100" b="0">
                 <a:solidFill>
                   <a:srgbClr val="526971"/>
@@ -9552,6 +10457,7 @@
               </a:defRPr>
             </a:lvl5pPr>
             <a:lvl6pPr>
+              <a:buNone/>
               <a:defRPr sz="2100" b="0">
                 <a:solidFill>
                   <a:srgbClr val="526971"/>
@@ -9562,6 +10468,7 @@
               </a:defRPr>
             </a:lvl6pPr>
             <a:lvl7pPr>
+              <a:buNone/>
               <a:defRPr sz="2100" b="0">
                 <a:solidFill>
                   <a:srgbClr val="526971"/>
@@ -9572,6 +10479,7 @@
               </a:defRPr>
             </a:lvl7pPr>
             <a:lvl8pPr>
+              <a:buNone/>
               <a:defRPr sz="2100" b="0">
                 <a:solidFill>
                   <a:srgbClr val="526971"/>
@@ -9582,6 +10490,7 @@
               </a:defRPr>
             </a:lvl8pPr>
             <a:lvl9pPr>
+              <a:buNone/>
               <a:defRPr sz="2100" b="0">
                 <a:solidFill>
                   <a:srgbClr val="526971"/>
@@ -9594,7 +10503,8 @@
           </a:lstStyle>
           <a:p xmlns:a="http://schemas.openxmlformats.org/drawingml/2006/main">
             <a:pPr>
-              <a:defRPr sz="2100" b="0">
+              <a:buNone/>
+              <a:defRPr sz="1950" b="0">
                 <a:solidFill>
                   <a:srgbClr val="526971"/>
                 </a:solidFill>
@@ -9604,7 +10514,7 @@
               </a:defRPr>
             </a:pPr>
             <a:r>
-              <a:rPr sz="2100" b="0">
+              <a:rPr sz="1950" b="0">
                 <a:solidFill>
                   <a:srgbClr val="526971"/>
                 </a:solidFill>
@@ -9612,12 +10522,13 @@
                 <a:ea typeface="Arial"/>
                 <a:cs typeface="Arial"/>
               </a:rPr>
-              <a:t>Confirm eligibility</a:t>
+              <a:t>Shared-source audit</a:t>
             </a:r>
           </a:p>
           <a:p xmlns:a="http://schemas.openxmlformats.org/drawingml/2006/main">
             <a:pPr>
-              <a:defRPr sz="2100" b="0">
+              <a:buNone/>
+              <a:defRPr sz="1950" b="0">
                 <a:solidFill>
                   <a:srgbClr val="526971"/>
                 </a:solidFill>
@@ -9627,7 +10538,7 @@
               </a:defRPr>
             </a:pPr>
             <a:r>
-              <a:rPr sz="2100" b="0">
+              <a:rPr sz="1950" b="0">
                 <a:solidFill>
                   <a:srgbClr val="526971"/>
                 </a:solidFill>
@@ -9635,7 +10546,7 @@
                 <a:ea typeface="Arial"/>
                 <a:cs typeface="Arial"/>
               </a:rPr>
-              <a:t>with the clinic.</a:t>
+              <a:t>Clinical validity untested</a:t>
             </a:r>
           </a:p>
         </p:txBody>
@@ -9710,6 +10621,7 @@
               </a:defRPr>
             </a:defPPr>
             <a:lvl1pPr>
+              <a:buNone/>
               <a:defRPr sz="3750" b="1">
                 <a:solidFill>
                   <a:srgbClr val="17333E"/>
@@ -9720,6 +10632,7 @@
               </a:defRPr>
             </a:lvl1pPr>
             <a:lvl2pPr>
+              <a:buNone/>
               <a:defRPr sz="3750" b="1">
                 <a:solidFill>
                   <a:srgbClr val="17333E"/>
@@ -9730,6 +10643,7 @@
               </a:defRPr>
             </a:lvl2pPr>
             <a:lvl3pPr>
+              <a:buNone/>
               <a:defRPr sz="3750" b="1">
                 <a:solidFill>
                   <a:srgbClr val="17333E"/>
@@ -9740,6 +10654,7 @@
               </a:defRPr>
             </a:lvl3pPr>
             <a:lvl4pPr>
+              <a:buNone/>
               <a:defRPr sz="3750" b="1">
                 <a:solidFill>
                   <a:srgbClr val="17333E"/>
@@ -9750,6 +10665,7 @@
               </a:defRPr>
             </a:lvl4pPr>
             <a:lvl5pPr>
+              <a:buNone/>
               <a:defRPr sz="3750" b="1">
                 <a:solidFill>
                   <a:srgbClr val="17333E"/>
@@ -9760,6 +10676,7 @@
               </a:defRPr>
             </a:lvl5pPr>
             <a:lvl6pPr>
+              <a:buNone/>
               <a:defRPr sz="3750" b="1">
                 <a:solidFill>
                   <a:srgbClr val="17333E"/>
@@ -9770,6 +10687,7 @@
               </a:defRPr>
             </a:lvl6pPr>
             <a:lvl7pPr>
+              <a:buNone/>
               <a:defRPr sz="3750" b="1">
                 <a:solidFill>
                   <a:srgbClr val="17333E"/>
@@ -9780,6 +10698,7 @@
               </a:defRPr>
             </a:lvl7pPr>
             <a:lvl8pPr>
+              <a:buNone/>
               <a:defRPr sz="3750" b="1">
                 <a:solidFill>
                   <a:srgbClr val="17333E"/>
@@ -9790,6 +10709,7 @@
               </a:defRPr>
             </a:lvl8pPr>
             <a:lvl9pPr>
+              <a:buNone/>
               <a:defRPr sz="3750" b="1">
                 <a:solidFill>
                   <a:srgbClr val="17333E"/>
@@ -9802,6 +10722,7 @@
           </a:lstStyle>
           <a:p xmlns:a="http://schemas.openxmlformats.org/drawingml/2006/main">
             <a:pPr>
+              <a:buNone/>
               <a:defRPr sz="3750" b="1">
                 <a:solidFill>
                   <a:srgbClr val="17333E"/>
@@ -9820,7 +10741,7 @@
                 <a:ea typeface="Arial"/>
                 <a:cs typeface="Arial"/>
               </a:rPr>
-              <a:t>Six model controls passed</a:t>
+              <a:t>Rules that reject misleading hits</a:t>
             </a:r>
           </a:p>
         </p:txBody>
@@ -9866,6 +10787,7 @@
               </a:defRPr>
             </a:defPPr>
             <a:lvl1pPr>
+              <a:buNone/>
               <a:defRPr sz="1350" b="0">
                 <a:solidFill>
                   <a:srgbClr val="526971"/>
@@ -9876,6 +10798,7 @@
               </a:defRPr>
             </a:lvl1pPr>
             <a:lvl2pPr>
+              <a:buNone/>
               <a:defRPr sz="1350" b="0">
                 <a:solidFill>
                   <a:srgbClr val="526971"/>
@@ -9886,6 +10809,7 @@
               </a:defRPr>
             </a:lvl2pPr>
             <a:lvl3pPr>
+              <a:buNone/>
               <a:defRPr sz="1350" b="0">
                 <a:solidFill>
                   <a:srgbClr val="526971"/>
@@ -9896,6 +10820,7 @@
               </a:defRPr>
             </a:lvl3pPr>
             <a:lvl4pPr>
+              <a:buNone/>
               <a:defRPr sz="1350" b="0">
                 <a:solidFill>
                   <a:srgbClr val="526971"/>
@@ -9906,6 +10831,7 @@
               </a:defRPr>
             </a:lvl4pPr>
             <a:lvl5pPr>
+              <a:buNone/>
               <a:defRPr sz="1350" b="0">
                 <a:solidFill>
                   <a:srgbClr val="526971"/>
@@ -9916,6 +10842,7 @@
               </a:defRPr>
             </a:lvl5pPr>
             <a:lvl6pPr>
+              <a:buNone/>
               <a:defRPr sz="1350" b="0">
                 <a:solidFill>
                   <a:srgbClr val="526971"/>
@@ -9926,6 +10853,7 @@
               </a:defRPr>
             </a:lvl6pPr>
             <a:lvl7pPr>
+              <a:buNone/>
               <a:defRPr sz="1350" b="0">
                 <a:solidFill>
                   <a:srgbClr val="526971"/>
@@ -9936,6 +10864,7 @@
               </a:defRPr>
             </a:lvl7pPr>
             <a:lvl8pPr>
+              <a:buNone/>
               <a:defRPr sz="1350" b="0">
                 <a:solidFill>
                   <a:srgbClr val="526971"/>
@@ -9946,6 +10875,7 @@
               </a:defRPr>
             </a:lvl8pPr>
             <a:lvl9pPr>
+              <a:buNone/>
               <a:defRPr sz="1350" b="0">
                 <a:solidFill>
                   <a:srgbClr val="526971"/>
@@ -9958,6 +10888,7 @@
           </a:lstStyle>
           <a:p xmlns:a="http://schemas.openxmlformats.org/drawingml/2006/main">
             <a:pPr>
+              <a:buNone/>
               <a:defRPr sz="1350" b="0">
                 <a:solidFill>
                   <a:srgbClr val="526971"/>
@@ -10022,6 +10953,7 @@
               </a:defRPr>
             </a:defPPr>
             <a:lvl1pPr>
+              <a:buNone/>
               <a:defRPr sz="1200" b="0">
                 <a:solidFill>
                   <a:srgbClr val="526971"/>
@@ -10032,6 +10964,7 @@
               </a:defRPr>
             </a:lvl1pPr>
             <a:lvl2pPr>
+              <a:buNone/>
               <a:defRPr sz="1200" b="0">
                 <a:solidFill>
                   <a:srgbClr val="526971"/>
@@ -10042,6 +10975,7 @@
               </a:defRPr>
             </a:lvl2pPr>
             <a:lvl3pPr>
+              <a:buNone/>
               <a:defRPr sz="1200" b="0">
                 <a:solidFill>
                   <a:srgbClr val="526971"/>
@@ -10052,6 +10986,7 @@
               </a:defRPr>
             </a:lvl3pPr>
             <a:lvl4pPr>
+              <a:buNone/>
               <a:defRPr sz="1200" b="0">
                 <a:solidFill>
                   <a:srgbClr val="526971"/>
@@ -10062,6 +10997,7 @@
               </a:defRPr>
             </a:lvl4pPr>
             <a:lvl5pPr>
+              <a:buNone/>
               <a:defRPr sz="1200" b="0">
                 <a:solidFill>
                   <a:srgbClr val="526971"/>
@@ -10072,6 +11008,7 @@
               </a:defRPr>
             </a:lvl5pPr>
             <a:lvl6pPr>
+              <a:buNone/>
               <a:defRPr sz="1200" b="0">
                 <a:solidFill>
                   <a:srgbClr val="526971"/>
@@ -10082,6 +11019,7 @@
               </a:defRPr>
             </a:lvl6pPr>
             <a:lvl7pPr>
+              <a:buNone/>
               <a:defRPr sz="1200" b="0">
                 <a:solidFill>
                   <a:srgbClr val="526971"/>
@@ -10092,6 +11030,7 @@
               </a:defRPr>
             </a:lvl7pPr>
             <a:lvl8pPr>
+              <a:buNone/>
               <a:defRPr sz="1200" b="0">
                 <a:solidFill>
                   <a:srgbClr val="526971"/>
@@ -10102,6 +11041,7 @@
               </a:defRPr>
             </a:lvl8pPr>
             <a:lvl9pPr>
+              <a:buNone/>
               <a:defRPr sz="1200" b="0">
                 <a:solidFill>
                   <a:srgbClr val="526971"/>
@@ -10114,6 +11054,7 @@
           </a:lstStyle>
           <a:p xmlns:a="http://schemas.openxmlformats.org/drawingml/2006/main">
             <a:pPr>
+              <a:buNone/>
               <a:defRPr sz="1200" b="0">
                 <a:solidFill>
                   <a:srgbClr val="526971"/>
@@ -10132,7 +11073,7 @@
                 <a:ea typeface="Arial"/>
                 <a:cs typeface="Arial"/>
               </a:rPr>
-              <a:t>Measured SpliceAI output 2026-10-23  /  public HG002 smoke test</a:t>
+              <a:t>Rescue-decision validation / SpliceAI measured controls and checker</a:t>
             </a:r>
           </a:p>
         </p:txBody>
@@ -10178,6 +11119,7 @@
               </a:defRPr>
             </a:defPPr>
             <a:lvl1pPr>
+              <a:buNone/>
               <a:defRPr sz="2400" b="0">
                 <a:solidFill>
                   <a:srgbClr val="526971"/>
@@ -10188,6 +11130,7 @@
               </a:defRPr>
             </a:lvl1pPr>
             <a:lvl2pPr>
+              <a:buNone/>
               <a:defRPr sz="2400" b="0">
                 <a:solidFill>
                   <a:srgbClr val="526971"/>
@@ -10198,6 +11141,7 @@
               </a:defRPr>
             </a:lvl2pPr>
             <a:lvl3pPr>
+              <a:buNone/>
               <a:defRPr sz="2400" b="0">
                 <a:solidFill>
                   <a:srgbClr val="526971"/>
@@ -10208,6 +11152,7 @@
               </a:defRPr>
             </a:lvl3pPr>
             <a:lvl4pPr>
+              <a:buNone/>
               <a:defRPr sz="2400" b="0">
                 <a:solidFill>
                   <a:srgbClr val="526971"/>
@@ -10218,6 +11163,7 @@
               </a:defRPr>
             </a:lvl4pPr>
             <a:lvl5pPr>
+              <a:buNone/>
               <a:defRPr sz="2400" b="0">
                 <a:solidFill>
                   <a:srgbClr val="526971"/>
@@ -10228,6 +11174,7 @@
               </a:defRPr>
             </a:lvl5pPr>
             <a:lvl6pPr>
+              <a:buNone/>
               <a:defRPr sz="2400" b="0">
                 <a:solidFill>
                   <a:srgbClr val="526971"/>
@@ -10238,6 +11185,7 @@
               </a:defRPr>
             </a:lvl6pPr>
             <a:lvl7pPr>
+              <a:buNone/>
               <a:defRPr sz="2400" b="0">
                 <a:solidFill>
                   <a:srgbClr val="526971"/>
@@ -10248,6 +11196,7 @@
               </a:defRPr>
             </a:lvl7pPr>
             <a:lvl8pPr>
+              <a:buNone/>
               <a:defRPr sz="2400" b="0">
                 <a:solidFill>
                   <a:srgbClr val="526971"/>
@@ -10258,6 +11207,7 @@
               </a:defRPr>
             </a:lvl8pPr>
             <a:lvl9pPr>
+              <a:buNone/>
               <a:defRPr sz="2400" b="0">
                 <a:solidFill>
                   <a:srgbClr val="526971"/>
@@ -10270,6 +11220,7 @@
           </a:lstStyle>
           <a:p xmlns:a="http://schemas.openxmlformats.org/drawingml/2006/main">
             <a:pPr>
+              <a:buNone/>
               <a:defRPr sz="2400" b="0">
                 <a:solidFill>
                   <a:srgbClr val="526971"/>
@@ -10288,7 +11239,7 @@
                 <a:ea typeface="Arial"/>
                 <a:cs typeface="Arial"/>
               </a:rPr>
-              <a:t>Real SpliceAI inference</a:t>
+              <a:t>Implemented rescue-decision prototype</a:t>
             </a:r>
           </a:p>
         </p:txBody>
@@ -10334,6 +11285,7 @@
               </a:defRPr>
             </a:defPPr>
             <a:lvl1pPr>
+              <a:buNone/>
               <a:defRPr sz="9750" b="1">
                 <a:solidFill>
                   <a:srgbClr val="176C63"/>
@@ -10344,6 +11296,7 @@
               </a:defRPr>
             </a:lvl1pPr>
             <a:lvl2pPr>
+              <a:buNone/>
               <a:defRPr sz="9750" b="1">
                 <a:solidFill>
                   <a:srgbClr val="176C63"/>
@@ -10354,6 +11307,7 @@
               </a:defRPr>
             </a:lvl2pPr>
             <a:lvl3pPr>
+              <a:buNone/>
               <a:defRPr sz="9750" b="1">
                 <a:solidFill>
                   <a:srgbClr val="176C63"/>
@@ -10364,6 +11318,7 @@
               </a:defRPr>
             </a:lvl3pPr>
             <a:lvl4pPr>
+              <a:buNone/>
               <a:defRPr sz="9750" b="1">
                 <a:solidFill>
                   <a:srgbClr val="176C63"/>
@@ -10374,6 +11329,7 @@
               </a:defRPr>
             </a:lvl4pPr>
             <a:lvl5pPr>
+              <a:buNone/>
               <a:defRPr sz="9750" b="1">
                 <a:solidFill>
                   <a:srgbClr val="176C63"/>
@@ -10384,6 +11340,7 @@
               </a:defRPr>
             </a:lvl5pPr>
             <a:lvl6pPr>
+              <a:buNone/>
               <a:defRPr sz="9750" b="1">
                 <a:solidFill>
                   <a:srgbClr val="176C63"/>
@@ -10394,6 +11351,7 @@
               </a:defRPr>
             </a:lvl6pPr>
             <a:lvl7pPr>
+              <a:buNone/>
               <a:defRPr sz="9750" b="1">
                 <a:solidFill>
                   <a:srgbClr val="176C63"/>
@@ -10404,6 +11362,7 @@
               </a:defRPr>
             </a:lvl7pPr>
             <a:lvl8pPr>
+              <a:buNone/>
               <a:defRPr sz="9750" b="1">
                 <a:solidFill>
                   <a:srgbClr val="176C63"/>
@@ -10414,6 +11373,7 @@
               </a:defRPr>
             </a:lvl8pPr>
             <a:lvl9pPr>
+              <a:buNone/>
               <a:defRPr sz="9750" b="1">
                 <a:solidFill>
                   <a:srgbClr val="176C63"/>
@@ -10426,6 +11386,7 @@
           </a:lstStyle>
           <a:p xmlns:a="http://schemas.openxmlformats.org/drawingml/2006/main">
             <a:pPr>
+              <a:buNone/>
               <a:defRPr sz="9750" b="1">
                 <a:solidFill>
                   <a:srgbClr val="176C63"/>
@@ -10444,7 +11405,7 @@
                 <a:ea typeface="Arial"/>
                 <a:cs typeface="Arial"/>
               </a:rPr>
-              <a:t>6</a:t>
+              <a:t>40</a:t>
             </a:r>
           </a:p>
         </p:txBody>
@@ -10466,7 +11427,7 @@
         <p:spPr>
           <a:xfrm xmlns:a="http://schemas.openxmlformats.org/drawingml/2006/main">
             <a:off x="3143250" y="2857500"/>
-            <a:ext cx="7620000" cy="1047750"/>
+            <a:ext cx="8286750" cy="1143000"/>
           </a:xfrm>
           <a:prstGeom xmlns:a="http://schemas.openxmlformats.org/drawingml/2006/main" prst="rect">
             <a:avLst/>
@@ -10480,7 +11441,7 @@
           <a:bodyPr xmlns:a="http://schemas.openxmlformats.org/drawingml/2006/main" anchor="t"/>
           <a:lstStyle xmlns:a="http://schemas.openxmlformats.org/drawingml/2006/main">
             <a:defPPr>
-              <a:defRPr sz="3000" b="0">
+              <a:defRPr sz="2850" b="0">
                 <a:solidFill>
                   <a:srgbClr val="17333E"/>
                 </a:solidFill>
@@ -10490,6 +11451,7 @@
               </a:defRPr>
             </a:defPPr>
             <a:lvl1pPr>
+              <a:buNone/>
               <a:defRPr sz="3000" b="0">
                 <a:solidFill>
                   <a:srgbClr val="17333E"/>
@@ -10500,6 +11462,7 @@
               </a:defRPr>
             </a:lvl1pPr>
             <a:lvl2pPr>
+              <a:buNone/>
               <a:defRPr sz="3000" b="0">
                 <a:solidFill>
                   <a:srgbClr val="17333E"/>
@@ -10510,6 +11473,7 @@
               </a:defRPr>
             </a:lvl2pPr>
             <a:lvl3pPr>
+              <a:buNone/>
               <a:defRPr sz="3000" b="0">
                 <a:solidFill>
                   <a:srgbClr val="17333E"/>
@@ -10520,6 +11484,7 @@
               </a:defRPr>
             </a:lvl3pPr>
             <a:lvl4pPr>
+              <a:buNone/>
               <a:defRPr sz="3000" b="0">
                 <a:solidFill>
                   <a:srgbClr val="17333E"/>
@@ -10530,6 +11495,7 @@
               </a:defRPr>
             </a:lvl4pPr>
             <a:lvl5pPr>
+              <a:buNone/>
               <a:defRPr sz="3000" b="0">
                 <a:solidFill>
                   <a:srgbClr val="17333E"/>
@@ -10540,6 +11506,7 @@
               </a:defRPr>
             </a:lvl5pPr>
             <a:lvl6pPr>
+              <a:buNone/>
               <a:defRPr sz="3000" b="0">
                 <a:solidFill>
                   <a:srgbClr val="17333E"/>
@@ -10550,6 +11517,7 @@
               </a:defRPr>
             </a:lvl6pPr>
             <a:lvl7pPr>
+              <a:buNone/>
               <a:defRPr sz="3000" b="0">
                 <a:solidFill>
                   <a:srgbClr val="17333E"/>
@@ -10560,6 +11528,7 @@
               </a:defRPr>
             </a:lvl7pPr>
             <a:lvl8pPr>
+              <a:buNone/>
               <a:defRPr sz="3000" b="0">
                 <a:solidFill>
                   <a:srgbClr val="17333E"/>
@@ -10570,6 +11539,7 @@
               </a:defRPr>
             </a:lvl8pPr>
             <a:lvl9pPr>
+              <a:buNone/>
               <a:defRPr sz="3000" b="0">
                 <a:solidFill>
                   <a:srgbClr val="17333E"/>
@@ -10582,7 +11552,8 @@
           </a:lstStyle>
           <a:p xmlns:a="http://schemas.openxmlformats.org/drawingml/2006/main">
             <a:pPr>
-              <a:defRPr sz="3000" b="0">
+              <a:buNone/>
+              <a:defRPr sz="2850" b="0">
                 <a:solidFill>
                   <a:srgbClr val="17333E"/>
                 </a:solidFill>
@@ -10592,7 +11563,7 @@
               </a:defRPr>
             </a:pPr>
             <a:r>
-              <a:rPr sz="3000" b="0">
+              <a:rPr sz="2850" b="0">
                 <a:solidFill>
                   <a:srgbClr val="17333E"/>
                 </a:solidFill>
@@ -10600,12 +11571,13 @@
                 <a:ea typeface="Arial"/>
                 <a:cs typeface="Arial"/>
               </a:rPr>
-              <a:t>positive and negative</a:t>
+              <a:t>frozen synthetic cases</a:t>
             </a:r>
           </a:p>
           <a:p xmlns:a="http://schemas.openxmlformats.org/drawingml/2006/main">
             <a:pPr>
-              <a:defRPr sz="3000" b="0">
+              <a:buNone/>
+              <a:defRPr sz="2850" b="0">
                 <a:solidFill>
                   <a:srgbClr val="17333E"/>
                 </a:solidFill>
@@ -10615,7 +11587,7 @@
               </a:defRPr>
             </a:pPr>
             <a:r>
-              <a:rPr sz="3000" b="0">
+              <a:rPr sz="2850" b="0">
                 <a:solidFill>
                   <a:srgbClr val="17333E"/>
                 </a:solidFill>
@@ -10623,7 +11595,7 @@
                 <a:ea typeface="Arial"/>
                 <a:cs typeface="Arial"/>
               </a:rPr>
-              <a:t>model controls</a:t>
+              <a:t>matched expected decisions</a:t>
             </a:r>
           </a:p>
         </p:txBody>
@@ -10644,8 +11616,8 @@
         </p:nvSpPr>
         <p:spPr>
           <a:xfrm xmlns:a="http://schemas.openxmlformats.org/drawingml/2006/main">
-            <a:off x="609600" y="4714875"/>
-            <a:ext cx="10953750" cy="762000"/>
+            <a:off x="609600" y="4619625"/>
+            <a:ext cx="10953750" cy="904875"/>
           </a:xfrm>
           <a:prstGeom xmlns:a="http://schemas.openxmlformats.org/drawingml/2006/main" prst="rect">
             <a:avLst/>
@@ -10659,7 +11631,7 @@
           <a:bodyPr xmlns:a="http://schemas.openxmlformats.org/drawingml/2006/main" anchor="t"/>
           <a:lstStyle xmlns:a="http://schemas.openxmlformats.org/drawingml/2006/main">
             <a:defPPr>
-              <a:defRPr sz="2550" b="0">
+              <a:defRPr sz="2325" b="0">
                 <a:solidFill>
                   <a:srgbClr val="17333E"/>
                 </a:solidFill>
@@ -10669,6 +11641,7 @@
               </a:defRPr>
             </a:defPPr>
             <a:lvl1pPr>
+              <a:buNone/>
               <a:defRPr sz="2550" b="0">
                 <a:solidFill>
                   <a:srgbClr val="17333E"/>
@@ -10679,6 +11652,7 @@
               </a:defRPr>
             </a:lvl1pPr>
             <a:lvl2pPr>
+              <a:buNone/>
               <a:defRPr sz="2550" b="0">
                 <a:solidFill>
                   <a:srgbClr val="17333E"/>
@@ -10689,6 +11663,7 @@
               </a:defRPr>
             </a:lvl2pPr>
             <a:lvl3pPr>
+              <a:buNone/>
               <a:defRPr sz="2550" b="0">
                 <a:solidFill>
                   <a:srgbClr val="17333E"/>
@@ -10699,6 +11674,7 @@
               </a:defRPr>
             </a:lvl3pPr>
             <a:lvl4pPr>
+              <a:buNone/>
               <a:defRPr sz="2550" b="0">
                 <a:solidFill>
                   <a:srgbClr val="17333E"/>
@@ -10709,6 +11685,7 @@
               </a:defRPr>
             </a:lvl4pPr>
             <a:lvl5pPr>
+              <a:buNone/>
               <a:defRPr sz="2550" b="0">
                 <a:solidFill>
                   <a:srgbClr val="17333E"/>
@@ -10719,6 +11696,7 @@
               </a:defRPr>
             </a:lvl5pPr>
             <a:lvl6pPr>
+              <a:buNone/>
               <a:defRPr sz="2550" b="0">
                 <a:solidFill>
                   <a:srgbClr val="17333E"/>
@@ -10729,6 +11707,7 @@
               </a:defRPr>
             </a:lvl6pPr>
             <a:lvl7pPr>
+              <a:buNone/>
               <a:defRPr sz="2550" b="0">
                 <a:solidFill>
                   <a:srgbClr val="17333E"/>
@@ -10739,6 +11718,7 @@
               </a:defRPr>
             </a:lvl7pPr>
             <a:lvl8pPr>
+              <a:buNone/>
               <a:defRPr sz="2550" b="0">
                 <a:solidFill>
                   <a:srgbClr val="17333E"/>
@@ -10749,6 +11729,7 @@
               </a:defRPr>
             </a:lvl8pPr>
             <a:lvl9pPr>
+              <a:buNone/>
               <a:defRPr sz="2550" b="0">
                 <a:solidFill>
                   <a:srgbClr val="17333E"/>
@@ -10761,7 +11742,8 @@
           </a:lstStyle>
           <a:p xmlns:a="http://schemas.openxmlformats.org/drawingml/2006/main">
             <a:pPr>
-              <a:defRPr sz="2550" b="0">
+              <a:buNone/>
+              <a:defRPr sz="2325" b="0">
                 <a:solidFill>
                   <a:srgbClr val="17333E"/>
                 </a:solidFill>
@@ -10771,7 +11753,7 @@
               </a:defRPr>
             </a:pPr>
             <a:r>
-              <a:rPr sz="2550" b="0">
+              <a:rPr sz="2325" b="0">
                 <a:solidFill>
                   <a:srgbClr val="17333E"/>
                 </a:solidFill>
@@ -10779,7 +11761,31 @@
                 <a:ea typeface="Arial"/>
                 <a:cs typeface="Arial"/>
               </a:rPr>
-              <a:t>9 injected failures rejected by a separate checker self-test</a:t>
+              <a:t>Also: 6 real SpliceAI controls passed</a:t>
+            </a:r>
+          </a:p>
+          <a:p xmlns:a="http://schemas.openxmlformats.org/drawingml/2006/main">
+            <a:pPr>
+              <a:buNone/>
+              <a:defRPr sz="2325" b="0">
+                <a:solidFill>
+                  <a:srgbClr val="17333E"/>
+                </a:solidFill>
+                <a:latin typeface="Arial"/>
+                <a:ea typeface="Arial"/>
+                <a:cs typeface="Arial"/>
+              </a:defRPr>
+            </a:pPr>
+            <a:r>
+              <a:rPr sz="2325" b="0">
+                <a:solidFill>
+                  <a:srgbClr val="17333E"/>
+                </a:solidFill>
+                <a:latin typeface="Arial"/>
+                <a:ea typeface="Arial"/>
+                <a:cs typeface="Arial"/>
+              </a:rPr>
+              <a:t>9 injected checker faults rejected</a:t>
             </a:r>
           </a:p>
         </p:txBody>
@@ -10800,8 +11806,8 @@
         </p:nvSpPr>
         <p:spPr>
           <a:xfrm xmlns:a="http://schemas.openxmlformats.org/drawingml/2006/main">
-            <a:off x="609600" y="5715000"/>
-            <a:ext cx="10972800" cy="476250"/>
+            <a:off x="609600" y="5762625"/>
+            <a:ext cx="10972800" cy="428625"/>
           </a:xfrm>
           <a:prstGeom xmlns:a="http://schemas.openxmlformats.org/drawingml/2006/main" prst="rect">
             <a:avLst/>
@@ -10815,7 +11821,7 @@
           <a:bodyPr xmlns:a="http://schemas.openxmlformats.org/drawingml/2006/main" anchor="t"/>
           <a:lstStyle xmlns:a="http://schemas.openxmlformats.org/drawingml/2006/main">
             <a:defPPr>
-              <a:defRPr sz="1875" b="0">
+              <a:defRPr sz="1950" b="0">
                 <a:solidFill>
                   <a:srgbClr val="526971"/>
                 </a:solidFill>
@@ -10825,6 +11831,7 @@
               </a:defRPr>
             </a:defPPr>
             <a:lvl1pPr>
+              <a:buNone/>
               <a:defRPr sz="1875" b="0">
                 <a:solidFill>
                   <a:srgbClr val="526971"/>
@@ -10835,6 +11842,7 @@
               </a:defRPr>
             </a:lvl1pPr>
             <a:lvl2pPr>
+              <a:buNone/>
               <a:defRPr sz="1875" b="0">
                 <a:solidFill>
                   <a:srgbClr val="526971"/>
@@ -10845,6 +11853,7 @@
               </a:defRPr>
             </a:lvl2pPr>
             <a:lvl3pPr>
+              <a:buNone/>
               <a:defRPr sz="1875" b="0">
                 <a:solidFill>
                   <a:srgbClr val="526971"/>
@@ -10855,6 +11864,7 @@
               </a:defRPr>
             </a:lvl3pPr>
             <a:lvl4pPr>
+              <a:buNone/>
               <a:defRPr sz="1875" b="0">
                 <a:solidFill>
                   <a:srgbClr val="526971"/>
@@ -10865,6 +11875,7 @@
               </a:defRPr>
             </a:lvl4pPr>
             <a:lvl5pPr>
+              <a:buNone/>
               <a:defRPr sz="1875" b="0">
                 <a:solidFill>
                   <a:srgbClr val="526971"/>
@@ -10875,6 +11886,7 @@
               </a:defRPr>
             </a:lvl5pPr>
             <a:lvl6pPr>
+              <a:buNone/>
               <a:defRPr sz="1875" b="0">
                 <a:solidFill>
                   <a:srgbClr val="526971"/>
@@ -10885,6 +11897,7 @@
               </a:defRPr>
             </a:lvl6pPr>
             <a:lvl7pPr>
+              <a:buNone/>
               <a:defRPr sz="1875" b="0">
                 <a:solidFill>
                   <a:srgbClr val="526971"/>
@@ -10895,6 +11908,7 @@
               </a:defRPr>
             </a:lvl7pPr>
             <a:lvl8pPr>
+              <a:buNone/>
               <a:defRPr sz="1875" b="0">
                 <a:solidFill>
                   <a:srgbClr val="526971"/>
@@ -10905,6 +11919,7 @@
               </a:defRPr>
             </a:lvl8pPr>
             <a:lvl9pPr>
+              <a:buNone/>
               <a:defRPr sz="1875" b="0">
                 <a:solidFill>
                   <a:srgbClr val="526971"/>
@@ -10917,7 +11932,8 @@
           </a:lstStyle>
           <a:p xmlns:a="http://schemas.openxmlformats.org/drawingml/2006/main">
             <a:pPr>
-              <a:defRPr sz="1875" b="0">
+              <a:buNone/>
+              <a:defRPr sz="1950" b="0">
                 <a:solidFill>
                   <a:srgbClr val="526971"/>
                 </a:solidFill>
@@ -10927,7 +11943,7 @@
               </a:defRPr>
             </a:pPr>
             <a:r>
-              <a:rPr sz="1875" b="0">
+              <a:rPr sz="1950" b="0">
                 <a:solidFill>
                   <a:srgbClr val="526971"/>
                 </a:solidFill>
@@ -10935,7 +11951,7 @@
                 <a:ea typeface="Arial"/>
                 <a:cs typeface="Arial"/>
               </a:rPr>
-              <a:t>Missing inputs return NOT RUN. These checks do not measure clinical accuracy.</a:t>
+              <a:t>Software verification. Biological rescue remains unmeasured.</a:t>
             </a:r>
           </a:p>
         </p:txBody>
@@ -11010,6 +12026,7 @@
               </a:defRPr>
             </a:defPPr>
             <a:lvl1pPr>
+              <a:buNone/>
               <a:defRPr sz="3750" b="1">
                 <a:solidFill>
                   <a:srgbClr val="17333E"/>
@@ -11020,6 +12037,7 @@
               </a:defRPr>
             </a:lvl1pPr>
             <a:lvl2pPr>
+              <a:buNone/>
               <a:defRPr sz="3750" b="1">
                 <a:solidFill>
                   <a:srgbClr val="17333E"/>
@@ -11030,6 +12048,7 @@
               </a:defRPr>
             </a:lvl2pPr>
             <a:lvl3pPr>
+              <a:buNone/>
               <a:defRPr sz="3750" b="1">
                 <a:solidFill>
                   <a:srgbClr val="17333E"/>
@@ -11040,6 +12059,7 @@
               </a:defRPr>
             </a:lvl3pPr>
             <a:lvl4pPr>
+              <a:buNone/>
               <a:defRPr sz="3750" b="1">
                 <a:solidFill>
                   <a:srgbClr val="17333E"/>
@@ -11050,6 +12070,7 @@
               </a:defRPr>
             </a:lvl4pPr>
             <a:lvl5pPr>
+              <a:buNone/>
               <a:defRPr sz="3750" b="1">
                 <a:solidFill>
                   <a:srgbClr val="17333E"/>
@@ -11060,6 +12081,7 @@
               </a:defRPr>
             </a:lvl5pPr>
             <a:lvl6pPr>
+              <a:buNone/>
               <a:defRPr sz="3750" b="1">
                 <a:solidFill>
                   <a:srgbClr val="17333E"/>
@@ -11070,6 +12092,7 @@
               </a:defRPr>
             </a:lvl6pPr>
             <a:lvl7pPr>
+              <a:buNone/>
               <a:defRPr sz="3750" b="1">
                 <a:solidFill>
                   <a:srgbClr val="17333E"/>
@@ -11080,6 +12103,7 @@
               </a:defRPr>
             </a:lvl7pPr>
             <a:lvl8pPr>
+              <a:buNone/>
               <a:defRPr sz="3750" b="1">
                 <a:solidFill>
                   <a:srgbClr val="17333E"/>
@@ -11090,6 +12114,7 @@
               </a:defRPr>
             </a:lvl8pPr>
             <a:lvl9pPr>
+              <a:buNone/>
               <a:defRPr sz="3750" b="1">
                 <a:solidFill>
                   <a:srgbClr val="17333E"/>
@@ -11102,6 +12127,7 @@
           </a:lstStyle>
           <a:p xmlns:a="http://schemas.openxmlformats.org/drawingml/2006/main">
             <a:pPr>
+              <a:buNone/>
               <a:defRPr sz="3750" b="1">
                 <a:solidFill>
                   <a:srgbClr val="17333E"/>
@@ -11166,6 +12192,7 @@
               </a:defRPr>
             </a:defPPr>
             <a:lvl1pPr>
+              <a:buNone/>
               <a:defRPr sz="1350" b="0">
                 <a:solidFill>
                   <a:srgbClr val="526971"/>
@@ -11176,6 +12203,7 @@
               </a:defRPr>
             </a:lvl1pPr>
             <a:lvl2pPr>
+              <a:buNone/>
               <a:defRPr sz="1350" b="0">
                 <a:solidFill>
                   <a:srgbClr val="526971"/>
@@ -11186,6 +12214,7 @@
               </a:defRPr>
             </a:lvl2pPr>
             <a:lvl3pPr>
+              <a:buNone/>
               <a:defRPr sz="1350" b="0">
                 <a:solidFill>
                   <a:srgbClr val="526971"/>
@@ -11196,6 +12225,7 @@
               </a:defRPr>
             </a:lvl3pPr>
             <a:lvl4pPr>
+              <a:buNone/>
               <a:defRPr sz="1350" b="0">
                 <a:solidFill>
                   <a:srgbClr val="526971"/>
@@ -11206,6 +12236,7 @@
               </a:defRPr>
             </a:lvl4pPr>
             <a:lvl5pPr>
+              <a:buNone/>
               <a:defRPr sz="1350" b="0">
                 <a:solidFill>
                   <a:srgbClr val="526971"/>
@@ -11216,6 +12247,7 @@
               </a:defRPr>
             </a:lvl5pPr>
             <a:lvl6pPr>
+              <a:buNone/>
               <a:defRPr sz="1350" b="0">
                 <a:solidFill>
                   <a:srgbClr val="526971"/>
@@ -11226,6 +12258,7 @@
               </a:defRPr>
             </a:lvl6pPr>
             <a:lvl7pPr>
+              <a:buNone/>
               <a:defRPr sz="1350" b="0">
                 <a:solidFill>
                   <a:srgbClr val="526971"/>
@@ -11236,6 +12269,7 @@
               </a:defRPr>
             </a:lvl7pPr>
             <a:lvl8pPr>
+              <a:buNone/>
               <a:defRPr sz="1350" b="0">
                 <a:solidFill>
                   <a:srgbClr val="526971"/>
@@ -11246,6 +12280,7 @@
               </a:defRPr>
             </a:lvl8pPr>
             <a:lvl9pPr>
+              <a:buNone/>
               <a:defRPr sz="1350" b="0">
                 <a:solidFill>
                   <a:srgbClr val="526971"/>
@@ -11258,6 +12293,7 @@
           </a:lstStyle>
           <a:p xmlns:a="http://schemas.openxmlformats.org/drawingml/2006/main">
             <a:pPr>
+              <a:buNone/>
               <a:defRPr sz="1350" b="0">
                 <a:solidFill>
                   <a:srgbClr val="526971"/>
@@ -11322,6 +12358,7 @@
               </a:defRPr>
             </a:defPPr>
             <a:lvl1pPr>
+              <a:buNone/>
               <a:defRPr sz="1200" b="0">
                 <a:solidFill>
                   <a:srgbClr val="526971"/>
@@ -11332,6 +12369,7 @@
               </a:defRPr>
             </a:lvl1pPr>
             <a:lvl2pPr>
+              <a:buNone/>
               <a:defRPr sz="1200" b="0">
                 <a:solidFill>
                   <a:srgbClr val="526971"/>
@@ -11342,6 +12380,7 @@
               </a:defRPr>
             </a:lvl2pPr>
             <a:lvl3pPr>
+              <a:buNone/>
               <a:defRPr sz="1200" b="0">
                 <a:solidFill>
                   <a:srgbClr val="526971"/>
@@ -11352,6 +12391,7 @@
               </a:defRPr>
             </a:lvl3pPr>
             <a:lvl4pPr>
+              <a:buNone/>
               <a:defRPr sz="1200" b="0">
                 <a:solidFill>
                   <a:srgbClr val="526971"/>
@@ -11362,6 +12402,7 @@
               </a:defRPr>
             </a:lvl4pPr>
             <a:lvl5pPr>
+              <a:buNone/>
               <a:defRPr sz="1200" b="0">
                 <a:solidFill>
                   <a:srgbClr val="526971"/>
@@ -11372,6 +12413,7 @@
               </a:defRPr>
             </a:lvl5pPr>
             <a:lvl6pPr>
+              <a:buNone/>
               <a:defRPr sz="1200" b="0">
                 <a:solidFill>
                   <a:srgbClr val="526971"/>
@@ -11382,6 +12424,7 @@
               </a:defRPr>
             </a:lvl6pPr>
             <a:lvl7pPr>
+              <a:buNone/>
               <a:defRPr sz="1200" b="0">
                 <a:solidFill>
                   <a:srgbClr val="526971"/>
@@ -11392,6 +12435,7 @@
               </a:defRPr>
             </a:lvl7pPr>
             <a:lvl8pPr>
+              <a:buNone/>
               <a:defRPr sz="1200" b="0">
                 <a:solidFill>
                   <a:srgbClr val="526971"/>
@@ -11402,6 +12446,7 @@
               </a:defRPr>
             </a:lvl8pPr>
             <a:lvl9pPr>
+              <a:buNone/>
               <a:defRPr sz="1200" b="0">
                 <a:solidFill>
                   <a:srgbClr val="526971"/>
@@ -11414,6 +12459,7 @@
           </a:lstStyle>
           <a:p xmlns:a="http://schemas.openxmlformats.org/drawingml/2006/main">
             <a:pPr>
+              <a:buNone/>
               <a:defRPr sz="1200" b="0">
                 <a:solidFill>
                   <a:srgbClr val="526971"/>
@@ -11478,6 +12524,7 @@
               </a:defRPr>
             </a:defPPr>
             <a:lvl1pPr>
+              <a:buNone/>
               <a:defRPr sz="3900" b="1">
                 <a:solidFill>
                   <a:srgbClr val="176C63"/>
@@ -11488,6 +12535,7 @@
               </a:defRPr>
             </a:lvl1pPr>
             <a:lvl2pPr>
+              <a:buNone/>
               <a:defRPr sz="3900" b="1">
                 <a:solidFill>
                   <a:srgbClr val="176C63"/>
@@ -11498,6 +12546,7 @@
               </a:defRPr>
             </a:lvl2pPr>
             <a:lvl3pPr>
+              <a:buNone/>
               <a:defRPr sz="3900" b="1">
                 <a:solidFill>
                   <a:srgbClr val="176C63"/>
@@ -11508,6 +12557,7 @@
               </a:defRPr>
             </a:lvl3pPr>
             <a:lvl4pPr>
+              <a:buNone/>
               <a:defRPr sz="3900" b="1">
                 <a:solidFill>
                   <a:srgbClr val="176C63"/>
@@ -11518,6 +12568,7 @@
               </a:defRPr>
             </a:lvl4pPr>
             <a:lvl5pPr>
+              <a:buNone/>
               <a:defRPr sz="3900" b="1">
                 <a:solidFill>
                   <a:srgbClr val="176C63"/>
@@ -11528,6 +12579,7 @@
               </a:defRPr>
             </a:lvl5pPr>
             <a:lvl6pPr>
+              <a:buNone/>
               <a:defRPr sz="3900" b="1">
                 <a:solidFill>
                   <a:srgbClr val="176C63"/>
@@ -11538,6 +12590,7 @@
               </a:defRPr>
             </a:lvl6pPr>
             <a:lvl7pPr>
+              <a:buNone/>
               <a:defRPr sz="3900" b="1">
                 <a:solidFill>
                   <a:srgbClr val="176C63"/>
@@ -11548,6 +12601,7 @@
               </a:defRPr>
             </a:lvl7pPr>
             <a:lvl8pPr>
+              <a:buNone/>
               <a:defRPr sz="3900" b="1">
                 <a:solidFill>
                   <a:srgbClr val="176C63"/>
@@ -11558,6 +12612,7 @@
               </a:defRPr>
             </a:lvl8pPr>
             <a:lvl9pPr>
+              <a:buNone/>
               <a:defRPr sz="3900" b="1">
                 <a:solidFill>
                   <a:srgbClr val="176C63"/>
@@ -11570,6 +12625,7 @@
           </a:lstStyle>
           <a:p xmlns:a="http://schemas.openxmlformats.org/drawingml/2006/main">
             <a:pPr>
+              <a:buNone/>
               <a:defRPr sz="3900" b="1">
                 <a:solidFill>
                   <a:srgbClr val="176C63"/>
@@ -11593,6 +12649,7 @@
           </a:p>
           <a:p xmlns:a="http://schemas.openxmlformats.org/drawingml/2006/main">
             <a:pPr>
+              <a:buNone/>
               <a:defRPr sz="3900" b="1">
                 <a:solidFill>
                   <a:srgbClr val="176C63"/>
@@ -11657,6 +12714,7 @@
               </a:defRPr>
             </a:defPPr>
             <a:lvl1pPr>
+              <a:buNone/>
               <a:defRPr sz="2550" b="1">
                 <a:solidFill>
                   <a:srgbClr val="17333E"/>
@@ -11667,6 +12725,7 @@
               </a:defRPr>
             </a:lvl1pPr>
             <a:lvl2pPr>
+              <a:buNone/>
               <a:defRPr sz="2550" b="1">
                 <a:solidFill>
                   <a:srgbClr val="17333E"/>
@@ -11677,6 +12736,7 @@
               </a:defRPr>
             </a:lvl2pPr>
             <a:lvl3pPr>
+              <a:buNone/>
               <a:defRPr sz="2550" b="1">
                 <a:solidFill>
                   <a:srgbClr val="17333E"/>
@@ -11687,6 +12747,7 @@
               </a:defRPr>
             </a:lvl3pPr>
             <a:lvl4pPr>
+              <a:buNone/>
               <a:defRPr sz="2550" b="1">
                 <a:solidFill>
                   <a:srgbClr val="17333E"/>
@@ -11697,6 +12758,7 @@
               </a:defRPr>
             </a:lvl4pPr>
             <a:lvl5pPr>
+              <a:buNone/>
               <a:defRPr sz="2550" b="1">
                 <a:solidFill>
                   <a:srgbClr val="17333E"/>
@@ -11707,6 +12769,7 @@
               </a:defRPr>
             </a:lvl5pPr>
             <a:lvl6pPr>
+              <a:buNone/>
               <a:defRPr sz="2550" b="1">
                 <a:solidFill>
                   <a:srgbClr val="17333E"/>
@@ -11717,6 +12780,7 @@
               </a:defRPr>
             </a:lvl6pPr>
             <a:lvl7pPr>
+              <a:buNone/>
               <a:defRPr sz="2550" b="1">
                 <a:solidFill>
                   <a:srgbClr val="17333E"/>
@@ -11727,6 +12791,7 @@
               </a:defRPr>
             </a:lvl7pPr>
             <a:lvl8pPr>
+              <a:buNone/>
               <a:defRPr sz="2550" b="1">
                 <a:solidFill>
                   <a:srgbClr val="17333E"/>
@@ -11737,6 +12802,7 @@
               </a:defRPr>
             </a:lvl8pPr>
             <a:lvl9pPr>
+              <a:buNone/>
               <a:defRPr sz="2550" b="1">
                 <a:solidFill>
                   <a:srgbClr val="17333E"/>
@@ -11749,6 +12815,7 @@
           </a:lstStyle>
           <a:p xmlns:a="http://schemas.openxmlformats.org/drawingml/2006/main">
             <a:pPr>
+              <a:buNone/>
               <a:defRPr sz="2550" b="1">
                 <a:solidFill>
                   <a:srgbClr val="17333E"/>
@@ -11813,6 +12880,7 @@
               </a:defRPr>
             </a:defPPr>
             <a:lvl1pPr>
+              <a:buNone/>
               <a:defRPr sz="2250" b="0">
                 <a:solidFill>
                   <a:srgbClr val="17333E"/>
@@ -11823,6 +12891,7 @@
               </a:defRPr>
             </a:lvl1pPr>
             <a:lvl2pPr>
+              <a:buNone/>
               <a:defRPr sz="2250" b="0">
                 <a:solidFill>
                   <a:srgbClr val="17333E"/>
@@ -11833,6 +12902,7 @@
               </a:defRPr>
             </a:lvl2pPr>
             <a:lvl3pPr>
+              <a:buNone/>
               <a:defRPr sz="2250" b="0">
                 <a:solidFill>
                   <a:srgbClr val="17333E"/>
@@ -11843,6 +12913,7 @@
               </a:defRPr>
             </a:lvl3pPr>
             <a:lvl4pPr>
+              <a:buNone/>
               <a:defRPr sz="2250" b="0">
                 <a:solidFill>
                   <a:srgbClr val="17333E"/>
@@ -11853,6 +12924,7 @@
               </a:defRPr>
             </a:lvl4pPr>
             <a:lvl5pPr>
+              <a:buNone/>
               <a:defRPr sz="2250" b="0">
                 <a:solidFill>
                   <a:srgbClr val="17333E"/>
@@ -11863,6 +12935,7 @@
               </a:defRPr>
             </a:lvl5pPr>
             <a:lvl6pPr>
+              <a:buNone/>
               <a:defRPr sz="2250" b="0">
                 <a:solidFill>
                   <a:srgbClr val="17333E"/>
@@ -11873,6 +12946,7 @@
               </a:defRPr>
             </a:lvl6pPr>
             <a:lvl7pPr>
+              <a:buNone/>
               <a:defRPr sz="2250" b="0">
                 <a:solidFill>
                   <a:srgbClr val="17333E"/>
@@ -11883,6 +12957,7 @@
               </a:defRPr>
             </a:lvl7pPr>
             <a:lvl8pPr>
+              <a:buNone/>
               <a:defRPr sz="2250" b="0">
                 <a:solidFill>
                   <a:srgbClr val="17333E"/>
@@ -11893,6 +12968,7 @@
               </a:defRPr>
             </a:lvl8pPr>
             <a:lvl9pPr>
+              <a:buNone/>
               <a:defRPr sz="2250" b="0">
                 <a:solidFill>
                   <a:srgbClr val="17333E"/>
@@ -11905,6 +12981,7 @@
           </a:lstStyle>
           <a:p xmlns:a="http://schemas.openxmlformats.org/drawingml/2006/main">
             <a:pPr>
+              <a:buNone/>
               <a:defRPr sz="2250" b="0">
                 <a:solidFill>
                   <a:srgbClr val="17333E"/>
@@ -11928,6 +13005,7 @@
           </a:p>
           <a:p xmlns:a="http://schemas.openxmlformats.org/drawingml/2006/main">
             <a:pPr>
+              <a:buNone/>
               <a:defRPr sz="2250" b="0">
                 <a:solidFill>
                   <a:srgbClr val="17333E"/>
@@ -11992,6 +13070,7 @@
               </a:defRPr>
             </a:defPPr>
             <a:lvl1pPr>
+              <a:buNone/>
               <a:defRPr sz="2550" b="1">
                 <a:solidFill>
                   <a:srgbClr val="17333E"/>
@@ -12002,6 +13081,7 @@
               </a:defRPr>
             </a:lvl1pPr>
             <a:lvl2pPr>
+              <a:buNone/>
               <a:defRPr sz="2550" b="1">
                 <a:solidFill>
                   <a:srgbClr val="17333E"/>
@@ -12012,6 +13092,7 @@
               </a:defRPr>
             </a:lvl2pPr>
             <a:lvl3pPr>
+              <a:buNone/>
               <a:defRPr sz="2550" b="1">
                 <a:solidFill>
                   <a:srgbClr val="17333E"/>
@@ -12022,6 +13103,7 @@
               </a:defRPr>
             </a:lvl3pPr>
             <a:lvl4pPr>
+              <a:buNone/>
               <a:defRPr sz="2550" b="1">
                 <a:solidFill>
                   <a:srgbClr val="17333E"/>
@@ -12032,6 +13114,7 @@
               </a:defRPr>
             </a:lvl4pPr>
             <a:lvl5pPr>
+              <a:buNone/>
               <a:defRPr sz="2550" b="1">
                 <a:solidFill>
                   <a:srgbClr val="17333E"/>
@@ -12042,6 +13125,7 @@
               </a:defRPr>
             </a:lvl5pPr>
             <a:lvl6pPr>
+              <a:buNone/>
               <a:defRPr sz="2550" b="1">
                 <a:solidFill>
                   <a:srgbClr val="17333E"/>
@@ -12052,6 +13136,7 @@
               </a:defRPr>
             </a:lvl6pPr>
             <a:lvl7pPr>
+              <a:buNone/>
               <a:defRPr sz="2550" b="1">
                 <a:solidFill>
                   <a:srgbClr val="17333E"/>
@@ -12062,6 +13147,7 @@
               </a:defRPr>
             </a:lvl7pPr>
             <a:lvl8pPr>
+              <a:buNone/>
               <a:defRPr sz="2550" b="1">
                 <a:solidFill>
                   <a:srgbClr val="17333E"/>
@@ -12072,6 +13158,7 @@
               </a:defRPr>
             </a:lvl8pPr>
             <a:lvl9pPr>
+              <a:buNone/>
               <a:defRPr sz="2550" b="1">
                 <a:solidFill>
                   <a:srgbClr val="17333E"/>
@@ -12084,6 +13171,7 @@
           </a:lstStyle>
           <a:p xmlns:a="http://schemas.openxmlformats.org/drawingml/2006/main">
             <a:pPr>
+              <a:buNone/>
               <a:defRPr sz="2550" b="1">
                 <a:solidFill>
                   <a:srgbClr val="17333E"/>
@@ -12148,6 +13236,7 @@
               </a:defRPr>
             </a:defPPr>
             <a:lvl1pPr>
+              <a:buNone/>
               <a:defRPr sz="2250" b="0">
                 <a:solidFill>
                   <a:srgbClr val="17333E"/>
@@ -12158,6 +13247,7 @@
               </a:defRPr>
             </a:lvl1pPr>
             <a:lvl2pPr>
+              <a:buNone/>
               <a:defRPr sz="2250" b="0">
                 <a:solidFill>
                   <a:srgbClr val="17333E"/>
@@ -12168,6 +13258,7 @@
               </a:defRPr>
             </a:lvl2pPr>
             <a:lvl3pPr>
+              <a:buNone/>
               <a:defRPr sz="2250" b="0">
                 <a:solidFill>
                   <a:srgbClr val="17333E"/>
@@ -12178,6 +13269,7 @@
               </a:defRPr>
             </a:lvl3pPr>
             <a:lvl4pPr>
+              <a:buNone/>
               <a:defRPr sz="2250" b="0">
                 <a:solidFill>
                   <a:srgbClr val="17333E"/>
@@ -12188,6 +13280,7 @@
               </a:defRPr>
             </a:lvl4pPr>
             <a:lvl5pPr>
+              <a:buNone/>
               <a:defRPr sz="2250" b="0">
                 <a:solidFill>
                   <a:srgbClr val="17333E"/>
@@ -12198,6 +13291,7 @@
               </a:defRPr>
             </a:lvl5pPr>
             <a:lvl6pPr>
+              <a:buNone/>
               <a:defRPr sz="2250" b="0">
                 <a:solidFill>
                   <a:srgbClr val="17333E"/>
@@ -12208,6 +13302,7 @@
               </a:defRPr>
             </a:lvl6pPr>
             <a:lvl7pPr>
+              <a:buNone/>
               <a:defRPr sz="2250" b="0">
                 <a:solidFill>
                   <a:srgbClr val="17333E"/>
@@ -12218,6 +13313,7 @@
               </a:defRPr>
             </a:lvl7pPr>
             <a:lvl8pPr>
+              <a:buNone/>
               <a:defRPr sz="2250" b="0">
                 <a:solidFill>
                   <a:srgbClr val="17333E"/>
@@ -12228,6 +13324,7 @@
               </a:defRPr>
             </a:lvl8pPr>
             <a:lvl9pPr>
+              <a:buNone/>
               <a:defRPr sz="2250" b="0">
                 <a:solidFill>
                   <a:srgbClr val="17333E"/>
@@ -12240,6 +13337,7 @@
           </a:lstStyle>
           <a:p xmlns:a="http://schemas.openxmlformats.org/drawingml/2006/main">
             <a:pPr>
+              <a:buNone/>
               <a:defRPr sz="2250" b="0">
                 <a:solidFill>
                   <a:srgbClr val="17333E"/>
@@ -12263,6 +13361,7 @@
           </a:p>
           <a:p xmlns:a="http://schemas.openxmlformats.org/drawingml/2006/main">
             <a:pPr>
+              <a:buNone/>
               <a:defRPr sz="2250" b="0">
                 <a:solidFill>
                   <a:srgbClr val="17333E"/>
